--- a/out/phase5/final-20-pages/deck.pptx
+++ b/out/phase5/final-20-pages/deck.pptx
@@ -4008,7 +4008,7 @@
                 <a:latin typeface="Barlow Medium"/>
                 <a:ea typeface="Noto Sans JP Medium"/>
               </a:rPr>
-              <a:t>日程づくりを</a:t>
+              <a:t>日程づくり</a:t>
             </a:r>
             <a:endParaRPr lang="ja-JP" altLang="en-US" sz="1350" b="0" dirty="0"/>
           </a:p>
@@ -4049,7 +4049,7 @@
                 <a:latin typeface="Barlow Medium"/>
                 <a:ea typeface="Noto Sans JP Medium"/>
               </a:rPr>
-              <a:t>誰でも組める</a:t>
+              <a:t>誰でもできる</a:t>
             </a:r>
             <a:endParaRPr lang="ja-JP" altLang="en-US" sz="1700" b="0" dirty="0"/>
           </a:p>
@@ -4182,7 +4182,7 @@
                 <a:latin typeface="Barlow"/>
                 <a:ea typeface="Noto Sans JP"/>
               </a:rPr>
-              <a:t>回る仕事に変える3年間の計画</a:t>
+              <a:t>回る仕事へ変える3年間の計画</a:t>
             </a:r>
             <a:endParaRPr lang="ja-JP" altLang="en-US" sz="1500" b="1" dirty="0"/>
           </a:p>
@@ -4410,7 +4410,7 @@
                 <a:latin typeface="Barlow"/>
                 <a:ea typeface="Noto Sans JP"/>
               </a:rPr>
-              <a:t>Contents</a:t>
+              <a:t>CONTENTS</a:t>
             </a:r>
             <a:endParaRPr lang="ja-JP" altLang="en-US" sz="2050" b="0" dirty="0" spc="400"/>
           </a:p>
@@ -5488,7 +5488,65 @@
                 <a:latin typeface="Noto Serif JP"/>
                 <a:ea typeface="Noto Serif JP"/>
               </a:rPr>
-              <a:t>受注から出荷までの流れ</a:t>
+              <a:t>受注から出荷まで、</a:t>
+            </a:r>
+            <a:endParaRPr lang="ja-JP" altLang="en-US" sz="3250" b="0" dirty="0"/>
+          </a:p>
+          <a:p>
+            <a:pPr algn="l" eaLnBrk="1" hangingPunct="1" latinLnBrk="0">
+              <a:lnSpc>
+                <a:spcPts val="4000"/>
+              </a:lnSpc>
+            </a:pPr>
+            <a:r>
+              <a:rPr lang="ja-JP" altLang="en-US" sz="3250" b="0">
+                <a:solidFill>
+                  <a:schemeClr val="tx1"/>
+                </a:solidFill>
+                <a:latin typeface="Noto Serif JP"/>
+                <a:ea typeface="Noto Serif JP"/>
+              </a:rPr>
+              <a:t>すべて</a:t>
+            </a:r>
+            <a:r>
+              <a:rPr lang="ja-JP" altLang="en-US" sz="3250" b="1" u="heavy">
+                <a:solidFill>
+                  <a:schemeClr val="tx1"/>
+                </a:solidFill>
+                <a:uFill>
+                  <a:solidFill>
+                    <a:schemeClr val="accent2"/>
+                  </a:solidFill>
+                </a:uFill>
+                <a:latin typeface="Noto Serif JP"/>
+                <a:ea typeface="Noto Serif JP"/>
+              </a:rPr>
+              <a:t>紙</a:t>
+            </a:r>
+            <a:r>
+              <a:rPr lang="ja-JP" altLang="en-US" sz="3250" b="0">
+                <a:solidFill>
+                  <a:schemeClr val="tx1"/>
+                </a:solidFill>
+                <a:latin typeface="Noto Serif JP"/>
+                <a:ea typeface="Noto Serif JP"/>
+              </a:rPr>
+              <a:t>と</a:t>
+            </a:r>
+            <a:r>
+              <a:rPr lang="ja-JP" altLang="en-US" sz="3250" b="1" u="heavy">
+                <a:solidFill>
+                  <a:schemeClr val="tx1"/>
+                </a:solidFill>
+                <a:uFill>
+                  <a:solidFill>
+                    <a:schemeClr val="accent2"/>
+                  </a:solidFill>
+                </a:uFill>
+                <a:latin typeface="Noto Serif JP"/>
+                <a:ea typeface="Noto Serif JP"/>
+              </a:rPr>
+              <a:t>手書き</a:t>
             </a:r>
             <a:endParaRPr lang="ja-JP" altLang="en-US" sz="3250" b="0" dirty="0"/>
           </a:p>
@@ -5572,57 +5630,7 @@
                 <a:latin typeface="Barlow"/>
                 <a:ea typeface="Noto Sans JP"/>
               </a:rPr>
-              <a:t>受注は電話とファクスで受け、営業担当が</a:t>
-            </a:r>
-            <a:r>
-              <a:rPr lang="ja-JP" altLang="en-US" sz="1500" b="1" u="heavy">
-                <a:solidFill>
-                  <a:schemeClr val="tx1"/>
-                </a:solidFill>
-                <a:uFill>
-                  <a:solidFill>
-                    <a:schemeClr val="accent2"/>
-                  </a:solidFill>
-                </a:uFill>
-                <a:latin typeface="Barlow"/>
-                <a:ea typeface="Noto Sans JP"/>
-              </a:rPr>
-              <a:t>紙の指示書</a:t>
-            </a:r>
-            <a:r>
-              <a:rPr lang="ja-JP" altLang="en-US" sz="1500" b="0">
-                <a:solidFill>
-                  <a:schemeClr val="tx1"/>
-                </a:solidFill>
-                <a:latin typeface="Barlow"/>
-                <a:ea typeface="Noto Sans JP"/>
-              </a:rPr>
-              <a:t>を作ります。指示書は工場に回り、班長が</a:t>
-            </a:r>
-            <a:r>
-              <a:rPr lang="ja-JP" altLang="en-US" sz="1500" b="1" u="heavy">
-                <a:solidFill>
-                  <a:schemeClr val="tx1"/>
-                </a:solidFill>
-                <a:uFill>
-                  <a:solidFill>
-                    <a:schemeClr val="accent2"/>
-                  </a:solidFill>
-                </a:uFill>
-                <a:latin typeface="Barlow"/>
-                <a:ea typeface="Noto Sans JP"/>
-              </a:rPr>
-              <a:t>手書き</a:t>
-            </a:r>
-            <a:r>
-              <a:rPr lang="ja-JP" altLang="en-US" sz="1500" b="0">
-                <a:solidFill>
-                  <a:schemeClr val="tx1"/>
-                </a:solidFill>
-                <a:latin typeface="Barlow"/>
-                <a:ea typeface="Noto Sans JP"/>
-              </a:rPr>
-              <a:t>で日程を組みます。</a:t>
+              <a:t>受注は電話とファクスで受け、営業担当が紙の指示書を作ります。指示書は工場に回り、班長が手書きで日程を組んでいます。</a:t>
             </a:r>
             <a:endParaRPr lang="ja-JP" altLang="en-US" sz="1500" b="0" dirty="0"/>
           </a:p>
@@ -5847,7 +5855,7 @@
                 <a:latin typeface="Barlow"/>
                 <a:ea typeface="Noto Sans JP"/>
               </a:rPr>
-              <a:t>Issues</a:t>
+              <a:t>PROBLEMS</a:t>
             </a:r>
             <a:endParaRPr lang="ja-JP" altLang="en-US" sz="2050" b="0" dirty="0" spc="400"/>
           </a:p>
@@ -6224,7 +6232,7 @@
                 <a:latin typeface="Barlow"/>
                 <a:ea typeface="Noto Sans JP"/>
               </a:rPr>
-              <a:t>後から条件を追えない</a:t>
+              <a:t>条件を後から追えない</a:t>
             </a:r>
             <a:endParaRPr lang="ja-JP" altLang="en-US" sz="1200" b="1" dirty="0"/>
           </a:p>
@@ -6539,7 +6547,7 @@
                 <a:latin typeface="Barlow"/>
                 <a:ea typeface="Noto Sans JP"/>
               </a:rPr>
-              <a:t>必要な量の2倍近くある</a:t>
+              <a:t>必要な量の2倍近く</a:t>
             </a:r>
             <a:endParaRPr lang="ja-JP" altLang="en-US" sz="1200" b="1" dirty="0"/>
           </a:p>
@@ -6965,7 +6973,7 @@
                 <a:latin typeface="Barlow"/>
                 <a:ea typeface="Noto Sans JP"/>
               </a:rPr>
-              <a:t>Status</a:t>
+              <a:t>TODAY</a:t>
             </a:r>
             <a:endParaRPr lang="ja-JP" altLang="en-US" sz="2050" b="0" dirty="0" spc="400"/>
           </a:p>
@@ -7213,7 +7221,7 @@
                 <a:latin typeface="Barlow"/>
                 <a:ea typeface="Noto Sans JP"/>
               </a:rPr>
-              <a:t>機械が動いている割合</a:t>
+              <a:t>3年後の目標は80%</a:t>
             </a:r>
             <a:endParaRPr lang="ja-JP" altLang="en-US" sz="1500" b="1" dirty="0"/>
           </a:p>
@@ -7420,7 +7428,7 @@
                 <a:latin typeface="Barlow"/>
                 <a:ea typeface="Noto Sans JP"/>
               </a:rPr>
-              <a:t>不良品が出る割合</a:t>
+              <a:t>3年後の目標は1.5%</a:t>
             </a:r>
             <a:endParaRPr lang="ja-JP" altLang="en-US" sz="1500" b="1" dirty="0"/>
           </a:p>
@@ -7461,7 +7469,7 @@
                 <a:latin typeface="Barlow"/>
                 <a:ea typeface="Noto Sans JP"/>
               </a:rPr>
-              <a:t>納期遅れ</a:t>
+              <a:t>月の納期遅れ</a:t>
             </a:r>
             <a:endParaRPr lang="ja-JP" altLang="en-US" sz="2300" b="1" dirty="0"/>
           </a:p>
@@ -7627,7 +7635,7 @@
                 <a:latin typeface="Barlow"/>
                 <a:ea typeface="Noto Sans JP"/>
               </a:rPr>
-              <a:t>月あたりの件数</a:t>
+              <a:t>3年後の目標は月2件</a:t>
             </a:r>
             <a:endParaRPr lang="ja-JP" altLang="en-US" sz="1500" b="1" dirty="0"/>
           </a:p>
@@ -7668,7 +7676,7 @@
                 <a:latin typeface="Barlow"/>
                 <a:ea typeface="Noto Sans JP"/>
               </a:rPr>
-              <a:t>いずれも現在の工場の実績。</a:t>
+              <a:t>従業員85名、受注の8割が自動車部品の金属部品加工工場の現状です。</a:t>
             </a:r>
             <a:endParaRPr lang="ja-JP" altLang="en-US" sz="1300" b="1" dirty="0"/>
           </a:p>
@@ -7919,7 +7927,7 @@
       <p:grpSpPr/>
       <p:pic>
         <p:nvPicPr>
-          <p:cNvPr id="2" name="img.side" descr="左の写真"/>
+          <p:cNvPr id="2" name="img.hero" descr="注意のページの写真"/>
           <p:cNvPicPr>
             <a:picLocks noChangeAspect="1"/>
           </p:cNvPicPr>
@@ -7935,23 +7943,7 @@
         <p:spPr>
           <a:xfrm>
             <a:off x="0" y="0"/>
-            <a:ext cx="3035300" cy="6858000"/>
-          </a:xfrm>
-          <a:prstGeom prst="rect">
-            <a:avLst/>
-          </a:prstGeom>
-        </p:spPr>
-      </p:pic>
-      <p:sp>
-        <p:nvSpPr>
-          <p:cNvPr id="3" name="deco.side-tri-1"/>
-          <p:cNvSpPr/>
-          <p:nvPr/>
-        </p:nvSpPr>
-        <p:spPr>
-          <a:xfrm>
-            <a:off x="0" y="-323850"/>
-            <a:ext cx="3035300" cy="3035300"/>
+            <a:ext cx="8331200" cy="6858000"/>
           </a:xfrm>
           <a:custGeom>
             <a:avLst/>
@@ -7960,40 +7952,38 @@
             <a:cxnLst/>
             <a:rect l="l" t="t" r="r" b="b"/>
             <a:pathLst>
-              <a:path w="3035300" h="3035300">
+              <a:path w="8331200" h="6858000">
                 <a:moveTo>
-                  <a:pt x="0" y="3035300"/>
+                  <a:pt x="5308600" y="0"/>
                 </a:moveTo>
                 <a:lnTo>
-                  <a:pt x="3035300" y="0"/>
-                </a:lnTo>
-                <a:lnTo>
-                  <a:pt x="3035300" y="3035300"/>
+                  <a:pt x="8331200" y="0"/>
+                </a:lnTo>
+                <a:lnTo>
+                  <a:pt x="1473200" y="6858000"/>
+                </a:lnTo>
+                <a:lnTo>
+                  <a:pt x="0" y="6858000"/>
+                </a:lnTo>
+                <a:lnTo>
+                  <a:pt x="0" y="5302250"/>
                 </a:lnTo>
                 <a:close/>
               </a:path>
             </a:pathLst>
           </a:custGeom>
-          <a:solidFill>
-            <a:schemeClr val="accent1">
-              <a:alpha val="88000"/>
-            </a:schemeClr>
-          </a:solidFill>
-          <a:ln>
-            <a:noFill/>
-          </a:ln>
-        </p:spPr>
-      </p:sp>
-      <p:sp>
-        <p:nvSpPr>
-          <p:cNvPr id="4" name="deco.side-tri-2"/>
+        </p:spPr>
+      </p:pic>
+      <p:sp>
+        <p:nvSpPr>
+          <p:cNvPr id="3" name="deco.line-yellow"/>
           <p:cNvSpPr/>
           <p:nvPr/>
         </p:nvSpPr>
         <p:spPr>
           <a:xfrm>
-            <a:off x="0" y="2698750"/>
-            <a:ext cx="3035300" cy="3035300"/>
+            <a:off x="1606550" y="2082800"/>
+            <a:ext cx="1418590" cy="1263650"/>
           </a:xfrm>
           <a:custGeom>
             <a:avLst/>
@@ -8002,102 +7992,18 @@
             <a:cxnLst/>
             <a:rect l="l" t="t" r="r" b="b"/>
             <a:pathLst>
-              <a:path w="3035300" h="3035300">
+              <a:path w="1418590" h="1263650">
                 <a:moveTo>
-                  <a:pt x="0" y="0"/>
+                  <a:pt x="0" y="1263650"/>
                 </a:moveTo>
                 <a:lnTo>
-                  <a:pt x="3035300" y="0"/>
-                </a:lnTo>
-                <a:lnTo>
-                  <a:pt x="0" y="3035300"/>
-                </a:lnTo>
-                <a:close/>
-              </a:path>
-            </a:pathLst>
-          </a:custGeom>
-          <a:solidFill>
-            <a:schemeClr val="accent1">
-              <a:alpha val="88000"/>
-            </a:schemeClr>
-          </a:solidFill>
-          <a:ln>
-            <a:noFill/>
-          </a:ln>
-        </p:spPr>
-      </p:sp>
-      <p:sp>
-        <p:nvSpPr>
-          <p:cNvPr id="5" name="deco.side-tri-3"/>
-          <p:cNvSpPr/>
-          <p:nvPr/>
-        </p:nvSpPr>
-        <p:spPr>
-          <a:xfrm>
-            <a:off x="990600" y="4832350"/>
-            <a:ext cx="2044700" cy="2044700"/>
-          </a:xfrm>
-          <a:custGeom>
-            <a:avLst/>
-            <a:gdLst/>
-            <a:ahLst/>
-            <a:cxnLst/>
-            <a:rect l="l" t="t" r="r" b="b"/>
-            <a:pathLst>
-              <a:path w="2044700" h="2044700">
-                <a:moveTo>
-                  <a:pt x="0" y="2044700"/>
-                </a:moveTo>
-                <a:lnTo>
-                  <a:pt x="2044700" y="0"/>
-                </a:lnTo>
-                <a:lnTo>
-                  <a:pt x="2044700" y="2044700"/>
-                </a:lnTo>
-                <a:close/>
-              </a:path>
-            </a:pathLst>
-          </a:custGeom>
-          <a:solidFill>
-            <a:schemeClr val="accent1">
-              <a:alpha val="88000"/>
-            </a:schemeClr>
-          </a:solidFill>
-          <a:ln>
-            <a:noFill/>
-          </a:ln>
-        </p:spPr>
-      </p:sp>
-      <p:sp>
-        <p:nvSpPr>
-          <p:cNvPr id="6" name="deco.side-line"/>
-          <p:cNvSpPr/>
-          <p:nvPr/>
-        </p:nvSpPr>
-        <p:spPr>
-          <a:xfrm>
-            <a:off x="76200" y="1727200"/>
-            <a:ext cx="1244600" cy="1111250"/>
-          </a:xfrm>
-          <a:custGeom>
-            <a:avLst/>
-            <a:gdLst/>
-            <a:ahLst/>
-            <a:cxnLst/>
-            <a:rect l="l" t="t" r="r" b="b"/>
-            <a:pathLst>
-              <a:path w="1244600" h="1111250">
-                <a:moveTo>
-                  <a:pt x="0" y="1111250"/>
-                </a:moveTo>
-                <a:lnTo>
-                  <a:pt x="133350" y="1111250"/>
-                </a:lnTo>
-                <a:lnTo>
-                  <a:pt x="1244600" y="0"/>
-                </a:lnTo>
-                <a:lnTo>
-                  <a:pt x="1111250" y="0"/>
+                  <a:pt x="1263650" y="0"/>
+                </a:lnTo>
+                <a:lnTo>
+                  <a:pt x="1418590" y="0"/>
+                </a:lnTo>
+                <a:lnTo>
+                  <a:pt x="154940" y="1263650"/>
                 </a:lnTo>
                 <a:close/>
               </a:path>
@@ -8113,14 +8019,14 @@
       </p:sp>
       <p:sp>
         <p:nvSpPr>
-          <p:cNvPr id="7" name="deco.top-band"/>
+          <p:cNvPr id="4" name="deco.line-blue"/>
           <p:cNvSpPr/>
           <p:nvPr/>
         </p:nvSpPr>
         <p:spPr>
           <a:xfrm>
-            <a:off x="9455150" y="-482600"/>
-            <a:ext cx="3371850" cy="933450"/>
+            <a:off x="2117090" y="4464050"/>
+            <a:ext cx="2327910" cy="2073910"/>
           </a:xfrm>
           <a:custGeom>
             <a:avLst/>
@@ -8129,18 +8035,61 @@
             <a:cxnLst/>
             <a:rect l="l" t="t" r="r" b="b"/>
             <a:pathLst>
-              <a:path w="3371850" h="933450">
+              <a:path w="2327910" h="2073910">
                 <a:moveTo>
-                  <a:pt x="0" y="933450"/>
+                  <a:pt x="0" y="2073910"/>
                 </a:moveTo>
                 <a:lnTo>
-                  <a:pt x="933450" y="0"/>
-                </a:lnTo>
-                <a:lnTo>
-                  <a:pt x="3371850" y="0"/>
-                </a:lnTo>
-                <a:lnTo>
-                  <a:pt x="2444750" y="933450"/>
+                  <a:pt x="2073910" y="0"/>
+                </a:lnTo>
+                <a:lnTo>
+                  <a:pt x="2327910" y="0"/>
+                </a:lnTo>
+                <a:lnTo>
+                  <a:pt x="254000" y="2073910"/>
+                </a:lnTo>
+                <a:close/>
+              </a:path>
+            </a:pathLst>
+          </a:custGeom>
+          <a:solidFill>
+            <a:schemeClr val="accent1"/>
+          </a:solidFill>
+          <a:ln>
+            <a:noFill/>
+          </a:ln>
+        </p:spPr>
+      </p:sp>
+      <p:sp>
+        <p:nvSpPr>
+          <p:cNvPr id="5" name="deco.band"/>
+          <p:cNvSpPr/>
+          <p:nvPr/>
+        </p:nvSpPr>
+        <p:spPr>
+          <a:xfrm>
+            <a:off x="3686810" y="2209800"/>
+            <a:ext cx="8680450" cy="1070610"/>
+          </a:xfrm>
+          <a:custGeom>
+            <a:avLst/>
+            <a:gdLst/>
+            <a:ahLst/>
+            <a:cxnLst/>
+            <a:rect l="l" t="t" r="r" b="b"/>
+            <a:pathLst>
+              <a:path w="8680450" h="1070610">
+                <a:moveTo>
+                  <a:pt x="0" y="1070610"/>
+                </a:moveTo>
+                <a:lnTo>
+                  <a:pt x="1070610" y="0"/>
+                </a:lnTo>
+                <a:lnTo>
+                  <a:pt x="8680450" y="0"/>
+                </a:lnTo>
+                <a:lnTo>
+                  <a:pt x="8680450" y="1070610"/>
                 </a:lnTo>
                 <a:close/>
               </a:path>
@@ -8156,97 +8105,7 @@
       </p:sp>
       <p:sp>
         <p:nvSpPr>
-          <p:cNvPr id="8" name="deco.slant-plate"/>
-          <p:cNvSpPr/>
-          <p:nvPr/>
-        </p:nvSpPr>
-        <p:spPr>
-          <a:xfrm>
-            <a:off x="4819650" y="1689100"/>
-            <a:ext cx="6350000" cy="3384550"/>
-          </a:xfrm>
-          <a:custGeom>
-            <a:avLst/>
-            <a:gdLst/>
-            <a:ahLst/>
-            <a:cxnLst/>
-            <a:rect l="l" t="t" r="r" b="b"/>
-            <a:pathLst>
-              <a:path w="6350000" h="3384550">
-                <a:moveTo>
-                  <a:pt x="0" y="3384550"/>
-                </a:moveTo>
-                <a:lnTo>
-                  <a:pt x="3384550" y="0"/>
-                </a:lnTo>
-                <a:lnTo>
-                  <a:pt x="6350000" y="0"/>
-                </a:lnTo>
-                <a:lnTo>
-                  <a:pt x="2965450" y="3384550"/>
-                </a:lnTo>
-                <a:close/>
-              </a:path>
-            </a:pathLst>
-          </a:custGeom>
-          <a:solidFill>
-            <a:schemeClr val="bg2">
-              <a:alpha val="70000"/>
-            </a:schemeClr>
-          </a:solidFill>
-          <a:ln>
-            <a:noFill/>
-          </a:ln>
-        </p:spPr>
-      </p:sp>
-      <p:sp>
-        <p:nvSpPr>
-          <p:cNvPr id="9" name="deco.title-band"/>
-          <p:cNvSpPr/>
-          <p:nvPr/>
-        </p:nvSpPr>
-        <p:spPr>
-          <a:xfrm>
-            <a:off x="1377950" y="520700"/>
-            <a:ext cx="10731500" cy="1073150"/>
-          </a:xfrm>
-          <a:custGeom>
-            <a:avLst/>
-            <a:gdLst/>
-            <a:ahLst/>
-            <a:cxnLst/>
-            <a:rect l="l" t="t" r="r" b="b"/>
-            <a:pathLst>
-              <a:path w="10731500" h="1073150">
-                <a:moveTo>
-                  <a:pt x="0" y="1073150"/>
-                </a:moveTo>
-                <a:lnTo>
-                  <a:pt x="1066800" y="0"/>
-                </a:lnTo>
-                <a:lnTo>
-                  <a:pt x="10731500" y="0"/>
-                </a:lnTo>
-                <a:lnTo>
-                  <a:pt x="10731500" y="1073150"/>
-                </a:lnTo>
-                <a:close/>
-              </a:path>
-            </a:pathLst>
-          </a:custGeom>
-          <a:solidFill>
-            <a:schemeClr val="bg2">
-              <a:alpha val="92000"/>
-            </a:schemeClr>
-          </a:solidFill>
-          <a:ln>
-            <a:noFill/>
-          </a:ln>
-        </p:spPr>
-      </p:sp>
-      <p:sp>
-        <p:nvSpPr>
-          <p:cNvPr id="10" name="deco.end-triangle"/>
+          <p:cNvPr id="6" name="deco.end-triangle"/>
           <p:cNvSpPr/>
           <p:nvPr/>
         </p:nvSpPr>
@@ -8286,14 +8145,14 @@
       </p:sp>
       <p:sp>
         <p:nvSpPr>
-          <p:cNvPr id="11" name="txt.eyebrow"/>
+          <p:cNvPr id="7" name="txt.eyebrow"/>
           <p:cNvSpPr txBox="1"/>
           <p:nvPr/>
         </p:nvSpPr>
         <p:spPr>
           <a:xfrm rot="-2700000">
-            <a:off x="-431800" y="736600"/>
-            <a:ext cx="3048000" cy="711200"/>
+            <a:off x="-355600" y="1003300"/>
+            <a:ext cx="3048000" cy="330200"/>
           </a:xfrm>
           <a:prstGeom prst="rect">
             <a:avLst/>
@@ -8314,12 +8173,12 @@
             <a:r>
               <a:rPr lang="ja-JP" altLang="en-US" sz="2050" b="0" spc="400">
                 <a:solidFill>
-                  <a:schemeClr val="bg1"/>
+                  <a:schemeClr val="tx1"/>
                 </a:solidFill>
                 <a:latin typeface="Barlow"/>
                 <a:ea typeface="Noto Sans JP"/>
               </a:rPr>
-              <a:t>Goals</a:t>
+              <a:t>Our Vision</a:t>
             </a:r>
             <a:endParaRPr lang="ja-JP" altLang="en-US" sz="2050" b="0" dirty="0" spc="400"/>
           </a:p>
@@ -8327,14 +8186,14 @@
       </p:sp>
       <p:sp>
         <p:nvSpPr>
-          <p:cNvPr id="12" name="txt.headline"/>
+          <p:cNvPr id="8" name="txt.headline"/>
           <p:cNvSpPr txBox="1"/>
           <p:nvPr/>
         </p:nvSpPr>
         <p:spPr>
           <a:xfrm>
-            <a:off x="3416300" y="660400"/>
-            <a:ext cx="8382000" cy="787400"/>
+            <a:off x="4978400" y="2362200"/>
+            <a:ext cx="7112000" cy="762000"/>
           </a:xfrm>
           <a:prstGeom prst="rect">
             <a:avLst/>
@@ -8353,14 +8212,29 @@
               </a:lnSpc>
             </a:pPr>
             <a:r>
-              <a:rPr lang="ja-JP" altLang="en-US" sz="3250" b="0">
+              <a:rPr lang="ja-JP" altLang="en-US" sz="3250" b="1" u="heavy">
                 <a:solidFill>
                   <a:schemeClr val="tx1"/>
                 </a:solidFill>
+                <a:uFill>
+                  <a:solidFill>
+                    <a:schemeClr val="accent2"/>
+                  </a:solidFill>
+                </a:uFill>
                 <a:latin typeface="Noto Serif JP"/>
                 <a:ea typeface="Noto Serif JP"/>
               </a:rPr>
-              <a:t>3年後の目標</a:t>
+              <a:t>誰でも</a:t>
+            </a:r>
+            <a:r>
+              <a:rPr lang="ja-JP" altLang="en-US" sz="3250" b="0">
+                <a:solidFill>
+                  <a:schemeClr val="tx1"/>
+                </a:solidFill>
+                <a:latin typeface="Noto Serif JP"/>
+                <a:ea typeface="Noto Serif JP"/>
+              </a:rPr>
+              <a:t>工場の状態がすぐ分かる</a:t>
             </a:r>
             <a:endParaRPr lang="ja-JP" altLang="en-US" sz="3250" b="0" dirty="0"/>
           </a:p>
@@ -8368,14 +8242,14 @@
       </p:sp>
       <p:sp>
         <p:nvSpPr>
-          <p:cNvPr id="13" name="txt.label.1"/>
+          <p:cNvPr id="9" name="txt.body"/>
           <p:cNvSpPr txBox="1"/>
           <p:nvPr/>
         </p:nvSpPr>
         <p:spPr>
           <a:xfrm>
-            <a:off x="3765550" y="2286000"/>
-            <a:ext cx="2286000" cy="406400"/>
+            <a:off x="5232400" y="3810000"/>
+            <a:ext cx="6350000" cy="1320800"/>
           </a:xfrm>
           <a:prstGeom prst="rect">
             <a:avLst/>
@@ -8390,641 +8264,45 @@
           <a:p>
             <a:pPr algn="l" eaLnBrk="1" hangingPunct="1" latinLnBrk="0">
               <a:lnSpc>
-                <a:spcPts val="3000"/>
+                <a:spcPts val="2600"/>
               </a:lnSpc>
             </a:pPr>
             <a:r>
-              <a:rPr lang="ja-JP" altLang="en-US" sz="2300" b="1">
+              <a:rPr lang="ja-JP" altLang="en-US" sz="1600" b="0">
                 <a:solidFill>
                   <a:schemeClr val="tx1"/>
                 </a:solidFill>
-                <a:latin typeface="Barlow"/>
-                <a:ea typeface="Noto Sans JP"/>
+                <a:latin typeface="Barlow Medium"/>
+                <a:ea typeface="Noto Sans JP Medium"/>
               </a:rPr>
-              <a:t>設備の稼働率</a:t>
-            </a:r>
-            <a:endParaRPr lang="ja-JP" altLang="en-US" sz="2300" b="1" dirty="0"/>
-          </a:p>
-        </p:txBody>
-      </p:sp>
-      <p:sp>
-        <p:nvSpPr>
-          <p:cNvPr id="14" name="num.value.1"/>
-          <p:cNvSpPr txBox="1"/>
-          <p:nvPr/>
-        </p:nvSpPr>
-        <p:spPr>
-          <a:xfrm>
-            <a:off x="3765550" y="2692400"/>
-            <a:ext cx="2489200" cy="1320800"/>
-          </a:xfrm>
-          <a:prstGeom prst="rect">
-            <a:avLst/>
-          </a:prstGeom>
-          <a:noFill/>
-        </p:spPr>
-        <p:txBody>
-          <a:bodyPr wrap="square" lIns="0" tIns="0" rIns="0" bIns="0" anchor="t" rtlCol="0">
-            <a:noAutofit/>
-          </a:bodyPr>
-          <a:lstStyle/>
-          <a:p>
-            <a:pPr algn="l" eaLnBrk="1" hangingPunct="1" latinLnBrk="0">
-              <a:lnSpc>
-                <a:spcPts val="10400"/>
-              </a:lnSpc>
-            </a:pPr>
-            <a:r>
-              <a:rPr lang="ja-JP" altLang="en-US" sz="9900" b="0">
+              <a:t>3年後には、受注から出荷までの情報がすべて</a:t>
+            </a:r>
+            <a:r>
+              <a:rPr lang="ja-JP" altLang="en-US" sz="1600" b="1" u="heavy">
                 <a:solidFill>
                   <a:schemeClr val="tx1"/>
                 </a:solidFill>
-                <a:latin typeface="Barlow"/>
-                <a:ea typeface="Noto Sans JP"/>
+                <a:uFill>
+                  <a:solidFill>
+                    <a:schemeClr val="accent2"/>
+                  </a:solidFill>
+                </a:uFill>
+                <a:latin typeface="Barlow Medium"/>
+                <a:ea typeface="Noto Sans JP Medium"/>
               </a:rPr>
-              <a:t>80</a:t>
-            </a:r>
-            <a:endParaRPr lang="ja-JP" altLang="en-US" sz="9900" b="0" dirty="0"/>
-          </a:p>
-        </p:txBody>
-      </p:sp>
-      <p:sp>
-        <p:nvSpPr>
-          <p:cNvPr id="15" name="deco.value-1-rule"/>
-          <p:cNvSpPr/>
-          <p:nvPr/>
-        </p:nvSpPr>
-        <p:spPr>
-          <a:xfrm>
-            <a:off x="3708400" y="3848100"/>
-            <a:ext cx="1854200" cy="95250"/>
-          </a:xfrm>
-          <a:custGeom>
-            <a:avLst/>
-            <a:gdLst/>
-            <a:ahLst/>
-            <a:cxnLst/>
-            <a:rect l="l" t="t" r="r" b="b"/>
-            <a:pathLst>
-              <a:path w="1854200" h="95250">
-                <a:moveTo>
-                  <a:pt x="0" y="95250"/>
-                </a:moveTo>
-                <a:lnTo>
-                  <a:pt x="1854200" y="95250"/>
-                </a:lnTo>
-                <a:lnTo>
-                  <a:pt x="1765300" y="0"/>
-                </a:lnTo>
-                <a:lnTo>
-                  <a:pt x="95250" y="0"/>
-                </a:lnTo>
-                <a:close/>
-              </a:path>
-            </a:pathLst>
-          </a:custGeom>
-          <a:solidFill>
-            <a:schemeClr val="accent2"/>
-          </a:solidFill>
-          <a:ln>
-            <a:noFill/>
-          </a:ln>
-        </p:spPr>
-      </p:sp>
-      <p:sp>
-        <p:nvSpPr>
-          <p:cNvPr id="16" name="txt.unit.1"/>
-          <p:cNvSpPr txBox="1"/>
-          <p:nvPr/>
-        </p:nvSpPr>
-        <p:spPr>
-          <a:xfrm>
-            <a:off x="3765550" y="3962400"/>
-            <a:ext cx="1797050" cy="355600"/>
-          </a:xfrm>
-          <a:prstGeom prst="rect">
-            <a:avLst/>
-          </a:prstGeom>
-          <a:noFill/>
-        </p:spPr>
-        <p:txBody>
-          <a:bodyPr wrap="square" lIns="0" tIns="0" rIns="0" bIns="0" anchor="t" rtlCol="0">
-            <a:noAutofit/>
-          </a:bodyPr>
-          <a:lstStyle/>
-          <a:p>
-            <a:pPr algn="r" eaLnBrk="1" hangingPunct="1" latinLnBrk="0">
-              <a:lnSpc>
-                <a:spcPts val="2800"/>
-              </a:lnSpc>
-            </a:pPr>
-            <a:r>
-              <a:rPr lang="ja-JP" altLang="en-US" sz="2300" b="1">
+              <a:t>1つの仕組み</a:t>
+            </a:r>
+            <a:r>
+              <a:rPr lang="ja-JP" altLang="en-US" sz="1600" b="0">
                 <a:solidFill>
                   <a:schemeClr val="tx1"/>
                 </a:solidFill>
-                <a:latin typeface="Barlow"/>
-                <a:ea typeface="Noto Sans JP"/>
+                <a:latin typeface="Barlow Medium"/>
+                <a:ea typeface="Noto Sans JP Medium"/>
               </a:rPr>
-              <a:t>%</a:t>
-            </a:r>
-            <a:endParaRPr lang="ja-JP" altLang="en-US" sz="2300" b="1" dirty="0"/>
-          </a:p>
-        </p:txBody>
-      </p:sp>
-      <p:sp>
-        <p:nvSpPr>
-          <p:cNvPr id="17" name="txt.note.1"/>
-          <p:cNvSpPr txBox="1"/>
-          <p:nvPr/>
-        </p:nvSpPr>
-        <p:spPr>
-          <a:xfrm>
-            <a:off x="3841750" y="4368800"/>
-            <a:ext cx="2286000" cy="584200"/>
-          </a:xfrm>
-          <a:prstGeom prst="rect">
-            <a:avLst/>
-          </a:prstGeom>
-          <a:noFill/>
-        </p:spPr>
-        <p:txBody>
-          <a:bodyPr wrap="square" lIns="0" tIns="0" rIns="0" bIns="0" anchor="t" rtlCol="0">
-            <a:noAutofit/>
-          </a:bodyPr>
-          <a:lstStyle/>
-          <a:p>
-            <a:pPr algn="l" eaLnBrk="1" hangingPunct="1" latinLnBrk="0">
-              <a:lnSpc>
-                <a:spcPts val="2200"/>
-              </a:lnSpc>
-            </a:pPr>
-            <a:r>
-              <a:rPr lang="ja-JP" altLang="en-US" sz="1500" b="1">
-                <a:solidFill>
-                  <a:schemeClr val="tx1"/>
-                </a:solidFill>
-                <a:latin typeface="Barlow"/>
-                <a:ea typeface="Noto Sans JP"/>
-              </a:rPr>
-              <a:t>今の62%から引き上げる</a:t>
-            </a:r>
-            <a:endParaRPr lang="ja-JP" altLang="en-US" sz="1500" b="1" dirty="0"/>
-          </a:p>
-        </p:txBody>
-      </p:sp>
-      <p:sp>
-        <p:nvSpPr>
-          <p:cNvPr id="18" name="txt.label.2"/>
-          <p:cNvSpPr txBox="1"/>
-          <p:nvPr/>
-        </p:nvSpPr>
-        <p:spPr>
-          <a:xfrm>
-            <a:off x="6318250" y="2286000"/>
-            <a:ext cx="2286000" cy="406400"/>
-          </a:xfrm>
-          <a:prstGeom prst="rect">
-            <a:avLst/>
-          </a:prstGeom>
-          <a:noFill/>
-        </p:spPr>
-        <p:txBody>
-          <a:bodyPr wrap="square" lIns="0" tIns="0" rIns="0" bIns="0" anchor="t" rtlCol="0">
-            <a:noAutofit/>
-          </a:bodyPr>
-          <a:lstStyle/>
-          <a:p>
-            <a:pPr algn="l" eaLnBrk="1" hangingPunct="1" latinLnBrk="0">
-              <a:lnSpc>
-                <a:spcPts val="3000"/>
-              </a:lnSpc>
-            </a:pPr>
-            <a:r>
-              <a:rPr lang="ja-JP" altLang="en-US" sz="2300" b="1">
-                <a:solidFill>
-                  <a:schemeClr val="tx1"/>
-                </a:solidFill>
-                <a:latin typeface="Barlow"/>
-                <a:ea typeface="Noto Sans JP"/>
-              </a:rPr>
-              <a:t>不良率</a:t>
-            </a:r>
-            <a:endParaRPr lang="ja-JP" altLang="en-US" sz="2300" b="1" dirty="0"/>
-          </a:p>
-        </p:txBody>
-      </p:sp>
-      <p:sp>
-        <p:nvSpPr>
-          <p:cNvPr id="19" name="num.value.2"/>
-          <p:cNvSpPr txBox="1"/>
-          <p:nvPr/>
-        </p:nvSpPr>
-        <p:spPr>
-          <a:xfrm>
-            <a:off x="6318250" y="2692400"/>
-            <a:ext cx="3276600" cy="1320800"/>
-          </a:xfrm>
-          <a:prstGeom prst="rect">
-            <a:avLst/>
-          </a:prstGeom>
-          <a:noFill/>
-        </p:spPr>
-        <p:txBody>
-          <a:bodyPr wrap="square" lIns="0" tIns="0" rIns="0" bIns="0" anchor="t" rtlCol="0">
-            <a:noAutofit/>
-          </a:bodyPr>
-          <a:lstStyle/>
-          <a:p>
-            <a:pPr algn="l" eaLnBrk="1" hangingPunct="1" latinLnBrk="0">
-              <a:lnSpc>
-                <a:spcPts val="10400"/>
-              </a:lnSpc>
-            </a:pPr>
-            <a:r>
-              <a:rPr lang="ja-JP" altLang="en-US" sz="9900" b="0">
-                <a:solidFill>
-                  <a:schemeClr val="tx1"/>
-                </a:solidFill>
-                <a:latin typeface="Barlow"/>
-                <a:ea typeface="Noto Sans JP"/>
-              </a:rPr>
-              <a:t>1.5</a:t>
-            </a:r>
-            <a:endParaRPr lang="ja-JP" altLang="en-US" sz="9900" b="0" dirty="0"/>
-          </a:p>
-        </p:txBody>
-      </p:sp>
-      <p:sp>
-        <p:nvSpPr>
-          <p:cNvPr id="20" name="deco.value-2-rule"/>
-          <p:cNvSpPr/>
-          <p:nvPr/>
-        </p:nvSpPr>
-        <p:spPr>
-          <a:xfrm>
-            <a:off x="6261100" y="3848100"/>
-            <a:ext cx="1854200" cy="95250"/>
-          </a:xfrm>
-          <a:custGeom>
-            <a:avLst/>
-            <a:gdLst/>
-            <a:ahLst/>
-            <a:cxnLst/>
-            <a:rect l="l" t="t" r="r" b="b"/>
-            <a:pathLst>
-              <a:path w="1854200" h="95250">
-                <a:moveTo>
-                  <a:pt x="0" y="95250"/>
-                </a:moveTo>
-                <a:lnTo>
-                  <a:pt x="1854200" y="95250"/>
-                </a:lnTo>
-                <a:lnTo>
-                  <a:pt x="1765300" y="0"/>
-                </a:lnTo>
-                <a:lnTo>
-                  <a:pt x="95250" y="0"/>
-                </a:lnTo>
-                <a:close/>
-              </a:path>
-            </a:pathLst>
-          </a:custGeom>
-          <a:solidFill>
-            <a:schemeClr val="accent2"/>
-          </a:solidFill>
-          <a:ln>
-            <a:noFill/>
-          </a:ln>
-        </p:spPr>
-      </p:sp>
-      <p:sp>
-        <p:nvSpPr>
-          <p:cNvPr id="21" name="txt.unit.2"/>
-          <p:cNvSpPr txBox="1"/>
-          <p:nvPr/>
-        </p:nvSpPr>
-        <p:spPr>
-          <a:xfrm>
-            <a:off x="6318250" y="3962400"/>
-            <a:ext cx="1797050" cy="355600"/>
-          </a:xfrm>
-          <a:prstGeom prst="rect">
-            <a:avLst/>
-          </a:prstGeom>
-          <a:noFill/>
-        </p:spPr>
-        <p:txBody>
-          <a:bodyPr wrap="square" lIns="0" tIns="0" rIns="0" bIns="0" anchor="t" rtlCol="0">
-            <a:noAutofit/>
-          </a:bodyPr>
-          <a:lstStyle/>
-          <a:p>
-            <a:pPr algn="r" eaLnBrk="1" hangingPunct="1" latinLnBrk="0">
-              <a:lnSpc>
-                <a:spcPts val="2800"/>
-              </a:lnSpc>
-            </a:pPr>
-            <a:r>
-              <a:rPr lang="ja-JP" altLang="en-US" sz="2300" b="1">
-                <a:solidFill>
-                  <a:schemeClr val="tx1"/>
-                </a:solidFill>
-                <a:latin typeface="Barlow"/>
-                <a:ea typeface="Noto Sans JP"/>
-              </a:rPr>
-              <a:t>%</a:t>
-            </a:r>
-            <a:endParaRPr lang="ja-JP" altLang="en-US" sz="2300" b="1" dirty="0"/>
-          </a:p>
-        </p:txBody>
-      </p:sp>
-      <p:sp>
-        <p:nvSpPr>
-          <p:cNvPr id="22" name="txt.note.2"/>
-          <p:cNvSpPr txBox="1"/>
-          <p:nvPr/>
-        </p:nvSpPr>
-        <p:spPr>
-          <a:xfrm>
-            <a:off x="6394450" y="4368800"/>
-            <a:ext cx="2286000" cy="584200"/>
-          </a:xfrm>
-          <a:prstGeom prst="rect">
-            <a:avLst/>
-          </a:prstGeom>
-          <a:noFill/>
-        </p:spPr>
-        <p:txBody>
-          <a:bodyPr wrap="square" lIns="0" tIns="0" rIns="0" bIns="0" anchor="t" rtlCol="0">
-            <a:noAutofit/>
-          </a:bodyPr>
-          <a:lstStyle/>
-          <a:p>
-            <a:pPr algn="l" eaLnBrk="1" hangingPunct="1" latinLnBrk="0">
-              <a:lnSpc>
-                <a:spcPts val="2200"/>
-              </a:lnSpc>
-            </a:pPr>
-            <a:r>
-              <a:rPr lang="ja-JP" altLang="en-US" sz="1500" b="1">
-                <a:solidFill>
-                  <a:schemeClr val="tx1"/>
-                </a:solidFill>
-                <a:latin typeface="Barlow"/>
-                <a:ea typeface="Noto Sans JP"/>
-              </a:rPr>
-              <a:t>今の3.8%から減らす</a:t>
-            </a:r>
-            <a:endParaRPr lang="ja-JP" altLang="en-US" sz="1500" b="1" dirty="0"/>
-          </a:p>
-        </p:txBody>
-      </p:sp>
-      <p:sp>
-        <p:nvSpPr>
-          <p:cNvPr id="23" name="txt.label.3"/>
-          <p:cNvSpPr txBox="1"/>
-          <p:nvPr/>
-        </p:nvSpPr>
-        <p:spPr>
-          <a:xfrm>
-            <a:off x="9683750" y="2286000"/>
-            <a:ext cx="2286000" cy="406400"/>
-          </a:xfrm>
-          <a:prstGeom prst="rect">
-            <a:avLst/>
-          </a:prstGeom>
-          <a:noFill/>
-        </p:spPr>
-        <p:txBody>
-          <a:bodyPr wrap="square" lIns="0" tIns="0" rIns="0" bIns="0" anchor="t" rtlCol="0">
-            <a:noAutofit/>
-          </a:bodyPr>
-          <a:lstStyle/>
-          <a:p>
-            <a:pPr algn="l" eaLnBrk="1" hangingPunct="1" latinLnBrk="0">
-              <a:lnSpc>
-                <a:spcPts val="3000"/>
-              </a:lnSpc>
-            </a:pPr>
-            <a:r>
-              <a:rPr lang="ja-JP" altLang="en-US" sz="2300" b="1">
-                <a:solidFill>
-                  <a:schemeClr val="tx1"/>
-                </a:solidFill>
-                <a:latin typeface="Barlow"/>
-                <a:ea typeface="Noto Sans JP"/>
-              </a:rPr>
-              <a:t>月の納期遅れ</a:t>
-            </a:r>
-            <a:endParaRPr lang="ja-JP" altLang="en-US" sz="2300" b="1" dirty="0"/>
-          </a:p>
-        </p:txBody>
-      </p:sp>
-      <p:sp>
-        <p:nvSpPr>
-          <p:cNvPr id="24" name="num.value.3"/>
-          <p:cNvSpPr txBox="1"/>
-          <p:nvPr/>
-        </p:nvSpPr>
-        <p:spPr>
-          <a:xfrm>
-            <a:off x="9683750" y="2692400"/>
-            <a:ext cx="2413000" cy="1320800"/>
-          </a:xfrm>
-          <a:prstGeom prst="rect">
-            <a:avLst/>
-          </a:prstGeom>
-          <a:noFill/>
-        </p:spPr>
-        <p:txBody>
-          <a:bodyPr wrap="square" lIns="0" tIns="0" rIns="0" bIns="0" anchor="t" rtlCol="0">
-            <a:noAutofit/>
-          </a:bodyPr>
-          <a:lstStyle/>
-          <a:p>
-            <a:pPr algn="l" eaLnBrk="1" hangingPunct="1" latinLnBrk="0">
-              <a:lnSpc>
-                <a:spcPts val="10400"/>
-              </a:lnSpc>
-            </a:pPr>
-            <a:r>
-              <a:rPr lang="ja-JP" altLang="en-US" sz="9900" b="0">
-                <a:solidFill>
-                  <a:schemeClr val="tx1"/>
-                </a:solidFill>
-                <a:latin typeface="Barlow"/>
-                <a:ea typeface="Noto Sans JP"/>
-              </a:rPr>
-              <a:t>2</a:t>
-            </a:r>
-            <a:endParaRPr lang="ja-JP" altLang="en-US" sz="9900" b="0" dirty="0"/>
-          </a:p>
-        </p:txBody>
-      </p:sp>
-      <p:sp>
-        <p:nvSpPr>
-          <p:cNvPr id="25" name="deco.value-3-rule"/>
-          <p:cNvSpPr/>
-          <p:nvPr/>
-        </p:nvSpPr>
-        <p:spPr>
-          <a:xfrm>
-            <a:off x="9626600" y="3848100"/>
-            <a:ext cx="1854200" cy="95250"/>
-          </a:xfrm>
-          <a:custGeom>
-            <a:avLst/>
-            <a:gdLst/>
-            <a:ahLst/>
-            <a:cxnLst/>
-            <a:rect l="l" t="t" r="r" b="b"/>
-            <a:pathLst>
-              <a:path w="1854200" h="95250">
-                <a:moveTo>
-                  <a:pt x="0" y="95250"/>
-                </a:moveTo>
-                <a:lnTo>
-                  <a:pt x="1854200" y="95250"/>
-                </a:lnTo>
-                <a:lnTo>
-                  <a:pt x="1765300" y="0"/>
-                </a:lnTo>
-                <a:lnTo>
-                  <a:pt x="95250" y="0"/>
-                </a:lnTo>
-                <a:close/>
-              </a:path>
-            </a:pathLst>
-          </a:custGeom>
-          <a:solidFill>
-            <a:schemeClr val="accent2"/>
-          </a:solidFill>
-          <a:ln>
-            <a:noFill/>
-          </a:ln>
-        </p:spPr>
-      </p:sp>
-      <p:sp>
-        <p:nvSpPr>
-          <p:cNvPr id="26" name="txt.unit.3"/>
-          <p:cNvSpPr txBox="1"/>
-          <p:nvPr/>
-        </p:nvSpPr>
-        <p:spPr>
-          <a:xfrm>
-            <a:off x="9683750" y="3962400"/>
-            <a:ext cx="1797050" cy="355600"/>
-          </a:xfrm>
-          <a:prstGeom prst="rect">
-            <a:avLst/>
-          </a:prstGeom>
-          <a:noFill/>
-        </p:spPr>
-        <p:txBody>
-          <a:bodyPr wrap="square" lIns="0" tIns="0" rIns="0" bIns="0" anchor="t" rtlCol="0">
-            <a:noAutofit/>
-          </a:bodyPr>
-          <a:lstStyle/>
-          <a:p>
-            <a:pPr algn="r" eaLnBrk="1" hangingPunct="1" latinLnBrk="0">
-              <a:lnSpc>
-                <a:spcPts val="2800"/>
-              </a:lnSpc>
-            </a:pPr>
-            <a:r>
-              <a:rPr lang="ja-JP" altLang="en-US" sz="2300" b="1">
-                <a:solidFill>
-                  <a:schemeClr val="tx1"/>
-                </a:solidFill>
-                <a:latin typeface="Barlow"/>
-                <a:ea typeface="Noto Sans JP"/>
-              </a:rPr>
-              <a:t>件</a:t>
-            </a:r>
-            <a:endParaRPr lang="ja-JP" altLang="en-US" sz="2300" b="1" dirty="0"/>
-          </a:p>
-        </p:txBody>
-      </p:sp>
-      <p:sp>
-        <p:nvSpPr>
-          <p:cNvPr id="27" name="txt.note.3"/>
-          <p:cNvSpPr txBox="1"/>
-          <p:nvPr/>
-        </p:nvSpPr>
-        <p:spPr>
-          <a:xfrm>
-            <a:off x="9759950" y="4368800"/>
-            <a:ext cx="2286000" cy="584200"/>
-          </a:xfrm>
-          <a:prstGeom prst="rect">
-            <a:avLst/>
-          </a:prstGeom>
-          <a:noFill/>
-        </p:spPr>
-        <p:txBody>
-          <a:bodyPr wrap="square" lIns="0" tIns="0" rIns="0" bIns="0" anchor="t" rtlCol="0">
-            <a:noAutofit/>
-          </a:bodyPr>
-          <a:lstStyle/>
-          <a:p>
-            <a:pPr algn="l" eaLnBrk="1" hangingPunct="1" latinLnBrk="0">
-              <a:lnSpc>
-                <a:spcPts val="2200"/>
-              </a:lnSpc>
-            </a:pPr>
-            <a:r>
-              <a:rPr lang="ja-JP" altLang="en-US" sz="1500" b="1">
-                <a:solidFill>
-                  <a:schemeClr val="tx1"/>
-                </a:solidFill>
-                <a:latin typeface="Barlow"/>
-                <a:ea typeface="Noto Sans JP"/>
-              </a:rPr>
-              <a:t>今の月14件から減らす</a:t>
-            </a:r>
-            <a:endParaRPr lang="ja-JP" altLang="en-US" sz="1500" b="1" dirty="0"/>
-          </a:p>
-        </p:txBody>
-      </p:sp>
-      <p:sp>
-        <p:nvSpPr>
-          <p:cNvPr id="28" name="txt.footnote"/>
-          <p:cNvSpPr txBox="1"/>
-          <p:nvPr/>
-        </p:nvSpPr>
-        <p:spPr>
-          <a:xfrm>
-            <a:off x="3816350" y="5867400"/>
-            <a:ext cx="7620000" cy="558800"/>
-          </a:xfrm>
-          <a:prstGeom prst="rect">
-            <a:avLst/>
-          </a:prstGeom>
-          <a:noFill/>
-        </p:spPr>
-        <p:txBody>
-          <a:bodyPr wrap="square" lIns="0" tIns="0" rIns="0" bIns="0" anchor="t" rtlCol="0">
-            <a:noAutofit/>
-          </a:bodyPr>
-          <a:lstStyle/>
-          <a:p>
-            <a:pPr algn="l" eaLnBrk="1" hangingPunct="1" latinLnBrk="0">
-              <a:lnSpc>
-                <a:spcPts val="2200"/>
-              </a:lnSpc>
-            </a:pPr>
-            <a:r>
-              <a:rPr lang="ja-JP" altLang="en-US" sz="1300" b="1">
-                <a:solidFill>
-                  <a:schemeClr val="tx1"/>
-                </a:solidFill>
-                <a:latin typeface="Barlow"/>
-                <a:ea typeface="Noto Sans JP"/>
-              </a:rPr>
-              <a:t>情報が1つの仕組みでつながり、誰でも工場の状態を確認できる姿を目指します。</a:t>
-            </a:r>
-            <a:endParaRPr lang="ja-JP" altLang="en-US" sz="1300" b="1" dirty="0"/>
+              <a:t>でつながり、誰でも工場の状態をすぐに確認できる姿を目指します。</a:t>
+            </a:r>
+            <a:endParaRPr lang="ja-JP" altLang="en-US" sz="1600" b="0" dirty="0"/>
           </a:p>
         </p:txBody>
       </p:sp>
@@ -9046,16 +8324,41 @@
         <p:nvPr/>
       </p:nvGrpSpPr>
       <p:grpSpPr/>
-      <p:sp>
-        <p:nvSpPr>
-          <p:cNvPr id="2" name="deco.tri-left"/>
+      <p:pic>
+        <p:nvPicPr>
+          <p:cNvPr id="2" name="img.side" descr="左の写真"/>
+          <p:cNvPicPr>
+            <a:picLocks noChangeAspect="1"/>
+          </p:cNvPicPr>
+          <p:nvPr/>
+        </p:nvPicPr>
+        <p:blipFill>
+          <a:blip r:embed="rId4-created"/>
+          <a:srcRect/>
+          <a:stretch>
+            <a:fillRect/>
+          </a:stretch>
+        </p:blipFill>
+        <p:spPr>
+          <a:xfrm>
+            <a:off x="0" y="0"/>
+            <a:ext cx="3035300" cy="6858000"/>
+          </a:xfrm>
+          <a:prstGeom prst="rect">
+            <a:avLst/>
+          </a:prstGeom>
+        </p:spPr>
+      </p:pic>
+      <p:sp>
+        <p:nvSpPr>
+          <p:cNvPr id="3" name="deco.side-tri-1"/>
           <p:cNvSpPr/>
           <p:nvPr/>
         </p:nvSpPr>
         <p:spPr>
           <a:xfrm>
-            <a:off x="0" y="4014470"/>
-            <a:ext cx="1177290" cy="1176020"/>
+            <a:off x="0" y="-323850"/>
+            <a:ext cx="3035300" cy="3035300"/>
           </a:xfrm>
           <a:custGeom>
             <a:avLst/>
@@ -9064,15 +8367,144 @@
             <a:cxnLst/>
             <a:rect l="l" t="t" r="r" b="b"/>
             <a:pathLst>
-              <a:path w="1177290" h="1176020">
+              <a:path w="3035300" h="3035300">
+                <a:moveTo>
+                  <a:pt x="0" y="3035300"/>
+                </a:moveTo>
+                <a:lnTo>
+                  <a:pt x="3035300" y="0"/>
+                </a:lnTo>
+                <a:lnTo>
+                  <a:pt x="3035300" y="3035300"/>
+                </a:lnTo>
+                <a:close/>
+              </a:path>
+            </a:pathLst>
+          </a:custGeom>
+          <a:solidFill>
+            <a:schemeClr val="accent1">
+              <a:alpha val="88000"/>
+            </a:schemeClr>
+          </a:solidFill>
+          <a:ln>
+            <a:noFill/>
+          </a:ln>
+        </p:spPr>
+      </p:sp>
+      <p:sp>
+        <p:nvSpPr>
+          <p:cNvPr id="4" name="deco.side-tri-2"/>
+          <p:cNvSpPr/>
+          <p:nvPr/>
+        </p:nvSpPr>
+        <p:spPr>
+          <a:xfrm>
+            <a:off x="0" y="2698750"/>
+            <a:ext cx="3035300" cy="3035300"/>
+          </a:xfrm>
+          <a:custGeom>
+            <a:avLst/>
+            <a:gdLst/>
+            <a:ahLst/>
+            <a:cxnLst/>
+            <a:rect l="l" t="t" r="r" b="b"/>
+            <a:pathLst>
+              <a:path w="3035300" h="3035300">
                 <a:moveTo>
                   <a:pt x="0" y="0"/>
                 </a:moveTo>
                 <a:lnTo>
-                  <a:pt x="1177290" y="0"/>
-                </a:lnTo>
-                <a:lnTo>
-                  <a:pt x="0" y="1176020"/>
+                  <a:pt x="3035300" y="0"/>
+                </a:lnTo>
+                <a:lnTo>
+                  <a:pt x="0" y="3035300"/>
+                </a:lnTo>
+                <a:close/>
+              </a:path>
+            </a:pathLst>
+          </a:custGeom>
+          <a:solidFill>
+            <a:schemeClr val="accent1">
+              <a:alpha val="88000"/>
+            </a:schemeClr>
+          </a:solidFill>
+          <a:ln>
+            <a:noFill/>
+          </a:ln>
+        </p:spPr>
+      </p:sp>
+      <p:sp>
+        <p:nvSpPr>
+          <p:cNvPr id="5" name="deco.side-tri-3"/>
+          <p:cNvSpPr/>
+          <p:nvPr/>
+        </p:nvSpPr>
+        <p:spPr>
+          <a:xfrm>
+            <a:off x="990600" y="4832350"/>
+            <a:ext cx="2044700" cy="2044700"/>
+          </a:xfrm>
+          <a:custGeom>
+            <a:avLst/>
+            <a:gdLst/>
+            <a:ahLst/>
+            <a:cxnLst/>
+            <a:rect l="l" t="t" r="r" b="b"/>
+            <a:pathLst>
+              <a:path w="2044700" h="2044700">
+                <a:moveTo>
+                  <a:pt x="0" y="2044700"/>
+                </a:moveTo>
+                <a:lnTo>
+                  <a:pt x="2044700" y="0"/>
+                </a:lnTo>
+                <a:lnTo>
+                  <a:pt x="2044700" y="2044700"/>
+                </a:lnTo>
+                <a:close/>
+              </a:path>
+            </a:pathLst>
+          </a:custGeom>
+          <a:solidFill>
+            <a:schemeClr val="accent1">
+              <a:alpha val="88000"/>
+            </a:schemeClr>
+          </a:solidFill>
+          <a:ln>
+            <a:noFill/>
+          </a:ln>
+        </p:spPr>
+      </p:sp>
+      <p:sp>
+        <p:nvSpPr>
+          <p:cNvPr id="6" name="deco.side-line"/>
+          <p:cNvSpPr/>
+          <p:nvPr/>
+        </p:nvSpPr>
+        <p:spPr>
+          <a:xfrm>
+            <a:off x="76200" y="1727200"/>
+            <a:ext cx="1244600" cy="1111250"/>
+          </a:xfrm>
+          <a:custGeom>
+            <a:avLst/>
+            <a:gdLst/>
+            <a:ahLst/>
+            <a:cxnLst/>
+            <a:rect l="l" t="t" r="r" b="b"/>
+            <a:pathLst>
+              <a:path w="1244600" h="1111250">
+                <a:moveTo>
+                  <a:pt x="0" y="1111250"/>
+                </a:moveTo>
+                <a:lnTo>
+                  <a:pt x="133350" y="1111250"/>
+                </a:lnTo>
+                <a:lnTo>
+                  <a:pt x="1244600" y="0"/>
+                </a:lnTo>
+                <a:lnTo>
+                  <a:pt x="1111250" y="0"/>
                 </a:lnTo>
                 <a:close/>
               </a:path>
@@ -9088,14 +8520,14 @@
       </p:sp>
       <p:sp>
         <p:nvSpPr>
-          <p:cNvPr id="3" name="deco.tri-right"/>
+          <p:cNvPr id="7" name="deco.top-band"/>
           <p:cNvSpPr/>
           <p:nvPr/>
         </p:nvSpPr>
         <p:spPr>
           <a:xfrm>
-            <a:off x="8135620" y="1460500"/>
-            <a:ext cx="4103370" cy="4103370"/>
+            <a:off x="9455150" y="-482600"/>
+            <a:ext cx="3371850" cy="933450"/>
           </a:xfrm>
           <a:custGeom>
             <a:avLst/>
@@ -9104,15 +8536,18 @@
             <a:cxnLst/>
             <a:rect l="l" t="t" r="r" b="b"/>
             <a:pathLst>
-              <a:path w="4103370" h="4103370">
+              <a:path w="3371850" h="933450">
                 <a:moveTo>
-                  <a:pt x="4103370" y="0"/>
+                  <a:pt x="0" y="933450"/>
                 </a:moveTo>
                 <a:lnTo>
-                  <a:pt x="4103370" y="4103370"/>
-                </a:lnTo>
-                <a:lnTo>
-                  <a:pt x="0" y="4103370"/>
+                  <a:pt x="933450" y="0"/>
+                </a:lnTo>
+                <a:lnTo>
+                  <a:pt x="3371850" y="0"/>
+                </a:lnTo>
+                <a:lnTo>
+                  <a:pt x="2444750" y="933450"/>
                 </a:lnTo>
                 <a:close/>
               </a:path>
@@ -9128,14 +8563,14 @@
       </p:sp>
       <p:sp>
         <p:nvSpPr>
-          <p:cNvPr id="4" name="deco.plate"/>
+          <p:cNvPr id="8" name="deco.slant-plate"/>
           <p:cNvSpPr/>
           <p:nvPr/>
         </p:nvSpPr>
         <p:spPr>
           <a:xfrm>
-            <a:off x="1083310" y="2186940"/>
-            <a:ext cx="9500870" cy="2772410"/>
+            <a:off x="4819650" y="1689100"/>
+            <a:ext cx="6350000" cy="3384550"/>
           </a:xfrm>
           <a:custGeom>
             <a:avLst/>
@@ -9144,25 +8579,27 @@
             <a:cxnLst/>
             <a:rect l="l" t="t" r="r" b="b"/>
             <a:pathLst>
-              <a:path w="9500870" h="2772410">
+              <a:path w="6350000" h="3384550">
                 <a:moveTo>
-                  <a:pt x="0" y="2760980"/>
+                  <a:pt x="0" y="3384550"/>
                 </a:moveTo>
                 <a:lnTo>
-                  <a:pt x="2759710" y="0"/>
-                </a:lnTo>
-                <a:lnTo>
-                  <a:pt x="9500870" y="0"/>
-                </a:lnTo>
-                <a:lnTo>
-                  <a:pt x="6728460" y="2772410"/>
+                  <a:pt x="3384550" y="0"/>
+                </a:lnTo>
+                <a:lnTo>
+                  <a:pt x="6350000" y="0"/>
+                </a:lnTo>
+                <a:lnTo>
+                  <a:pt x="2965450" y="3384550"/>
                 </a:lnTo>
                 <a:close/>
               </a:path>
             </a:pathLst>
           </a:custGeom>
           <a:solidFill>
-            <a:schemeClr val="accent1"/>
+            <a:schemeClr val="bg2">
+              <a:alpha val="70000"/>
+            </a:schemeClr>
           </a:solidFill>
           <a:ln>
             <a:noFill/>
@@ -9171,14 +8608,14 @@
       </p:sp>
       <p:sp>
         <p:nvSpPr>
-          <p:cNvPr id="5" name="deco.line"/>
+          <p:cNvPr id="9" name="deco.title-band"/>
           <p:cNvSpPr/>
           <p:nvPr/>
         </p:nvSpPr>
         <p:spPr>
           <a:xfrm>
-            <a:off x="5046980" y="6168390"/>
-            <a:ext cx="1640840" cy="689610"/>
+            <a:off x="1377950" y="520700"/>
+            <a:ext cx="10731500" cy="1073150"/>
           </a:xfrm>
           <a:custGeom>
             <a:avLst/>
@@ -9187,25 +8624,27 @@
             <a:cxnLst/>
             <a:rect l="l" t="t" r="r" b="b"/>
             <a:pathLst>
-              <a:path w="1640840" h="689610">
+              <a:path w="10731500" h="1073150">
                 <a:moveTo>
-                  <a:pt x="0" y="689610"/>
+                  <a:pt x="0" y="1073150"/>
                 </a:moveTo>
                 <a:lnTo>
-                  <a:pt x="689610" y="0"/>
-                </a:lnTo>
-                <a:lnTo>
-                  <a:pt x="1640840" y="0"/>
-                </a:lnTo>
-                <a:lnTo>
-                  <a:pt x="951230" y="689610"/>
+                  <a:pt x="1066800" y="0"/>
+                </a:lnTo>
+                <a:lnTo>
+                  <a:pt x="10731500" y="0"/>
+                </a:lnTo>
+                <a:lnTo>
+                  <a:pt x="10731500" y="1073150"/>
                 </a:lnTo>
                 <a:close/>
               </a:path>
             </a:pathLst>
           </a:custGeom>
           <a:solidFill>
-            <a:schemeClr val="accent1"/>
+            <a:schemeClr val="bg2">
+              <a:alpha val="92000"/>
+            </a:schemeClr>
           </a:solidFill>
           <a:ln>
             <a:noFill/>
@@ -9214,14 +8653,95 @@
       </p:sp>
       <p:sp>
         <p:nvSpPr>
-          <p:cNvPr id="6" name="txt.headline"/>
+          <p:cNvPr id="10" name="deco.end-triangle"/>
+          <p:cNvSpPr/>
+          <p:nvPr/>
+        </p:nvSpPr>
+        <p:spPr>
+          <a:xfrm>
+            <a:off x="10998200" y="5702300"/>
+            <a:ext cx="933450" cy="933450"/>
+          </a:xfrm>
+          <a:custGeom>
+            <a:avLst/>
+            <a:gdLst/>
+            <a:ahLst/>
+            <a:cxnLst/>
+            <a:rect l="l" t="t" r="r" b="b"/>
+            <a:pathLst>
+              <a:path w="933450" h="933450">
+                <a:moveTo>
+                  <a:pt x="933450" y="0"/>
+                </a:moveTo>
+                <a:lnTo>
+                  <a:pt x="933450" y="933450"/>
+                </a:lnTo>
+                <a:lnTo>
+                  <a:pt x="0" y="933450"/>
+                </a:lnTo>
+                <a:close/>
+              </a:path>
+            </a:pathLst>
+          </a:custGeom>
+          <a:solidFill>
+            <a:schemeClr val="accent2"/>
+          </a:solidFill>
+          <a:ln>
+            <a:noFill/>
+          </a:ln>
+        </p:spPr>
+      </p:sp>
+      <p:sp>
+        <p:nvSpPr>
+          <p:cNvPr id="11" name="txt.eyebrow"/>
           <p:cNvSpPr txBox="1"/>
           <p:nvPr/>
         </p:nvSpPr>
         <p:spPr>
-          <a:xfrm>
-            <a:off x="3175000" y="3187700"/>
-            <a:ext cx="5588000" cy="762000"/>
+          <a:xfrm rot="-2700000">
+            <a:off x="-431800" y="736600"/>
+            <a:ext cx="3048000" cy="711200"/>
+          </a:xfrm>
+          <a:prstGeom prst="rect">
+            <a:avLst/>
+          </a:prstGeom>
+          <a:noFill/>
+        </p:spPr>
+        <p:txBody>
+          <a:bodyPr wrap="none" lIns="0" tIns="0" rIns="0" bIns="0" anchor="ctr" rtlCol="0">
+            <a:noAutofit/>
+          </a:bodyPr>
+          <a:lstStyle/>
+          <a:p>
+            <a:pPr algn="ctr" eaLnBrk="1" hangingPunct="1" latinLnBrk="0">
+              <a:lnSpc>
+                <a:spcPts val="2600"/>
+              </a:lnSpc>
+            </a:pPr>
+            <a:r>
+              <a:rPr lang="ja-JP" altLang="en-US" sz="2050" b="0" spc="400">
+                <a:solidFill>
+                  <a:schemeClr val="bg1"/>
+                </a:solidFill>
+                <a:latin typeface="Barlow"/>
+                <a:ea typeface="Noto Sans JP"/>
+              </a:rPr>
+              <a:t>Goals</a:t>
+            </a:r>
+            <a:endParaRPr lang="ja-JP" altLang="en-US" sz="2050" b="0" dirty="0" spc="400"/>
+          </a:p>
+        </p:txBody>
+      </p:sp>
+      <p:sp>
+        <p:nvSpPr>
+          <p:cNvPr id="12" name="txt.headline"/>
+          <p:cNvSpPr txBox="1"/>
+          <p:nvPr/>
+        </p:nvSpPr>
+        <p:spPr>
+          <a:xfrm>
+            <a:off x="3416300" y="660400"/>
+            <a:ext cx="8382000" cy="787400"/>
           </a:xfrm>
           <a:prstGeom prst="rect">
             <a:avLst/>
@@ -9234,22 +8754,763 @@
           </a:bodyPr>
           <a:lstStyle/>
           <a:p>
-            <a:pPr algn="ctr" eaLnBrk="1" hangingPunct="1" latinLnBrk="0">
+            <a:pPr algn="l" eaLnBrk="1" hangingPunct="1" latinLnBrk="0">
               <a:lnSpc>
-                <a:spcPts val="5000"/>
+                <a:spcPts val="4000"/>
               </a:lnSpc>
             </a:pPr>
             <a:r>
-              <a:rPr lang="ja-JP" altLang="en-US" sz="4000" b="1">
-                <a:solidFill>
-                  <a:schemeClr val="bg1"/>
+              <a:rPr lang="ja-JP" altLang="en-US" sz="3250" b="0">
+                <a:solidFill>
+                  <a:schemeClr val="tx1"/>
+                </a:solidFill>
+                <a:latin typeface="Noto Serif JP"/>
+                <a:ea typeface="Noto Serif JP"/>
+              </a:rPr>
+              <a:t>稼働率</a:t>
+            </a:r>
+            <a:r>
+              <a:rPr lang="ja-JP" altLang="en-US" sz="3250" b="1" u="heavy">
+                <a:solidFill>
+                  <a:schemeClr val="tx1"/>
+                </a:solidFill>
+                <a:uFill>
+                  <a:solidFill>
+                    <a:schemeClr val="accent2"/>
+                  </a:solidFill>
+                </a:uFill>
+                <a:latin typeface="Noto Serif JP"/>
+                <a:ea typeface="Noto Serif JP"/>
+              </a:rPr>
+              <a:t>80%</a:t>
+            </a:r>
+            <a:r>
+              <a:rPr lang="ja-JP" altLang="en-US" sz="3250" b="0">
+                <a:solidFill>
+                  <a:schemeClr val="tx1"/>
+                </a:solidFill>
+                <a:latin typeface="Noto Serif JP"/>
+                <a:ea typeface="Noto Serif JP"/>
+              </a:rPr>
+              <a:t>へ、不良と遅れを減らす</a:t>
+            </a:r>
+            <a:endParaRPr lang="ja-JP" altLang="en-US" sz="3250" b="0" dirty="0"/>
+          </a:p>
+        </p:txBody>
+      </p:sp>
+      <p:sp>
+        <p:nvSpPr>
+          <p:cNvPr id="13" name="txt.label.1"/>
+          <p:cNvSpPr txBox="1"/>
+          <p:nvPr/>
+        </p:nvSpPr>
+        <p:spPr>
+          <a:xfrm>
+            <a:off x="3765550" y="2286000"/>
+            <a:ext cx="2286000" cy="406400"/>
+          </a:xfrm>
+          <a:prstGeom prst="rect">
+            <a:avLst/>
+          </a:prstGeom>
+          <a:noFill/>
+        </p:spPr>
+        <p:txBody>
+          <a:bodyPr wrap="square" lIns="0" tIns="0" rIns="0" bIns="0" anchor="t" rtlCol="0">
+            <a:noAutofit/>
+          </a:bodyPr>
+          <a:lstStyle/>
+          <a:p>
+            <a:pPr algn="l" eaLnBrk="1" hangingPunct="1" latinLnBrk="0">
+              <a:lnSpc>
+                <a:spcPts val="3000"/>
+              </a:lnSpc>
+            </a:pPr>
+            <a:r>
+              <a:rPr lang="ja-JP" altLang="en-US" sz="2300" b="1">
+                <a:solidFill>
+                  <a:schemeClr val="tx1"/>
                 </a:solidFill>
                 <a:latin typeface="Barlow"/>
                 <a:ea typeface="Noto Sans JP"/>
               </a:rPr>
-              <a:t>3つの取り組み</a:t>
-            </a:r>
-            <a:endParaRPr lang="ja-JP" altLang="en-US" sz="4000" b="1" dirty="0"/>
+              <a:t>設備の稼働率</a:t>
+            </a:r>
+            <a:endParaRPr lang="ja-JP" altLang="en-US" sz="2300" b="1" dirty="0"/>
+          </a:p>
+        </p:txBody>
+      </p:sp>
+      <p:sp>
+        <p:nvSpPr>
+          <p:cNvPr id="14" name="num.value.1"/>
+          <p:cNvSpPr txBox="1"/>
+          <p:nvPr/>
+        </p:nvSpPr>
+        <p:spPr>
+          <a:xfrm>
+            <a:off x="3765550" y="2692400"/>
+            <a:ext cx="2489200" cy="1320800"/>
+          </a:xfrm>
+          <a:prstGeom prst="rect">
+            <a:avLst/>
+          </a:prstGeom>
+          <a:noFill/>
+        </p:spPr>
+        <p:txBody>
+          <a:bodyPr wrap="square" lIns="0" tIns="0" rIns="0" bIns="0" anchor="t" rtlCol="0">
+            <a:noAutofit/>
+          </a:bodyPr>
+          <a:lstStyle/>
+          <a:p>
+            <a:pPr algn="l" eaLnBrk="1" hangingPunct="1" latinLnBrk="0">
+              <a:lnSpc>
+                <a:spcPts val="10400"/>
+              </a:lnSpc>
+            </a:pPr>
+            <a:r>
+              <a:rPr lang="ja-JP" altLang="en-US" sz="9900" b="0">
+                <a:solidFill>
+                  <a:schemeClr val="tx1"/>
+                </a:solidFill>
+                <a:latin typeface="Barlow"/>
+                <a:ea typeface="Noto Sans JP"/>
+              </a:rPr>
+              <a:t>80</a:t>
+            </a:r>
+            <a:endParaRPr lang="ja-JP" altLang="en-US" sz="9900" b="0" dirty="0"/>
+          </a:p>
+        </p:txBody>
+      </p:sp>
+      <p:sp>
+        <p:nvSpPr>
+          <p:cNvPr id="15" name="deco.value-1-rule"/>
+          <p:cNvSpPr/>
+          <p:nvPr/>
+        </p:nvSpPr>
+        <p:spPr>
+          <a:xfrm>
+            <a:off x="3708400" y="3848100"/>
+            <a:ext cx="1854200" cy="95250"/>
+          </a:xfrm>
+          <a:custGeom>
+            <a:avLst/>
+            <a:gdLst/>
+            <a:ahLst/>
+            <a:cxnLst/>
+            <a:rect l="l" t="t" r="r" b="b"/>
+            <a:pathLst>
+              <a:path w="1854200" h="95250">
+                <a:moveTo>
+                  <a:pt x="0" y="95250"/>
+                </a:moveTo>
+                <a:lnTo>
+                  <a:pt x="1854200" y="95250"/>
+                </a:lnTo>
+                <a:lnTo>
+                  <a:pt x="1765300" y="0"/>
+                </a:lnTo>
+                <a:lnTo>
+                  <a:pt x="95250" y="0"/>
+                </a:lnTo>
+                <a:close/>
+              </a:path>
+            </a:pathLst>
+          </a:custGeom>
+          <a:solidFill>
+            <a:schemeClr val="accent2"/>
+          </a:solidFill>
+          <a:ln>
+            <a:noFill/>
+          </a:ln>
+        </p:spPr>
+      </p:sp>
+      <p:sp>
+        <p:nvSpPr>
+          <p:cNvPr id="16" name="txt.unit.1"/>
+          <p:cNvSpPr txBox="1"/>
+          <p:nvPr/>
+        </p:nvSpPr>
+        <p:spPr>
+          <a:xfrm>
+            <a:off x="3765550" y="3962400"/>
+            <a:ext cx="1797050" cy="355600"/>
+          </a:xfrm>
+          <a:prstGeom prst="rect">
+            <a:avLst/>
+          </a:prstGeom>
+          <a:noFill/>
+        </p:spPr>
+        <p:txBody>
+          <a:bodyPr wrap="square" lIns="0" tIns="0" rIns="0" bIns="0" anchor="t" rtlCol="0">
+            <a:noAutofit/>
+          </a:bodyPr>
+          <a:lstStyle/>
+          <a:p>
+            <a:pPr algn="r" eaLnBrk="1" hangingPunct="1" latinLnBrk="0">
+              <a:lnSpc>
+                <a:spcPts val="2800"/>
+              </a:lnSpc>
+            </a:pPr>
+            <a:r>
+              <a:rPr lang="ja-JP" altLang="en-US" sz="2300" b="1">
+                <a:solidFill>
+                  <a:schemeClr val="tx1"/>
+                </a:solidFill>
+                <a:latin typeface="Barlow"/>
+                <a:ea typeface="Noto Sans JP"/>
+              </a:rPr>
+              <a:t>%</a:t>
+            </a:r>
+            <a:endParaRPr lang="ja-JP" altLang="en-US" sz="2300" b="1" dirty="0"/>
+          </a:p>
+        </p:txBody>
+      </p:sp>
+      <p:sp>
+        <p:nvSpPr>
+          <p:cNvPr id="17" name="txt.note.1"/>
+          <p:cNvSpPr txBox="1"/>
+          <p:nvPr/>
+        </p:nvSpPr>
+        <p:spPr>
+          <a:xfrm>
+            <a:off x="3841750" y="4368800"/>
+            <a:ext cx="2286000" cy="584200"/>
+          </a:xfrm>
+          <a:prstGeom prst="rect">
+            <a:avLst/>
+          </a:prstGeom>
+          <a:noFill/>
+        </p:spPr>
+        <p:txBody>
+          <a:bodyPr wrap="square" lIns="0" tIns="0" rIns="0" bIns="0" anchor="t" rtlCol="0">
+            <a:noAutofit/>
+          </a:bodyPr>
+          <a:lstStyle/>
+          <a:p>
+            <a:pPr algn="l" eaLnBrk="1" hangingPunct="1" latinLnBrk="0">
+              <a:lnSpc>
+                <a:spcPts val="2200"/>
+              </a:lnSpc>
+            </a:pPr>
+            <a:r>
+              <a:rPr lang="ja-JP" altLang="en-US" sz="1500" b="1">
+                <a:solidFill>
+                  <a:schemeClr val="tx1"/>
+                </a:solidFill>
+                <a:latin typeface="Barlow"/>
+                <a:ea typeface="Noto Sans JP"/>
+              </a:rPr>
+              <a:t>稼働の見える化で</a:t>
+            </a:r>
+            <a:endParaRPr lang="ja-JP" altLang="en-US" sz="1500" b="1" dirty="0"/>
+          </a:p>
+          <a:p>
+            <a:pPr algn="l" eaLnBrk="1" hangingPunct="1" latinLnBrk="0">
+              <a:lnSpc>
+                <a:spcPts val="2200"/>
+              </a:lnSpc>
+            </a:pPr>
+            <a:r>
+              <a:rPr lang="ja-JP" altLang="en-US" sz="1500" b="1">
+                <a:solidFill>
+                  <a:schemeClr val="tx1"/>
+                </a:solidFill>
+                <a:latin typeface="Barlow"/>
+                <a:ea typeface="Noto Sans JP"/>
+              </a:rPr>
+              <a:t>止まる時間を減らす</a:t>
+            </a:r>
+            <a:endParaRPr lang="ja-JP" altLang="en-US" sz="1500" b="1" dirty="0"/>
+          </a:p>
+        </p:txBody>
+      </p:sp>
+      <p:sp>
+        <p:nvSpPr>
+          <p:cNvPr id="18" name="txt.label.2"/>
+          <p:cNvSpPr txBox="1"/>
+          <p:nvPr/>
+        </p:nvSpPr>
+        <p:spPr>
+          <a:xfrm>
+            <a:off x="6318250" y="2286000"/>
+            <a:ext cx="2286000" cy="406400"/>
+          </a:xfrm>
+          <a:prstGeom prst="rect">
+            <a:avLst/>
+          </a:prstGeom>
+          <a:noFill/>
+        </p:spPr>
+        <p:txBody>
+          <a:bodyPr wrap="square" lIns="0" tIns="0" rIns="0" bIns="0" anchor="t" rtlCol="0">
+            <a:noAutofit/>
+          </a:bodyPr>
+          <a:lstStyle/>
+          <a:p>
+            <a:pPr algn="l" eaLnBrk="1" hangingPunct="1" latinLnBrk="0">
+              <a:lnSpc>
+                <a:spcPts val="3000"/>
+              </a:lnSpc>
+            </a:pPr>
+            <a:r>
+              <a:rPr lang="ja-JP" altLang="en-US" sz="2300" b="1">
+                <a:solidFill>
+                  <a:schemeClr val="tx1"/>
+                </a:solidFill>
+                <a:latin typeface="Barlow"/>
+                <a:ea typeface="Noto Sans JP"/>
+              </a:rPr>
+              <a:t>不良率</a:t>
+            </a:r>
+            <a:endParaRPr lang="ja-JP" altLang="en-US" sz="2300" b="1" dirty="0"/>
+          </a:p>
+        </p:txBody>
+      </p:sp>
+      <p:sp>
+        <p:nvSpPr>
+          <p:cNvPr id="19" name="num.value.2"/>
+          <p:cNvSpPr txBox="1"/>
+          <p:nvPr/>
+        </p:nvSpPr>
+        <p:spPr>
+          <a:xfrm>
+            <a:off x="6318250" y="2692400"/>
+            <a:ext cx="3276600" cy="1320800"/>
+          </a:xfrm>
+          <a:prstGeom prst="rect">
+            <a:avLst/>
+          </a:prstGeom>
+          <a:noFill/>
+        </p:spPr>
+        <p:txBody>
+          <a:bodyPr wrap="square" lIns="0" tIns="0" rIns="0" bIns="0" anchor="t" rtlCol="0">
+            <a:noAutofit/>
+          </a:bodyPr>
+          <a:lstStyle/>
+          <a:p>
+            <a:pPr algn="l" eaLnBrk="1" hangingPunct="1" latinLnBrk="0">
+              <a:lnSpc>
+                <a:spcPts val="10400"/>
+              </a:lnSpc>
+            </a:pPr>
+            <a:r>
+              <a:rPr lang="ja-JP" altLang="en-US" sz="9900" b="0">
+                <a:solidFill>
+                  <a:schemeClr val="tx1"/>
+                </a:solidFill>
+                <a:latin typeface="Barlow"/>
+                <a:ea typeface="Noto Sans JP"/>
+              </a:rPr>
+              <a:t>1.5</a:t>
+            </a:r>
+            <a:endParaRPr lang="ja-JP" altLang="en-US" sz="9900" b="0" dirty="0"/>
+          </a:p>
+        </p:txBody>
+      </p:sp>
+      <p:sp>
+        <p:nvSpPr>
+          <p:cNvPr id="20" name="deco.value-2-rule"/>
+          <p:cNvSpPr/>
+          <p:nvPr/>
+        </p:nvSpPr>
+        <p:spPr>
+          <a:xfrm>
+            <a:off x="6261100" y="3848100"/>
+            <a:ext cx="1854200" cy="95250"/>
+          </a:xfrm>
+          <a:custGeom>
+            <a:avLst/>
+            <a:gdLst/>
+            <a:ahLst/>
+            <a:cxnLst/>
+            <a:rect l="l" t="t" r="r" b="b"/>
+            <a:pathLst>
+              <a:path w="1854200" h="95250">
+                <a:moveTo>
+                  <a:pt x="0" y="95250"/>
+                </a:moveTo>
+                <a:lnTo>
+                  <a:pt x="1854200" y="95250"/>
+                </a:lnTo>
+                <a:lnTo>
+                  <a:pt x="1765300" y="0"/>
+                </a:lnTo>
+                <a:lnTo>
+                  <a:pt x="95250" y="0"/>
+                </a:lnTo>
+                <a:close/>
+              </a:path>
+            </a:pathLst>
+          </a:custGeom>
+          <a:solidFill>
+            <a:schemeClr val="accent2"/>
+          </a:solidFill>
+          <a:ln>
+            <a:noFill/>
+          </a:ln>
+        </p:spPr>
+      </p:sp>
+      <p:sp>
+        <p:nvSpPr>
+          <p:cNvPr id="21" name="txt.unit.2"/>
+          <p:cNvSpPr txBox="1"/>
+          <p:nvPr/>
+        </p:nvSpPr>
+        <p:spPr>
+          <a:xfrm>
+            <a:off x="6318250" y="3962400"/>
+            <a:ext cx="1797050" cy="355600"/>
+          </a:xfrm>
+          <a:prstGeom prst="rect">
+            <a:avLst/>
+          </a:prstGeom>
+          <a:noFill/>
+        </p:spPr>
+        <p:txBody>
+          <a:bodyPr wrap="square" lIns="0" tIns="0" rIns="0" bIns="0" anchor="t" rtlCol="0">
+            <a:noAutofit/>
+          </a:bodyPr>
+          <a:lstStyle/>
+          <a:p>
+            <a:pPr algn="r" eaLnBrk="1" hangingPunct="1" latinLnBrk="0">
+              <a:lnSpc>
+                <a:spcPts val="2800"/>
+              </a:lnSpc>
+            </a:pPr>
+            <a:r>
+              <a:rPr lang="ja-JP" altLang="en-US" sz="2300" b="1">
+                <a:solidFill>
+                  <a:schemeClr val="tx1"/>
+                </a:solidFill>
+                <a:latin typeface="Barlow"/>
+                <a:ea typeface="Noto Sans JP"/>
+              </a:rPr>
+              <a:t>%</a:t>
+            </a:r>
+            <a:endParaRPr lang="ja-JP" altLang="en-US" sz="2300" b="1" dirty="0"/>
+          </a:p>
+        </p:txBody>
+      </p:sp>
+      <p:sp>
+        <p:nvSpPr>
+          <p:cNvPr id="22" name="txt.note.2"/>
+          <p:cNvSpPr txBox="1"/>
+          <p:nvPr/>
+        </p:nvSpPr>
+        <p:spPr>
+          <a:xfrm>
+            <a:off x="6394450" y="4368800"/>
+            <a:ext cx="2286000" cy="584200"/>
+          </a:xfrm>
+          <a:prstGeom prst="rect">
+            <a:avLst/>
+          </a:prstGeom>
+          <a:noFill/>
+        </p:spPr>
+        <p:txBody>
+          <a:bodyPr wrap="square" lIns="0" tIns="0" rIns="0" bIns="0" anchor="t" rtlCol="0">
+            <a:noAutofit/>
+          </a:bodyPr>
+          <a:lstStyle/>
+          <a:p>
+            <a:pPr algn="l" eaLnBrk="1" hangingPunct="1" latinLnBrk="0">
+              <a:lnSpc>
+                <a:spcPts val="2200"/>
+              </a:lnSpc>
+            </a:pPr>
+            <a:r>
+              <a:rPr lang="ja-JP" altLang="en-US" sz="1500" b="1">
+                <a:solidFill>
+                  <a:schemeClr val="tx1"/>
+                </a:solidFill>
+                <a:latin typeface="Barlow"/>
+                <a:ea typeface="Noto Sans JP"/>
+              </a:rPr>
+              <a:t>条件を記録し原因を</a:t>
+            </a:r>
+            <a:endParaRPr lang="ja-JP" altLang="en-US" sz="1500" b="1" dirty="0"/>
+          </a:p>
+          <a:p>
+            <a:pPr algn="l" eaLnBrk="1" hangingPunct="1" latinLnBrk="0">
+              <a:lnSpc>
+                <a:spcPts val="2200"/>
+              </a:lnSpc>
+            </a:pPr>
+            <a:r>
+              <a:rPr lang="ja-JP" altLang="en-US" sz="1500" b="1">
+                <a:solidFill>
+                  <a:schemeClr val="tx1"/>
+                </a:solidFill>
+                <a:latin typeface="Barlow"/>
+                <a:ea typeface="Noto Sans JP"/>
+              </a:rPr>
+              <a:t>追えるようにする</a:t>
+            </a:r>
+            <a:endParaRPr lang="ja-JP" altLang="en-US" sz="1500" b="1" dirty="0"/>
+          </a:p>
+        </p:txBody>
+      </p:sp>
+      <p:sp>
+        <p:nvSpPr>
+          <p:cNvPr id="23" name="txt.label.3"/>
+          <p:cNvSpPr txBox="1"/>
+          <p:nvPr/>
+        </p:nvSpPr>
+        <p:spPr>
+          <a:xfrm>
+            <a:off x="9683750" y="2286000"/>
+            <a:ext cx="2286000" cy="406400"/>
+          </a:xfrm>
+          <a:prstGeom prst="rect">
+            <a:avLst/>
+          </a:prstGeom>
+          <a:noFill/>
+        </p:spPr>
+        <p:txBody>
+          <a:bodyPr wrap="square" lIns="0" tIns="0" rIns="0" bIns="0" anchor="t" rtlCol="0">
+            <a:noAutofit/>
+          </a:bodyPr>
+          <a:lstStyle/>
+          <a:p>
+            <a:pPr algn="l" eaLnBrk="1" hangingPunct="1" latinLnBrk="0">
+              <a:lnSpc>
+                <a:spcPts val="3000"/>
+              </a:lnSpc>
+            </a:pPr>
+            <a:r>
+              <a:rPr lang="ja-JP" altLang="en-US" sz="2300" b="1">
+                <a:solidFill>
+                  <a:schemeClr val="tx1"/>
+                </a:solidFill>
+                <a:latin typeface="Barlow"/>
+                <a:ea typeface="Noto Sans JP"/>
+              </a:rPr>
+              <a:t>月の納期遅れ</a:t>
+            </a:r>
+            <a:endParaRPr lang="ja-JP" altLang="en-US" sz="2300" b="1" dirty="0"/>
+          </a:p>
+        </p:txBody>
+      </p:sp>
+      <p:sp>
+        <p:nvSpPr>
+          <p:cNvPr id="24" name="num.value.3"/>
+          <p:cNvSpPr txBox="1"/>
+          <p:nvPr/>
+        </p:nvSpPr>
+        <p:spPr>
+          <a:xfrm>
+            <a:off x="9683750" y="2692400"/>
+            <a:ext cx="2413000" cy="1320800"/>
+          </a:xfrm>
+          <a:prstGeom prst="rect">
+            <a:avLst/>
+          </a:prstGeom>
+          <a:noFill/>
+        </p:spPr>
+        <p:txBody>
+          <a:bodyPr wrap="square" lIns="0" tIns="0" rIns="0" bIns="0" anchor="t" rtlCol="0">
+            <a:noAutofit/>
+          </a:bodyPr>
+          <a:lstStyle/>
+          <a:p>
+            <a:pPr algn="l" eaLnBrk="1" hangingPunct="1" latinLnBrk="0">
+              <a:lnSpc>
+                <a:spcPts val="10400"/>
+              </a:lnSpc>
+            </a:pPr>
+            <a:r>
+              <a:rPr lang="ja-JP" altLang="en-US" sz="9900" b="0">
+                <a:solidFill>
+                  <a:schemeClr val="tx1"/>
+                </a:solidFill>
+                <a:latin typeface="Barlow"/>
+                <a:ea typeface="Noto Sans JP"/>
+              </a:rPr>
+              <a:t>2</a:t>
+            </a:r>
+            <a:endParaRPr lang="ja-JP" altLang="en-US" sz="9900" b="0" dirty="0"/>
+          </a:p>
+        </p:txBody>
+      </p:sp>
+      <p:sp>
+        <p:nvSpPr>
+          <p:cNvPr id="25" name="deco.value-3-rule"/>
+          <p:cNvSpPr/>
+          <p:nvPr/>
+        </p:nvSpPr>
+        <p:spPr>
+          <a:xfrm>
+            <a:off x="9626600" y="3848100"/>
+            <a:ext cx="1854200" cy="95250"/>
+          </a:xfrm>
+          <a:custGeom>
+            <a:avLst/>
+            <a:gdLst/>
+            <a:ahLst/>
+            <a:cxnLst/>
+            <a:rect l="l" t="t" r="r" b="b"/>
+            <a:pathLst>
+              <a:path w="1854200" h="95250">
+                <a:moveTo>
+                  <a:pt x="0" y="95250"/>
+                </a:moveTo>
+                <a:lnTo>
+                  <a:pt x="1854200" y="95250"/>
+                </a:lnTo>
+                <a:lnTo>
+                  <a:pt x="1765300" y="0"/>
+                </a:lnTo>
+                <a:lnTo>
+                  <a:pt x="95250" y="0"/>
+                </a:lnTo>
+                <a:close/>
+              </a:path>
+            </a:pathLst>
+          </a:custGeom>
+          <a:solidFill>
+            <a:schemeClr val="accent2"/>
+          </a:solidFill>
+          <a:ln>
+            <a:noFill/>
+          </a:ln>
+        </p:spPr>
+      </p:sp>
+      <p:sp>
+        <p:nvSpPr>
+          <p:cNvPr id="26" name="txt.unit.3"/>
+          <p:cNvSpPr txBox="1"/>
+          <p:nvPr/>
+        </p:nvSpPr>
+        <p:spPr>
+          <a:xfrm>
+            <a:off x="9683750" y="3962400"/>
+            <a:ext cx="1797050" cy="355600"/>
+          </a:xfrm>
+          <a:prstGeom prst="rect">
+            <a:avLst/>
+          </a:prstGeom>
+          <a:noFill/>
+        </p:spPr>
+        <p:txBody>
+          <a:bodyPr wrap="square" lIns="0" tIns="0" rIns="0" bIns="0" anchor="t" rtlCol="0">
+            <a:noAutofit/>
+          </a:bodyPr>
+          <a:lstStyle/>
+          <a:p>
+            <a:pPr algn="r" eaLnBrk="1" hangingPunct="1" latinLnBrk="0">
+              <a:lnSpc>
+                <a:spcPts val="2800"/>
+              </a:lnSpc>
+            </a:pPr>
+            <a:r>
+              <a:rPr lang="ja-JP" altLang="en-US" sz="2300" b="1">
+                <a:solidFill>
+                  <a:schemeClr val="tx1"/>
+                </a:solidFill>
+                <a:latin typeface="Barlow"/>
+                <a:ea typeface="Noto Sans JP"/>
+              </a:rPr>
+              <a:t>件</a:t>
+            </a:r>
+            <a:endParaRPr lang="ja-JP" altLang="en-US" sz="2300" b="1" dirty="0"/>
+          </a:p>
+        </p:txBody>
+      </p:sp>
+      <p:sp>
+        <p:nvSpPr>
+          <p:cNvPr id="27" name="txt.note.3"/>
+          <p:cNvSpPr txBox="1"/>
+          <p:nvPr/>
+        </p:nvSpPr>
+        <p:spPr>
+          <a:xfrm>
+            <a:off x="9759950" y="4368800"/>
+            <a:ext cx="2286000" cy="584200"/>
+          </a:xfrm>
+          <a:prstGeom prst="rect">
+            <a:avLst/>
+          </a:prstGeom>
+          <a:noFill/>
+        </p:spPr>
+        <p:txBody>
+          <a:bodyPr wrap="square" lIns="0" tIns="0" rIns="0" bIns="0" anchor="t" rtlCol="0">
+            <a:noAutofit/>
+          </a:bodyPr>
+          <a:lstStyle/>
+          <a:p>
+            <a:pPr algn="l" eaLnBrk="1" hangingPunct="1" latinLnBrk="0">
+              <a:lnSpc>
+                <a:spcPts val="2200"/>
+              </a:lnSpc>
+            </a:pPr>
+            <a:r>
+              <a:rPr lang="ja-JP" altLang="en-US" sz="1500" b="1">
+                <a:solidFill>
+                  <a:schemeClr val="tx1"/>
+                </a:solidFill>
+                <a:latin typeface="Barlow"/>
+                <a:ea typeface="Noto Sans JP"/>
+              </a:rPr>
+              <a:t>日程づくりを</a:t>
+            </a:r>
+            <a:endParaRPr lang="ja-JP" altLang="en-US" sz="1500" b="1" dirty="0"/>
+          </a:p>
+          <a:p>
+            <a:pPr algn="l" eaLnBrk="1" hangingPunct="1" latinLnBrk="0">
+              <a:lnSpc>
+                <a:spcPts val="2200"/>
+              </a:lnSpc>
+            </a:pPr>
+            <a:r>
+              <a:rPr lang="ja-JP" altLang="en-US" sz="1500" b="1">
+                <a:solidFill>
+                  <a:schemeClr val="tx1"/>
+                </a:solidFill>
+                <a:latin typeface="Barlow"/>
+                <a:ea typeface="Noto Sans JP"/>
+              </a:rPr>
+              <a:t>仕組み化して遅れを防ぐ</a:t>
+            </a:r>
+            <a:endParaRPr lang="ja-JP" altLang="en-US" sz="1500" b="1" dirty="0"/>
+          </a:p>
+        </p:txBody>
+      </p:sp>
+      <p:sp>
+        <p:nvSpPr>
+          <p:cNvPr id="28" name="txt.footnote"/>
+          <p:cNvSpPr txBox="1"/>
+          <p:nvPr/>
+        </p:nvSpPr>
+        <p:spPr>
+          <a:xfrm>
+            <a:off x="3816350" y="5867400"/>
+            <a:ext cx="7620000" cy="558800"/>
+          </a:xfrm>
+          <a:prstGeom prst="rect">
+            <a:avLst/>
+          </a:prstGeom>
+          <a:noFill/>
+        </p:spPr>
+        <p:txBody>
+          <a:bodyPr wrap="square" lIns="0" tIns="0" rIns="0" bIns="0" anchor="t" rtlCol="0">
+            <a:noAutofit/>
+          </a:bodyPr>
+          <a:lstStyle/>
+          <a:p>
+            <a:pPr algn="l" eaLnBrk="1" hangingPunct="1" latinLnBrk="0">
+              <a:lnSpc>
+                <a:spcPts val="2200"/>
+              </a:lnSpc>
+            </a:pPr>
+            <a:r>
+              <a:rPr lang="ja-JP" altLang="en-US" sz="1300" b="1">
+                <a:solidFill>
+                  <a:schemeClr val="tx1"/>
+                </a:solidFill>
+                <a:latin typeface="Barlow"/>
+                <a:ea typeface="Noto Sans JP"/>
+              </a:rPr>
+              <a:t>いずれも3年後の目標値。現状は稼働率62%、不良率3.8%、納期遅れ月14件です。</a:t>
+            </a:r>
+            <a:endParaRPr lang="ja-JP" altLang="en-US" sz="1300" b="1" dirty="0"/>
           </a:p>
         </p:txBody>
       </p:sp>
@@ -9271,41 +9532,16 @@
         <p:nvPr/>
       </p:nvGrpSpPr>
       <p:grpSpPr/>
-      <p:pic>
-        <p:nvPicPr>
-          <p:cNvPr id="2" name="img.hero" descr="左の写真"/>
-          <p:cNvPicPr>
-            <a:picLocks noChangeAspect="1"/>
-          </p:cNvPicPr>
-          <p:nvPr/>
-        </p:nvPicPr>
-        <p:blipFill>
-          <a:blip r:embed="rId4-created"/>
-          <a:srcRect/>
-          <a:stretch>
-            <a:fillRect/>
-          </a:stretch>
-        </p:blipFill>
-        <p:spPr>
-          <a:xfrm>
-            <a:off x="0" y="0"/>
-            <a:ext cx="6426200" cy="6858000"/>
-          </a:xfrm>
-          <a:prstGeom prst="rect">
-            <a:avLst/>
-          </a:prstGeom>
-        </p:spPr>
-      </p:pic>
-      <p:sp>
-        <p:nvSpPr>
-          <p:cNvPr id="3" name="deco.tri-1"/>
+      <p:sp>
+        <p:nvSpPr>
+          <p:cNvPr id="2" name="deco.tri-left"/>
           <p:cNvSpPr/>
           <p:nvPr/>
         </p:nvSpPr>
         <p:spPr>
           <a:xfrm>
-            <a:off x="-232410" y="78740"/>
-            <a:ext cx="3328670" cy="3328670"/>
+            <a:off x="0" y="4014470"/>
+            <a:ext cx="1177290" cy="1176020"/>
           </a:xfrm>
           <a:custGeom>
             <a:avLst/>
@@ -9314,245 +9550,15 @@
             <a:cxnLst/>
             <a:rect l="l" t="t" r="r" b="b"/>
             <a:pathLst>
-              <a:path w="3328670" h="3328670">
-                <a:moveTo>
-                  <a:pt x="3328670" y="0"/>
-                </a:moveTo>
-                <a:lnTo>
-                  <a:pt x="3328670" y="3328670"/>
-                </a:lnTo>
-                <a:lnTo>
-                  <a:pt x="0" y="3328670"/>
-                </a:lnTo>
-                <a:close/>
-              </a:path>
-            </a:pathLst>
-          </a:custGeom>
-          <a:solidFill>
-            <a:schemeClr val="accent1">
-              <a:alpha val="88000"/>
-            </a:schemeClr>
-          </a:solidFill>
-          <a:ln>
-            <a:noFill/>
-          </a:ln>
-        </p:spPr>
-      </p:sp>
-      <p:sp>
-        <p:nvSpPr>
-          <p:cNvPr id="4" name="deco.tri-2"/>
-          <p:cNvSpPr/>
-          <p:nvPr/>
-        </p:nvSpPr>
-        <p:spPr>
-          <a:xfrm>
-            <a:off x="-232410" y="3392170"/>
-            <a:ext cx="3328670" cy="3328670"/>
-          </a:xfrm>
-          <a:custGeom>
-            <a:avLst/>
-            <a:gdLst/>
-            <a:ahLst/>
-            <a:cxnLst/>
-            <a:rect l="l" t="t" r="r" b="b"/>
-            <a:pathLst>
-              <a:path w="3328670" h="3328670">
-                <a:moveTo>
-                  <a:pt x="0" y="3328670"/>
-                </a:moveTo>
-                <a:lnTo>
-                  <a:pt x="0" y="0"/>
-                </a:lnTo>
-                <a:lnTo>
-                  <a:pt x="3328670" y="0"/>
-                </a:lnTo>
-                <a:close/>
-              </a:path>
-            </a:pathLst>
-          </a:custGeom>
-          <a:solidFill>
-            <a:schemeClr val="accent1">
-              <a:alpha val="88000"/>
-            </a:schemeClr>
-          </a:solidFill>
-          <a:ln>
-            <a:noFill/>
-          </a:ln>
-        </p:spPr>
-      </p:sp>
-      <p:sp>
-        <p:nvSpPr>
-          <p:cNvPr id="5" name="deco.tri-3"/>
-          <p:cNvSpPr/>
-          <p:nvPr/>
-        </p:nvSpPr>
-        <p:spPr>
-          <a:xfrm>
-            <a:off x="3102610" y="106680"/>
-            <a:ext cx="3328670" cy="3327400"/>
-          </a:xfrm>
-          <a:custGeom>
-            <a:avLst/>
-            <a:gdLst/>
-            <a:ahLst/>
-            <a:cxnLst/>
-            <a:rect l="l" t="t" r="r" b="b"/>
-            <a:pathLst>
-              <a:path w="3328670" h="3327400">
-                <a:moveTo>
-                  <a:pt x="3328670" y="0"/>
-                </a:moveTo>
-                <a:lnTo>
-                  <a:pt x="3328670" y="3327400"/>
-                </a:lnTo>
-                <a:lnTo>
-                  <a:pt x="0" y="3327400"/>
-                </a:lnTo>
-                <a:close/>
-              </a:path>
-            </a:pathLst>
-          </a:custGeom>
-          <a:solidFill>
-            <a:schemeClr val="accent1">
-              <a:alpha val="88000"/>
-            </a:schemeClr>
-          </a:solidFill>
-          <a:ln>
-            <a:noFill/>
-          </a:ln>
-        </p:spPr>
-      </p:sp>
-      <p:sp>
-        <p:nvSpPr>
-          <p:cNvPr id="6" name="deco.tri-4"/>
-          <p:cNvSpPr/>
-          <p:nvPr/>
-        </p:nvSpPr>
-        <p:spPr>
-          <a:xfrm>
-            <a:off x="3102610" y="3420110"/>
-            <a:ext cx="3328670" cy="3327400"/>
-          </a:xfrm>
-          <a:custGeom>
-            <a:avLst/>
-            <a:gdLst/>
-            <a:ahLst/>
-            <a:cxnLst/>
-            <a:rect l="l" t="t" r="r" b="b"/>
-            <a:pathLst>
-              <a:path w="3328670" h="3327400">
-                <a:moveTo>
-                  <a:pt x="0" y="3327400"/>
-                </a:moveTo>
-                <a:lnTo>
-                  <a:pt x="0" y="0"/>
-                </a:lnTo>
-                <a:lnTo>
-                  <a:pt x="3328670" y="0"/>
-                </a:lnTo>
-                <a:close/>
-              </a:path>
-            </a:pathLst>
-          </a:custGeom>
-          <a:solidFill>
-            <a:schemeClr val="accent1">
-              <a:alpha val="88000"/>
-            </a:schemeClr>
-          </a:solidFill>
-          <a:ln>
-            <a:noFill/>
-          </a:ln>
-        </p:spPr>
-      </p:sp>
-      <p:sp>
-        <p:nvSpPr>
-          <p:cNvPr id="7" name="txt.headline"/>
-          <p:cNvSpPr txBox="1"/>
-          <p:nvPr/>
-        </p:nvSpPr>
-        <p:spPr>
-          <a:xfrm>
-            <a:off x="7061200" y="889000"/>
-            <a:ext cx="4699000" cy="1016000"/>
-          </a:xfrm>
-          <a:prstGeom prst="rect">
-            <a:avLst/>
-          </a:prstGeom>
-          <a:noFill/>
-        </p:spPr>
-        <p:txBody>
-          <a:bodyPr wrap="square" lIns="0" tIns="0" rIns="0" bIns="0" anchor="b" rtlCol="0">
-            <a:noAutofit/>
-          </a:bodyPr>
-          <a:lstStyle/>
-          <a:p>
-            <a:pPr algn="l" eaLnBrk="1" hangingPunct="1" latinLnBrk="0">
-              <a:lnSpc>
-                <a:spcPts val="4000"/>
-              </a:lnSpc>
-            </a:pPr>
-            <a:r>
-              <a:rPr lang="ja-JP" altLang="en-US" sz="3250" b="0">
-                <a:solidFill>
-                  <a:schemeClr val="tx1"/>
-                </a:solidFill>
-                <a:latin typeface="Noto Serif JP"/>
-                <a:ea typeface="Noto Serif JP"/>
-              </a:rPr>
-              <a:t>現場を変える</a:t>
-            </a:r>
-            <a:endParaRPr lang="ja-JP" altLang="en-US" sz="3250" b="0" dirty="0"/>
-          </a:p>
-          <a:p>
-            <a:pPr algn="l" eaLnBrk="1" hangingPunct="1" latinLnBrk="0">
-              <a:lnSpc>
-                <a:spcPts val="4000"/>
-              </a:lnSpc>
-            </a:pPr>
-            <a:r>
-              <a:rPr lang="ja-JP" altLang="en-US" sz="3250" b="0">
-                <a:solidFill>
-                  <a:schemeClr val="tx1"/>
-                </a:solidFill>
-                <a:latin typeface="Noto Serif JP"/>
-                <a:ea typeface="Noto Serif JP"/>
-              </a:rPr>
-              <a:t>3つの取り組み</a:t>
-            </a:r>
-            <a:endParaRPr lang="ja-JP" altLang="en-US" sz="3250" b="0" dirty="0"/>
-          </a:p>
-        </p:txBody>
-      </p:sp>
-      <p:sp>
-        <p:nvSpPr>
-          <p:cNvPr id="8" name="deco.point-1"/>
-          <p:cNvSpPr/>
-          <p:nvPr/>
-        </p:nvSpPr>
-        <p:spPr>
-          <a:xfrm>
-            <a:off x="7061200" y="2603500"/>
-            <a:ext cx="152400" cy="152400"/>
-          </a:xfrm>
-          <a:custGeom>
-            <a:avLst/>
-            <a:gdLst/>
-            <a:ahLst/>
-            <a:cxnLst/>
-            <a:rect l="l" t="t" r="r" b="b"/>
-            <a:pathLst>
-              <a:path w="152400" h="152400">
+              <a:path w="1177290" h="1176020">
                 <a:moveTo>
                   <a:pt x="0" y="0"/>
                 </a:moveTo>
                 <a:lnTo>
-                  <a:pt x="152400" y="0"/>
-                </a:lnTo>
-                <a:lnTo>
-                  <a:pt x="152400" y="152400"/>
-                </a:lnTo>
-                <a:lnTo>
-                  <a:pt x="0" y="152400"/>
+                  <a:pt x="1177290" y="0"/>
+                </a:lnTo>
+                <a:lnTo>
+                  <a:pt x="0" y="1176020"/>
                 </a:lnTo>
                 <a:close/>
               </a:path>
@@ -9568,73 +9574,14 @@
       </p:sp>
       <p:sp>
         <p:nvSpPr>
-          <p:cNvPr id="9" name="txt.item.1"/>
-          <p:cNvSpPr txBox="1"/>
-          <p:nvPr/>
-        </p:nvSpPr>
-        <p:spPr>
-          <a:xfrm>
-            <a:off x="7366000" y="2540000"/>
-            <a:ext cx="4394200" cy="838200"/>
-          </a:xfrm>
-          <a:prstGeom prst="rect">
-            <a:avLst/>
-          </a:prstGeom>
-          <a:noFill/>
-        </p:spPr>
-        <p:txBody>
-          <a:bodyPr wrap="square" lIns="0" tIns="0" rIns="0" bIns="0" anchor="t" rtlCol="0">
-            <a:noAutofit/>
-          </a:bodyPr>
-          <a:lstStyle/>
-          <a:p>
-            <a:pPr algn="l" eaLnBrk="1" hangingPunct="1" latinLnBrk="0">
-              <a:lnSpc>
-                <a:spcPts val="2200"/>
-              </a:lnSpc>
-            </a:pPr>
-            <a:r>
-              <a:rPr lang="ja-JP" altLang="en-US" sz="1600" b="0">
-                <a:solidFill>
-                  <a:schemeClr val="tx1"/>
-                </a:solidFill>
-                <a:latin typeface="Barlow Medium"/>
-                <a:ea typeface="Noto Sans JP Medium"/>
-              </a:rPr>
-              <a:t>受注と指示書のデジタル化：画面で</a:t>
-            </a:r>
-            <a:endParaRPr lang="ja-JP" altLang="en-US" sz="1600" b="0" dirty="0"/>
-          </a:p>
-          <a:p>
-            <a:pPr algn="l" eaLnBrk="1" hangingPunct="1" latinLnBrk="0">
-              <a:lnSpc>
-                <a:spcPts val="2200"/>
-              </a:lnSpc>
-            </a:pPr>
-            <a:r>
-              <a:rPr lang="ja-JP" altLang="en-US" sz="1600" b="0">
-                <a:solidFill>
-                  <a:schemeClr val="tx1"/>
-                </a:solidFill>
-                <a:latin typeface="Barlow Medium"/>
-                <a:ea typeface="Noto Sans JP Medium"/>
-              </a:rPr>
-              <a:t>入力し、指示書を自動で作る</a:t>
-            </a:r>
-            <a:endParaRPr lang="ja-JP" altLang="en-US" sz="1600" b="0" dirty="0"/>
-          </a:p>
-        </p:txBody>
-      </p:sp>
-      <p:sp>
-        <p:nvSpPr>
-          <p:cNvPr id="10" name="deco.point-2"/>
+          <p:cNvPr id="3" name="deco.tri-right"/>
           <p:cNvSpPr/>
           <p:nvPr/>
         </p:nvSpPr>
         <p:spPr>
           <a:xfrm>
-            <a:off x="7061200" y="3771900"/>
-            <a:ext cx="152400" cy="152400"/>
+            <a:off x="8135620" y="1460500"/>
+            <a:ext cx="4103370" cy="4103370"/>
           </a:xfrm>
           <a:custGeom>
             <a:avLst/>
@@ -9643,18 +9590,15 @@
             <a:cxnLst/>
             <a:rect l="l" t="t" r="r" b="b"/>
             <a:pathLst>
-              <a:path w="152400" h="152400">
+              <a:path w="4103370" h="4103370">
                 <a:moveTo>
-                  <a:pt x="0" y="0"/>
+                  <a:pt x="4103370" y="0"/>
                 </a:moveTo>
                 <a:lnTo>
-                  <a:pt x="152400" y="0"/>
-                </a:lnTo>
-                <a:lnTo>
-                  <a:pt x="152400" y="152400"/>
-                </a:lnTo>
-                <a:lnTo>
-                  <a:pt x="0" y="152400"/>
+                  <a:pt x="4103370" y="4103370"/>
+                </a:lnTo>
+                <a:lnTo>
+                  <a:pt x="0" y="4103370"/>
                 </a:lnTo>
                 <a:close/>
               </a:path>
@@ -9670,73 +9614,14 @@
       </p:sp>
       <p:sp>
         <p:nvSpPr>
-          <p:cNvPr id="11" name="txt.item.2"/>
-          <p:cNvSpPr txBox="1"/>
-          <p:nvPr/>
-        </p:nvSpPr>
-        <p:spPr>
-          <a:xfrm>
-            <a:off x="7366000" y="3708400"/>
-            <a:ext cx="4394200" cy="838200"/>
-          </a:xfrm>
-          <a:prstGeom prst="rect">
-            <a:avLst/>
-          </a:prstGeom>
-          <a:noFill/>
-        </p:spPr>
-        <p:txBody>
-          <a:bodyPr wrap="square" lIns="0" tIns="0" rIns="0" bIns="0" anchor="t" rtlCol="0">
-            <a:noAutofit/>
-          </a:bodyPr>
-          <a:lstStyle/>
-          <a:p>
-            <a:pPr algn="l" eaLnBrk="1" hangingPunct="1" latinLnBrk="0">
-              <a:lnSpc>
-                <a:spcPts val="2200"/>
-              </a:lnSpc>
-            </a:pPr>
-            <a:r>
-              <a:rPr lang="ja-JP" altLang="en-US" sz="1600" b="0">
-                <a:solidFill>
-                  <a:schemeClr val="tx1"/>
-                </a:solidFill>
-                <a:latin typeface="Barlow Medium"/>
-                <a:ea typeface="Noto Sans JP Medium"/>
-              </a:rPr>
-              <a:t>機械の稼働を見える化：センサーで</a:t>
-            </a:r>
-            <a:endParaRPr lang="ja-JP" altLang="en-US" sz="1600" b="0" dirty="0"/>
-          </a:p>
-          <a:p>
-            <a:pPr algn="l" eaLnBrk="1" hangingPunct="1" latinLnBrk="0">
-              <a:lnSpc>
-                <a:spcPts val="2200"/>
-              </a:lnSpc>
-            </a:pPr>
-            <a:r>
-              <a:rPr lang="ja-JP" altLang="en-US" sz="1600" b="0">
-                <a:solidFill>
-                  <a:schemeClr val="tx1"/>
-                </a:solidFill>
-                <a:latin typeface="Barlow Medium"/>
-                <a:ea typeface="Noto Sans JP Medium"/>
-              </a:rPr>
-              <a:t>動いているか止まっているかを記録</a:t>
-            </a:r>
-            <a:endParaRPr lang="ja-JP" altLang="en-US" sz="1600" b="0" dirty="0"/>
-          </a:p>
-        </p:txBody>
-      </p:sp>
-      <p:sp>
-        <p:nvSpPr>
-          <p:cNvPr id="12" name="deco.point-3"/>
+          <p:cNvPr id="4" name="deco.plate"/>
           <p:cNvSpPr/>
           <p:nvPr/>
         </p:nvSpPr>
         <p:spPr>
           <a:xfrm>
-            <a:off x="7061200" y="4940300"/>
-            <a:ext cx="152400" cy="152400"/>
+            <a:off x="1083310" y="2186940"/>
+            <a:ext cx="9500870" cy="2772410"/>
           </a:xfrm>
           <a:custGeom>
             <a:avLst/>
@@ -9745,25 +9630,25 @@
             <a:cxnLst/>
             <a:rect l="l" t="t" r="r" b="b"/>
             <a:pathLst>
-              <a:path w="152400" h="152400">
+              <a:path w="9500870" h="2772410">
                 <a:moveTo>
-                  <a:pt x="0" y="0"/>
+                  <a:pt x="0" y="2760980"/>
                 </a:moveTo>
                 <a:lnTo>
-                  <a:pt x="152400" y="0"/>
-                </a:lnTo>
-                <a:lnTo>
-                  <a:pt x="152400" y="152400"/>
-                </a:lnTo>
-                <a:lnTo>
-                  <a:pt x="0" y="152400"/>
+                  <a:pt x="2759710" y="0"/>
+                </a:lnTo>
+                <a:lnTo>
+                  <a:pt x="9500870" y="0"/>
+                </a:lnTo>
+                <a:lnTo>
+                  <a:pt x="6728460" y="2772410"/>
                 </a:lnTo>
                 <a:close/>
               </a:path>
             </a:pathLst>
           </a:custGeom>
           <a:solidFill>
-            <a:schemeClr val="accent2"/>
+            <a:schemeClr val="accent1"/>
           </a:solidFill>
           <a:ln>
             <a:noFill/>
@@ -9772,14 +9657,57 @@
       </p:sp>
       <p:sp>
         <p:nvSpPr>
-          <p:cNvPr id="13" name="txt.item.3"/>
+          <p:cNvPr id="5" name="deco.line"/>
+          <p:cNvSpPr/>
+          <p:nvPr/>
+        </p:nvSpPr>
+        <p:spPr>
+          <a:xfrm>
+            <a:off x="5046980" y="6168390"/>
+            <a:ext cx="1640840" cy="689610"/>
+          </a:xfrm>
+          <a:custGeom>
+            <a:avLst/>
+            <a:gdLst/>
+            <a:ahLst/>
+            <a:cxnLst/>
+            <a:rect l="l" t="t" r="r" b="b"/>
+            <a:pathLst>
+              <a:path w="1640840" h="689610">
+                <a:moveTo>
+                  <a:pt x="0" y="689610"/>
+                </a:moveTo>
+                <a:lnTo>
+                  <a:pt x="689610" y="0"/>
+                </a:lnTo>
+                <a:lnTo>
+                  <a:pt x="1640840" y="0"/>
+                </a:lnTo>
+                <a:lnTo>
+                  <a:pt x="951230" y="689610"/>
+                </a:lnTo>
+                <a:close/>
+              </a:path>
+            </a:pathLst>
+          </a:custGeom>
+          <a:solidFill>
+            <a:schemeClr val="accent1"/>
+          </a:solidFill>
+          <a:ln>
+            <a:noFill/>
+          </a:ln>
+        </p:spPr>
+      </p:sp>
+      <p:sp>
+        <p:nvSpPr>
+          <p:cNvPr id="6" name="txt.headline"/>
           <p:cNvSpPr txBox="1"/>
           <p:nvPr/>
         </p:nvSpPr>
         <p:spPr>
           <a:xfrm>
-            <a:off x="7366000" y="4876800"/>
-            <a:ext cx="4394200" cy="838200"/>
+            <a:off x="3175000" y="3187700"/>
+            <a:ext cx="5588000" cy="762000"/>
           </a:xfrm>
           <a:prstGeom prst="rect">
             <a:avLst/>
@@ -9787,45 +9715,27 @@
           <a:noFill/>
         </p:spPr>
         <p:txBody>
-          <a:bodyPr wrap="square" lIns="0" tIns="0" rIns="0" bIns="0" anchor="t" rtlCol="0">
+          <a:bodyPr wrap="square" lIns="0" tIns="0" rIns="0" bIns="0" anchor="ctr" rtlCol="0">
             <a:noAutofit/>
           </a:bodyPr>
           <a:lstStyle/>
           <a:p>
-            <a:pPr algn="l" eaLnBrk="1" hangingPunct="1" latinLnBrk="0">
+            <a:pPr algn="ctr" eaLnBrk="1" hangingPunct="1" latinLnBrk="0">
               <a:lnSpc>
-                <a:spcPts val="2200"/>
+                <a:spcPts val="5000"/>
               </a:lnSpc>
             </a:pPr>
             <a:r>
-              <a:rPr lang="ja-JP" altLang="en-US" sz="1600" b="0">
-                <a:solidFill>
-                  <a:schemeClr val="tx1"/>
-                </a:solidFill>
-                <a:latin typeface="Barlow Medium"/>
-                <a:ea typeface="Noto Sans JP Medium"/>
+              <a:rPr lang="ja-JP" altLang="en-US" sz="4000" b="1">
+                <a:solidFill>
+                  <a:schemeClr val="bg1"/>
+                </a:solidFill>
+                <a:latin typeface="Barlow"/>
+                <a:ea typeface="Noto Sans JP"/>
               </a:rPr>
-              <a:t>日程づくりを誰でもできるように</a:t>
-            </a:r>
-            <a:endParaRPr lang="ja-JP" altLang="en-US" sz="1600" b="0" dirty="0"/>
-          </a:p>
-          <a:p>
-            <a:pPr algn="l" eaLnBrk="1" hangingPunct="1" latinLnBrk="0">
-              <a:lnSpc>
-                <a:spcPts val="2200"/>
-              </a:lnSpc>
-            </a:pPr>
-            <a:r>
-              <a:rPr lang="ja-JP" altLang="en-US" sz="1600" b="0">
-                <a:solidFill>
-                  <a:schemeClr val="tx1"/>
-                </a:solidFill>
-                <a:latin typeface="Barlow Medium"/>
-                <a:ea typeface="Noto Sans JP Medium"/>
-              </a:rPr>
-              <a:t>：ルールを書き出し、案は仕組みが作る</a:t>
-            </a:r>
-            <a:endParaRPr lang="ja-JP" altLang="en-US" sz="1600" b="0" dirty="0"/>
+              <a:t>3つの取り組み</a:t>
+            </a:r>
+            <a:endParaRPr lang="ja-JP" altLang="en-US" sz="4000" b="1" dirty="0"/>
           </a:p>
         </p:txBody>
       </p:sp>
@@ -9849,14 +9759,14 @@
       <p:grpSpPr/>
       <p:pic>
         <p:nvPicPr>
-          <p:cNvPr id="2" name="img.right" descr="右の写真"/>
+          <p:cNvPr id="2" name="img.hero" descr="左の写真"/>
           <p:cNvPicPr>
             <a:picLocks noChangeAspect="1"/>
           </p:cNvPicPr>
           <p:nvPr/>
         </p:nvPicPr>
         <p:blipFill>
-          <a:blip r:embed="rId5-created"/>
+          <a:blip r:embed="rId4-created"/>
           <a:srcRect/>
           <a:stretch>
             <a:fillRect/>
@@ -9864,49 +9774,24 @@
         </p:blipFill>
         <p:spPr>
           <a:xfrm>
-            <a:off x="2647950" y="0"/>
-            <a:ext cx="3333750" cy="6858000"/>
+            <a:off x="0" y="0"/>
+            <a:ext cx="6426200" cy="6858000"/>
           </a:xfrm>
           <a:prstGeom prst="rect">
             <a:avLst/>
           </a:prstGeom>
         </p:spPr>
       </p:pic>
-      <p:pic>
-        <p:nvPicPr>
-          <p:cNvPr id="3" name="img.left" descr="左の写真"/>
-          <p:cNvPicPr>
-            <a:picLocks noChangeAspect="1"/>
-          </p:cNvPicPr>
-          <p:nvPr/>
-        </p:nvPicPr>
-        <p:blipFill>
-          <a:blip r:embed="rId6-created"/>
-          <a:srcRect/>
-          <a:stretch>
-            <a:fillRect/>
-          </a:stretch>
-        </p:blipFill>
-        <p:spPr>
-          <a:xfrm>
-            <a:off x="393700" y="0"/>
-            <a:ext cx="2254250" cy="6858000"/>
-          </a:xfrm>
-          <a:prstGeom prst="rect">
-            <a:avLst/>
-          </a:prstGeom>
-        </p:spPr>
-      </p:pic>
-      <p:sp>
-        <p:nvSpPr>
-          <p:cNvPr id="4" name="deco.tri-top"/>
+      <p:sp>
+        <p:nvSpPr>
+          <p:cNvPr id="3" name="deco.tri-1"/>
           <p:cNvSpPr/>
           <p:nvPr/>
         </p:nvSpPr>
         <p:spPr>
           <a:xfrm>
-            <a:off x="2647950" y="0"/>
-            <a:ext cx="3326130" cy="3315970"/>
+            <a:off x="-232410" y="78740"/>
+            <a:ext cx="3328670" cy="3328670"/>
           </a:xfrm>
           <a:custGeom>
             <a:avLst/>
@@ -9915,15 +9800,15 @@
             <a:cxnLst/>
             <a:rect l="l" t="t" r="r" b="b"/>
             <a:pathLst>
-              <a:path w="3326130" h="3315970">
+              <a:path w="3328670" h="3328670">
                 <a:moveTo>
-                  <a:pt x="0" y="0"/>
+                  <a:pt x="3328670" y="0"/>
                 </a:moveTo>
                 <a:lnTo>
-                  <a:pt x="3326130" y="0"/>
-                </a:lnTo>
-                <a:lnTo>
-                  <a:pt x="0" y="3315970"/>
+                  <a:pt x="3328670" y="3328670"/>
+                </a:lnTo>
+                <a:lnTo>
+                  <a:pt x="0" y="3328670"/>
                 </a:lnTo>
                 <a:close/>
               </a:path>
@@ -9941,14 +9826,14 @@
       </p:sp>
       <p:sp>
         <p:nvSpPr>
-          <p:cNvPr id="5" name="deco.tri-bottom"/>
+          <p:cNvPr id="4" name="deco.tri-2"/>
           <p:cNvSpPr/>
           <p:nvPr/>
         </p:nvSpPr>
         <p:spPr>
           <a:xfrm>
-            <a:off x="958850" y="5090160"/>
-            <a:ext cx="1689100" cy="1687830"/>
+            <a:off x="-232410" y="3392170"/>
+            <a:ext cx="3328670" cy="3328670"/>
           </a:xfrm>
           <a:custGeom>
             <a:avLst/>
@@ -9957,15 +9842,15 @@
             <a:cxnLst/>
             <a:rect l="l" t="t" r="r" b="b"/>
             <a:pathLst>
-              <a:path w="1689100" h="1687830">
+              <a:path w="3328670" h="3328670">
                 <a:moveTo>
-                  <a:pt x="0" y="1687830"/>
+                  <a:pt x="0" y="3328670"/>
                 </a:moveTo>
                 <a:lnTo>
-                  <a:pt x="1689100" y="0"/>
-                </a:lnTo>
-                <a:lnTo>
-                  <a:pt x="1689100" y="1687830"/>
+                  <a:pt x="0" y="0"/>
+                </a:lnTo>
+                <a:lnTo>
+                  <a:pt x="3328670" y="0"/>
                 </a:lnTo>
                 <a:close/>
               </a:path>
@@ -9983,14 +9868,14 @@
       </p:sp>
       <p:sp>
         <p:nvSpPr>
-          <p:cNvPr id="6" name="deco.end-triangle"/>
+          <p:cNvPr id="5" name="deco.tri-3"/>
           <p:cNvSpPr/>
           <p:nvPr/>
         </p:nvSpPr>
         <p:spPr>
           <a:xfrm>
-            <a:off x="10998200" y="5702300"/>
-            <a:ext cx="933450" cy="933450"/>
+            <a:off x="3102610" y="106680"/>
+            <a:ext cx="3328670" cy="3327400"/>
           </a:xfrm>
           <a:custGeom>
             <a:avLst/>
@@ -9999,15 +9884,161 @@
             <a:cxnLst/>
             <a:rect l="l" t="t" r="r" b="b"/>
             <a:pathLst>
-              <a:path w="933450" h="933450">
+              <a:path w="3328670" h="3327400">
                 <a:moveTo>
-                  <a:pt x="933450" y="0"/>
+                  <a:pt x="3328670" y="0"/>
                 </a:moveTo>
                 <a:lnTo>
-                  <a:pt x="933450" y="933450"/>
-                </a:lnTo>
-                <a:lnTo>
-                  <a:pt x="0" y="933450"/>
+                  <a:pt x="3328670" y="3327400"/>
+                </a:lnTo>
+                <a:lnTo>
+                  <a:pt x="0" y="3327400"/>
+                </a:lnTo>
+                <a:close/>
+              </a:path>
+            </a:pathLst>
+          </a:custGeom>
+          <a:solidFill>
+            <a:schemeClr val="accent1">
+              <a:alpha val="88000"/>
+            </a:schemeClr>
+          </a:solidFill>
+          <a:ln>
+            <a:noFill/>
+          </a:ln>
+        </p:spPr>
+      </p:sp>
+      <p:sp>
+        <p:nvSpPr>
+          <p:cNvPr id="6" name="deco.tri-4"/>
+          <p:cNvSpPr/>
+          <p:nvPr/>
+        </p:nvSpPr>
+        <p:spPr>
+          <a:xfrm>
+            <a:off x="3102610" y="3420110"/>
+            <a:ext cx="3328670" cy="3327400"/>
+          </a:xfrm>
+          <a:custGeom>
+            <a:avLst/>
+            <a:gdLst/>
+            <a:ahLst/>
+            <a:cxnLst/>
+            <a:rect l="l" t="t" r="r" b="b"/>
+            <a:pathLst>
+              <a:path w="3328670" h="3327400">
+                <a:moveTo>
+                  <a:pt x="0" y="3327400"/>
+                </a:moveTo>
+                <a:lnTo>
+                  <a:pt x="0" y="0"/>
+                </a:lnTo>
+                <a:lnTo>
+                  <a:pt x="3328670" y="0"/>
+                </a:lnTo>
+                <a:close/>
+              </a:path>
+            </a:pathLst>
+          </a:custGeom>
+          <a:solidFill>
+            <a:schemeClr val="accent1">
+              <a:alpha val="88000"/>
+            </a:schemeClr>
+          </a:solidFill>
+          <a:ln>
+            <a:noFill/>
+          </a:ln>
+        </p:spPr>
+      </p:sp>
+      <p:sp>
+        <p:nvSpPr>
+          <p:cNvPr id="7" name="txt.headline"/>
+          <p:cNvSpPr txBox="1"/>
+          <p:nvPr/>
+        </p:nvSpPr>
+        <p:spPr>
+          <a:xfrm>
+            <a:off x="7061200" y="889000"/>
+            <a:ext cx="4699000" cy="1016000"/>
+          </a:xfrm>
+          <a:prstGeom prst="rect">
+            <a:avLst/>
+          </a:prstGeom>
+          <a:noFill/>
+        </p:spPr>
+        <p:txBody>
+          <a:bodyPr wrap="square" lIns="0" tIns="0" rIns="0" bIns="0" anchor="b" rtlCol="0">
+            <a:noAutofit/>
+          </a:bodyPr>
+          <a:lstStyle/>
+          <a:p>
+            <a:pPr algn="l" eaLnBrk="1" hangingPunct="1" latinLnBrk="0">
+              <a:lnSpc>
+                <a:spcPts val="4000"/>
+              </a:lnSpc>
+            </a:pPr>
+            <a:r>
+              <a:rPr lang="ja-JP" altLang="en-US" sz="3250" b="0">
+                <a:solidFill>
+                  <a:schemeClr val="tx1"/>
+                </a:solidFill>
+                <a:latin typeface="Noto Serif JP"/>
+                <a:ea typeface="Noto Serif JP"/>
+              </a:rPr>
+              <a:t>3つの取り組みで</a:t>
+            </a:r>
+            <a:endParaRPr lang="ja-JP" altLang="en-US" sz="3250" b="0" dirty="0"/>
+          </a:p>
+          <a:p>
+            <a:pPr algn="l" eaLnBrk="1" hangingPunct="1" latinLnBrk="0">
+              <a:lnSpc>
+                <a:spcPts val="4000"/>
+              </a:lnSpc>
+            </a:pPr>
+            <a:r>
+              <a:rPr lang="ja-JP" altLang="en-US" sz="3250" b="0">
+                <a:solidFill>
+                  <a:schemeClr val="tx1"/>
+                </a:solidFill>
+                <a:latin typeface="Noto Serif JP"/>
+                <a:ea typeface="Noto Serif JP"/>
+              </a:rPr>
+              <a:t>工場を変える</a:t>
+            </a:r>
+            <a:endParaRPr lang="ja-JP" altLang="en-US" sz="3250" b="0" dirty="0"/>
+          </a:p>
+        </p:txBody>
+      </p:sp>
+      <p:sp>
+        <p:nvSpPr>
+          <p:cNvPr id="8" name="deco.point-1"/>
+          <p:cNvSpPr/>
+          <p:nvPr/>
+        </p:nvSpPr>
+        <p:spPr>
+          <a:xfrm>
+            <a:off x="7061200" y="2603500"/>
+            <a:ext cx="152400" cy="152400"/>
+          </a:xfrm>
+          <a:custGeom>
+            <a:avLst/>
+            <a:gdLst/>
+            <a:ahLst/>
+            <a:cxnLst/>
+            <a:rect l="l" t="t" r="r" b="b"/>
+            <a:pathLst>
+              <a:path w="152400" h="152400">
+                <a:moveTo>
+                  <a:pt x="0" y="0"/>
+                </a:moveTo>
+                <a:lnTo>
+                  <a:pt x="152400" y="0"/>
+                </a:lnTo>
+                <a:lnTo>
+                  <a:pt x="152400" y="152400"/>
+                </a:lnTo>
+                <a:lnTo>
+                  <a:pt x="0" y="152400"/>
                 </a:lnTo>
                 <a:close/>
               </a:path>
@@ -10023,14 +10054,14 @@
       </p:sp>
       <p:sp>
         <p:nvSpPr>
-          <p:cNvPr id="7" name="txt.headline"/>
+          <p:cNvPr id="9" name="txt.item.1"/>
           <p:cNvSpPr txBox="1"/>
           <p:nvPr/>
         </p:nvSpPr>
         <p:spPr>
           <a:xfrm>
-            <a:off x="6604000" y="889000"/>
-            <a:ext cx="5080000" cy="1016000"/>
+            <a:off x="7366000" y="2540000"/>
+            <a:ext cx="4394200" cy="838200"/>
           </a:xfrm>
           <a:prstGeom prst="rect">
             <a:avLst/>
@@ -10038,58 +10069,58 @@
           <a:noFill/>
         </p:spPr>
         <p:txBody>
-          <a:bodyPr wrap="square" lIns="0" tIns="0" rIns="0" bIns="0" anchor="b" rtlCol="0">
+          <a:bodyPr wrap="square" lIns="0" tIns="0" rIns="0" bIns="0" anchor="t" rtlCol="0">
             <a:noAutofit/>
           </a:bodyPr>
           <a:lstStyle/>
           <a:p>
             <a:pPr algn="l" eaLnBrk="1" hangingPunct="1" latinLnBrk="0">
               <a:lnSpc>
-                <a:spcPts val="4000"/>
+                <a:spcPts val="2200"/>
               </a:lnSpc>
             </a:pPr>
             <a:r>
-              <a:rPr lang="ja-JP" altLang="en-US" sz="3250" b="0">
+              <a:rPr lang="ja-JP" altLang="en-US" sz="1600" b="0">
                 <a:solidFill>
                   <a:schemeClr val="tx1"/>
                 </a:solidFill>
-                <a:latin typeface="Noto Serif JP"/>
-                <a:ea typeface="Noto Serif JP"/>
+                <a:latin typeface="Barlow Medium"/>
+                <a:ea typeface="Noto Sans JP Medium"/>
               </a:rPr>
-              <a:t>機械の稼働を</a:t>
-            </a:r>
-            <a:endParaRPr lang="ja-JP" altLang="en-US" sz="3250" b="0" dirty="0"/>
+              <a:t>受注と指示書のデジタル化。画面で</a:t>
+            </a:r>
+            <a:endParaRPr lang="ja-JP" altLang="en-US" sz="1600" b="0" dirty="0"/>
           </a:p>
           <a:p>
             <a:pPr algn="l" eaLnBrk="1" hangingPunct="1" latinLnBrk="0">
               <a:lnSpc>
-                <a:spcPts val="4000"/>
+                <a:spcPts val="2200"/>
               </a:lnSpc>
             </a:pPr>
             <a:r>
-              <a:rPr lang="ja-JP" altLang="en-US" sz="3250" b="0">
+              <a:rPr lang="ja-JP" altLang="en-US" sz="1600" b="0">
                 <a:solidFill>
                   <a:schemeClr val="tx1"/>
                 </a:solidFill>
-                <a:latin typeface="Noto Serif JP"/>
-                <a:ea typeface="Noto Serif JP"/>
+                <a:latin typeface="Barlow Medium"/>
+                <a:ea typeface="Noto Sans JP Medium"/>
               </a:rPr>
-              <a:t>見える化する</a:t>
-            </a:r>
-            <a:endParaRPr lang="ja-JP" altLang="en-US" sz="3250" b="0" dirty="0"/>
-          </a:p>
-        </p:txBody>
-      </p:sp>
-      <p:sp>
-        <p:nvSpPr>
-          <p:cNvPr id="8" name="deco.rule"/>
+              <a:t>入力し、指示書を自動で作ります。</a:t>
+            </a:r>
+            <a:endParaRPr lang="ja-JP" altLang="en-US" sz="1600" b="0" dirty="0"/>
+          </a:p>
+        </p:txBody>
+      </p:sp>
+      <p:sp>
+        <p:nvSpPr>
+          <p:cNvPr id="10" name="deco.point-2"/>
           <p:cNvSpPr/>
           <p:nvPr/>
         </p:nvSpPr>
         <p:spPr>
           <a:xfrm>
-            <a:off x="6604000" y="2108200"/>
-            <a:ext cx="762000" cy="50800"/>
+            <a:off x="7061200" y="3771900"/>
+            <a:ext cx="152400" cy="152400"/>
           </a:xfrm>
           <a:custGeom>
             <a:avLst/>
@@ -10098,18 +10129,18 @@
             <a:cxnLst/>
             <a:rect l="l" t="t" r="r" b="b"/>
             <a:pathLst>
-              <a:path w="762000" h="50800">
+              <a:path w="152400" h="152400">
                 <a:moveTo>
                   <a:pt x="0" y="0"/>
                 </a:moveTo>
                 <a:lnTo>
-                  <a:pt x="762000" y="0"/>
-                </a:lnTo>
-                <a:lnTo>
-                  <a:pt x="762000" y="50800"/>
-                </a:lnTo>
-                <a:lnTo>
-                  <a:pt x="0" y="50800"/>
+                  <a:pt x="152400" y="0"/>
+                </a:lnTo>
+                <a:lnTo>
+                  <a:pt x="152400" y="152400"/>
+                </a:lnTo>
+                <a:lnTo>
+                  <a:pt x="0" y="152400"/>
                 </a:lnTo>
                 <a:close/>
               </a:path>
@@ -10125,14 +10156,14 @@
       </p:sp>
       <p:sp>
         <p:nvSpPr>
-          <p:cNvPr id="9" name="txt.body"/>
+          <p:cNvPr id="11" name="txt.item.2"/>
           <p:cNvSpPr txBox="1"/>
           <p:nvPr/>
         </p:nvSpPr>
         <p:spPr>
           <a:xfrm>
-            <a:off x="6604000" y="2489200"/>
-            <a:ext cx="5080000" cy="2311400"/>
+            <a:off x="7366000" y="3708400"/>
+            <a:ext cx="4394200" cy="838200"/>
           </a:xfrm>
           <a:prstGeom prst="rect">
             <a:avLst/>
@@ -10147,21 +10178,21 @@
           <a:p>
             <a:pPr algn="l" eaLnBrk="1" hangingPunct="1" latinLnBrk="0">
               <a:lnSpc>
-                <a:spcPts val="2600"/>
+                <a:spcPts val="2200"/>
               </a:lnSpc>
             </a:pPr>
             <a:r>
-              <a:rPr lang="ja-JP" altLang="en-US" sz="1500" b="0">
+              <a:rPr lang="ja-JP" altLang="en-US" sz="1600" b="0">
                 <a:solidFill>
                   <a:schemeClr val="tx1"/>
                 </a:solidFill>
-                <a:latin typeface="Barlow"/>
-                <a:ea typeface="Noto Sans JP"/>
+                <a:latin typeface="Barlow Medium"/>
+                <a:ea typeface="Noto Sans JP Medium"/>
               </a:rPr>
-              <a:t>各機械に</a:t>
-            </a:r>
-            <a:r>
-              <a:rPr lang="ja-JP" altLang="en-US" sz="1500" b="1" u="heavy">
+              <a:t>機械の稼働を</a:t>
+            </a:r>
+            <a:r>
+              <a:rPr lang="ja-JP" altLang="en-US" sz="1600" b="1" u="heavy">
                 <a:solidFill>
                   <a:schemeClr val="tx1"/>
                 </a:solidFill>
@@ -10170,47 +10201,142 @@
                     <a:schemeClr val="accent2"/>
                   </a:solidFill>
                 </a:uFill>
-                <a:latin typeface="Barlow"/>
-                <a:ea typeface="Noto Sans JP"/>
+                <a:latin typeface="Barlow Medium"/>
+                <a:ea typeface="Noto Sans JP Medium"/>
               </a:rPr>
-              <a:t>センサー</a:t>
-            </a:r>
-            <a:r>
-              <a:rPr lang="ja-JP" altLang="en-US" sz="1500" b="0">
+              <a:t>見える化</a:t>
+            </a:r>
+            <a:r>
+              <a:rPr lang="ja-JP" altLang="en-US" sz="1600" b="0">
                 <a:solidFill>
                   <a:schemeClr val="tx1"/>
                 </a:solidFill>
-                <a:latin typeface="Barlow"/>
-                <a:ea typeface="Noto Sans JP"/>
+                <a:latin typeface="Barlow Medium"/>
+                <a:ea typeface="Noto Sans JP Medium"/>
               </a:rPr>
-              <a:t>を付けて、動いているか止まっているかを記録します。</a:t>
-            </a:r>
-            <a:r>
-              <a:rPr lang="ja-JP" altLang="en-US" sz="1500" b="1" u="heavy">
+              <a:t>。センサーで</a:t>
+            </a:r>
+            <a:endParaRPr lang="ja-JP" altLang="en-US" sz="1600" b="0" dirty="0"/>
+          </a:p>
+          <a:p>
+            <a:pPr algn="l" eaLnBrk="1" hangingPunct="1" latinLnBrk="0">
+              <a:lnSpc>
+                <a:spcPts val="2200"/>
+              </a:lnSpc>
+            </a:pPr>
+            <a:r>
+              <a:rPr lang="ja-JP" altLang="en-US" sz="1600" b="0">
                 <a:solidFill>
                   <a:schemeClr val="tx1"/>
                 </a:solidFill>
-                <a:uFill>
-                  <a:solidFill>
-                    <a:schemeClr val="accent2"/>
-                  </a:solidFill>
-                </a:uFill>
-                <a:latin typeface="Barlow"/>
-                <a:ea typeface="Noto Sans JP"/>
+                <a:latin typeface="Barlow Medium"/>
+                <a:ea typeface="Noto Sans JP Medium"/>
               </a:rPr>
-              <a:t>止まった理由</a:t>
-            </a:r>
-            <a:r>
-              <a:rPr lang="ja-JP" altLang="en-US" sz="1500" b="0">
+              <a:t>動きを記録し、改善の材料にします。</a:t>
+            </a:r>
+            <a:endParaRPr lang="ja-JP" altLang="en-US" sz="1600" b="0" dirty="0"/>
+          </a:p>
+        </p:txBody>
+      </p:sp>
+      <p:sp>
+        <p:nvSpPr>
+          <p:cNvPr id="12" name="deco.point-3"/>
+          <p:cNvSpPr/>
+          <p:nvPr/>
+        </p:nvSpPr>
+        <p:spPr>
+          <a:xfrm>
+            <a:off x="7061200" y="4940300"/>
+            <a:ext cx="152400" cy="152400"/>
+          </a:xfrm>
+          <a:custGeom>
+            <a:avLst/>
+            <a:gdLst/>
+            <a:ahLst/>
+            <a:cxnLst/>
+            <a:rect l="l" t="t" r="r" b="b"/>
+            <a:pathLst>
+              <a:path w="152400" h="152400">
+                <a:moveTo>
+                  <a:pt x="0" y="0"/>
+                </a:moveTo>
+                <a:lnTo>
+                  <a:pt x="152400" y="0"/>
+                </a:lnTo>
+                <a:lnTo>
+                  <a:pt x="152400" y="152400"/>
+                </a:lnTo>
+                <a:lnTo>
+                  <a:pt x="0" y="152400"/>
+                </a:lnTo>
+                <a:close/>
+              </a:path>
+            </a:pathLst>
+          </a:custGeom>
+          <a:solidFill>
+            <a:schemeClr val="accent2"/>
+          </a:solidFill>
+          <a:ln>
+            <a:noFill/>
+          </a:ln>
+        </p:spPr>
+      </p:sp>
+      <p:sp>
+        <p:nvSpPr>
+          <p:cNvPr id="13" name="txt.item.3"/>
+          <p:cNvSpPr txBox="1"/>
+          <p:nvPr/>
+        </p:nvSpPr>
+        <p:spPr>
+          <a:xfrm>
+            <a:off x="7366000" y="4876800"/>
+            <a:ext cx="4394200" cy="838200"/>
+          </a:xfrm>
+          <a:prstGeom prst="rect">
+            <a:avLst/>
+          </a:prstGeom>
+          <a:noFill/>
+        </p:spPr>
+        <p:txBody>
+          <a:bodyPr wrap="square" lIns="0" tIns="0" rIns="0" bIns="0" anchor="t" rtlCol="0">
+            <a:noAutofit/>
+          </a:bodyPr>
+          <a:lstStyle/>
+          <a:p>
+            <a:pPr algn="l" eaLnBrk="1" hangingPunct="1" latinLnBrk="0">
+              <a:lnSpc>
+                <a:spcPts val="2200"/>
+              </a:lnSpc>
+            </a:pPr>
+            <a:r>
+              <a:rPr lang="ja-JP" altLang="en-US" sz="1600" b="0">
                 <a:solidFill>
                   <a:schemeClr val="tx1"/>
                 </a:solidFill>
-                <a:latin typeface="Barlow"/>
-                <a:ea typeface="Noto Sans JP"/>
+                <a:latin typeface="Barlow Medium"/>
+                <a:ea typeface="Noto Sans JP Medium"/>
               </a:rPr>
-              <a:t>を現場で選んで入力し、改善の材料にします。</a:t>
-            </a:r>
-            <a:endParaRPr lang="ja-JP" altLang="en-US" sz="1500" b="0" dirty="0"/>
+              <a:t>日程づくりを誰でも。決め方をルールに</a:t>
+            </a:r>
+            <a:endParaRPr lang="ja-JP" altLang="en-US" sz="1600" b="0" dirty="0"/>
+          </a:p>
+          <a:p>
+            <a:pPr algn="l" eaLnBrk="1" hangingPunct="1" latinLnBrk="0">
+              <a:lnSpc>
+                <a:spcPts val="2200"/>
+              </a:lnSpc>
+            </a:pPr>
+            <a:r>
+              <a:rPr lang="ja-JP" altLang="en-US" sz="1600" b="0">
+                <a:solidFill>
+                  <a:schemeClr val="tx1"/>
+                </a:solidFill>
+                <a:latin typeface="Barlow Medium"/>
+                <a:ea typeface="Noto Sans JP Medium"/>
+              </a:rPr>
+              <a:t>して、仕組みが日程の案を作ります。</a:t>
+            </a:r>
+            <a:endParaRPr lang="ja-JP" altLang="en-US" sz="1600" b="0" dirty="0"/>
           </a:p>
         </p:txBody>
       </p:sp>
@@ -10234,14 +10360,14 @@
       <p:grpSpPr/>
       <p:pic>
         <p:nvPicPr>
-          <p:cNvPr id="2" name="img.hero" descr="注意のページの写真"/>
+          <p:cNvPr id="2" name="img.right" descr="右の写真"/>
           <p:cNvPicPr>
             <a:picLocks noChangeAspect="1"/>
           </p:cNvPicPr>
           <p:nvPr/>
         </p:nvPicPr>
         <p:blipFill>
-          <a:blip r:embed="rId4-created"/>
+          <a:blip r:embed="rId5-created"/>
           <a:srcRect/>
           <a:stretch>
             <a:fillRect/>
@@ -10249,8 +10375,49 @@
         </p:blipFill>
         <p:spPr>
           <a:xfrm>
-            <a:off x="0" y="0"/>
-            <a:ext cx="8331200" cy="6858000"/>
+            <a:off x="2647950" y="0"/>
+            <a:ext cx="3333750" cy="6858000"/>
+          </a:xfrm>
+          <a:prstGeom prst="rect">
+            <a:avLst/>
+          </a:prstGeom>
+        </p:spPr>
+      </p:pic>
+      <p:pic>
+        <p:nvPicPr>
+          <p:cNvPr id="3" name="img.left" descr="左の写真"/>
+          <p:cNvPicPr>
+            <a:picLocks noChangeAspect="1"/>
+          </p:cNvPicPr>
+          <p:nvPr/>
+        </p:nvPicPr>
+        <p:blipFill>
+          <a:blip r:embed="rId6-created"/>
+          <a:srcRect/>
+          <a:stretch>
+            <a:fillRect/>
+          </a:stretch>
+        </p:blipFill>
+        <p:spPr>
+          <a:xfrm>
+            <a:off x="393700" y="0"/>
+            <a:ext cx="2254250" cy="6858000"/>
+          </a:xfrm>
+          <a:prstGeom prst="rect">
+            <a:avLst/>
+          </a:prstGeom>
+        </p:spPr>
+      </p:pic>
+      <p:sp>
+        <p:nvSpPr>
+          <p:cNvPr id="4" name="deco.tri-top"/>
+          <p:cNvSpPr/>
+          <p:nvPr/>
+        </p:nvSpPr>
+        <p:spPr>
+          <a:xfrm>
+            <a:off x="2647950" y="0"/>
+            <a:ext cx="3326130" cy="3315970"/>
           </a:xfrm>
           <a:custGeom>
             <a:avLst/>
@@ -10259,38 +10426,40 @@
             <a:cxnLst/>
             <a:rect l="l" t="t" r="r" b="b"/>
             <a:pathLst>
-              <a:path w="8331200" h="6858000">
+              <a:path w="3326130" h="3315970">
                 <a:moveTo>
-                  <a:pt x="5308600" y="0"/>
+                  <a:pt x="0" y="0"/>
                 </a:moveTo>
                 <a:lnTo>
-                  <a:pt x="8331200" y="0"/>
-                </a:lnTo>
-                <a:lnTo>
-                  <a:pt x="1473200" y="6858000"/>
-                </a:lnTo>
-                <a:lnTo>
-                  <a:pt x="0" y="6858000"/>
-                </a:lnTo>
-                <a:lnTo>
-                  <a:pt x="0" y="5302250"/>
+                  <a:pt x="3326130" y="0"/>
+                </a:lnTo>
+                <a:lnTo>
+                  <a:pt x="0" y="3315970"/>
                 </a:lnTo>
                 <a:close/>
               </a:path>
             </a:pathLst>
           </a:custGeom>
-        </p:spPr>
-      </p:pic>
-      <p:sp>
-        <p:nvSpPr>
-          <p:cNvPr id="3" name="deco.line-yellow"/>
+          <a:solidFill>
+            <a:schemeClr val="accent1">
+              <a:alpha val="88000"/>
+            </a:schemeClr>
+          </a:solidFill>
+          <a:ln>
+            <a:noFill/>
+          </a:ln>
+        </p:spPr>
+      </p:sp>
+      <p:sp>
+        <p:nvSpPr>
+          <p:cNvPr id="5" name="deco.tri-bottom"/>
           <p:cNvSpPr/>
           <p:nvPr/>
         </p:nvSpPr>
         <p:spPr>
           <a:xfrm>
-            <a:off x="1606550" y="2082800"/>
-            <a:ext cx="1418590" cy="1263650"/>
+            <a:off x="958850" y="5090160"/>
+            <a:ext cx="1689100" cy="1687830"/>
           </a:xfrm>
           <a:custGeom>
             <a:avLst/>
@@ -10299,18 +10468,57 @@
             <a:cxnLst/>
             <a:rect l="l" t="t" r="r" b="b"/>
             <a:pathLst>
-              <a:path w="1418590" h="1263650">
+              <a:path w="1689100" h="1687830">
                 <a:moveTo>
-                  <a:pt x="0" y="1263650"/>
+                  <a:pt x="0" y="1687830"/>
                 </a:moveTo>
                 <a:lnTo>
-                  <a:pt x="1263650" y="0"/>
-                </a:lnTo>
-                <a:lnTo>
-                  <a:pt x="1418590" y="0"/>
-                </a:lnTo>
-                <a:lnTo>
-                  <a:pt x="154940" y="1263650"/>
+                  <a:pt x="1689100" y="0"/>
+                </a:lnTo>
+                <a:lnTo>
+                  <a:pt x="1689100" y="1687830"/>
+                </a:lnTo>
+                <a:close/>
+              </a:path>
+            </a:pathLst>
+          </a:custGeom>
+          <a:solidFill>
+            <a:schemeClr val="accent1">
+              <a:alpha val="88000"/>
+            </a:schemeClr>
+          </a:solidFill>
+          <a:ln>
+            <a:noFill/>
+          </a:ln>
+        </p:spPr>
+      </p:sp>
+      <p:sp>
+        <p:nvSpPr>
+          <p:cNvPr id="6" name="deco.end-triangle"/>
+          <p:cNvSpPr/>
+          <p:nvPr/>
+        </p:nvSpPr>
+        <p:spPr>
+          <a:xfrm>
+            <a:off x="10998200" y="5702300"/>
+            <a:ext cx="933450" cy="933450"/>
+          </a:xfrm>
+          <a:custGeom>
+            <a:avLst/>
+            <a:gdLst/>
+            <a:ahLst/>
+            <a:cxnLst/>
+            <a:rect l="l" t="t" r="r" b="b"/>
+            <a:pathLst>
+              <a:path w="933450" h="933450">
+                <a:moveTo>
+                  <a:pt x="933450" y="0"/>
+                </a:moveTo>
+                <a:lnTo>
+                  <a:pt x="933450" y="933450"/>
+                </a:lnTo>
+                <a:lnTo>
+                  <a:pt x="0" y="933450"/>
                 </a:lnTo>
                 <a:close/>
               </a:path>
@@ -10326,14 +10534,88 @@
       </p:sp>
       <p:sp>
         <p:nvSpPr>
-          <p:cNvPr id="4" name="deco.line-blue"/>
+          <p:cNvPr id="7" name="txt.headline"/>
+          <p:cNvSpPr txBox="1"/>
+          <p:nvPr/>
+        </p:nvSpPr>
+        <p:spPr>
+          <a:xfrm>
+            <a:off x="6604000" y="889000"/>
+            <a:ext cx="5080000" cy="1016000"/>
+          </a:xfrm>
+          <a:prstGeom prst="rect">
+            <a:avLst/>
+          </a:prstGeom>
+          <a:noFill/>
+        </p:spPr>
+        <p:txBody>
+          <a:bodyPr wrap="square" lIns="0" tIns="0" rIns="0" bIns="0" anchor="b" rtlCol="0">
+            <a:noAutofit/>
+          </a:bodyPr>
+          <a:lstStyle/>
+          <a:p>
+            <a:pPr algn="l" eaLnBrk="1" hangingPunct="1" latinLnBrk="0">
+              <a:lnSpc>
+                <a:spcPts val="4000"/>
+              </a:lnSpc>
+            </a:pPr>
+            <a:r>
+              <a:rPr lang="ja-JP" altLang="en-US" sz="3250" b="0">
+                <a:solidFill>
+                  <a:schemeClr val="tx1"/>
+                </a:solidFill>
+                <a:latin typeface="Noto Serif JP"/>
+                <a:ea typeface="Noto Serif JP"/>
+              </a:rPr>
+              <a:t>班長の頭の中を、</a:t>
+            </a:r>
+            <a:endParaRPr lang="ja-JP" altLang="en-US" sz="3250" b="0" dirty="0"/>
+          </a:p>
+          <a:p>
+            <a:pPr algn="l" eaLnBrk="1" hangingPunct="1" latinLnBrk="0">
+              <a:lnSpc>
+                <a:spcPts val="4000"/>
+              </a:lnSpc>
+            </a:pPr>
+            <a:r>
+              <a:rPr lang="ja-JP" altLang="en-US" sz="3250" b="1" u="heavy">
+                <a:solidFill>
+                  <a:schemeClr val="tx1"/>
+                </a:solidFill>
+                <a:uFill>
+                  <a:solidFill>
+                    <a:schemeClr val="accent2"/>
+                  </a:solidFill>
+                </a:uFill>
+                <a:latin typeface="Noto Serif JP"/>
+                <a:ea typeface="Noto Serif JP"/>
+              </a:rPr>
+              <a:t>ルール</a:t>
+            </a:r>
+            <a:r>
+              <a:rPr lang="ja-JP" altLang="en-US" sz="3250" b="0">
+                <a:solidFill>
+                  <a:schemeClr val="tx1"/>
+                </a:solidFill>
+                <a:latin typeface="Noto Serif JP"/>
+                <a:ea typeface="Noto Serif JP"/>
+              </a:rPr>
+              <a:t>にする</a:t>
+            </a:r>
+            <a:endParaRPr lang="ja-JP" altLang="en-US" sz="3250" b="0" dirty="0"/>
+          </a:p>
+        </p:txBody>
+      </p:sp>
+      <p:sp>
+        <p:nvSpPr>
+          <p:cNvPr id="8" name="deco.rule"/>
           <p:cNvSpPr/>
           <p:nvPr/>
         </p:nvSpPr>
         <p:spPr>
           <a:xfrm>
-            <a:off x="2117090" y="4464050"/>
-            <a:ext cx="2327910" cy="2073910"/>
+            <a:off x="6604000" y="2108200"/>
+            <a:ext cx="762000" cy="50800"/>
           </a:xfrm>
           <a:custGeom>
             <a:avLst/>
@@ -10342,61 +10624,18 @@
             <a:cxnLst/>
             <a:rect l="l" t="t" r="r" b="b"/>
             <a:pathLst>
-              <a:path w="2327910" h="2073910">
+              <a:path w="762000" h="50800">
                 <a:moveTo>
-                  <a:pt x="0" y="2073910"/>
+                  <a:pt x="0" y="0"/>
                 </a:moveTo>
                 <a:lnTo>
-                  <a:pt x="2073910" y="0"/>
-                </a:lnTo>
-                <a:lnTo>
-                  <a:pt x="2327910" y="0"/>
-                </a:lnTo>
-                <a:lnTo>
-                  <a:pt x="254000" y="2073910"/>
-                </a:lnTo>
-                <a:close/>
-              </a:path>
-            </a:pathLst>
-          </a:custGeom>
-          <a:solidFill>
-            <a:schemeClr val="accent1"/>
-          </a:solidFill>
-          <a:ln>
-            <a:noFill/>
-          </a:ln>
-        </p:spPr>
-      </p:sp>
-      <p:sp>
-        <p:nvSpPr>
-          <p:cNvPr id="5" name="deco.band"/>
-          <p:cNvSpPr/>
-          <p:nvPr/>
-        </p:nvSpPr>
-        <p:spPr>
-          <a:xfrm>
-            <a:off x="3686810" y="2209800"/>
-            <a:ext cx="8680450" cy="1070610"/>
-          </a:xfrm>
-          <a:custGeom>
-            <a:avLst/>
-            <a:gdLst/>
-            <a:ahLst/>
-            <a:cxnLst/>
-            <a:rect l="l" t="t" r="r" b="b"/>
-            <a:pathLst>
-              <a:path w="8680450" h="1070610">
-                <a:moveTo>
-                  <a:pt x="0" y="1070610"/>
-                </a:moveTo>
-                <a:lnTo>
-                  <a:pt x="1070610" y="0"/>
-                </a:lnTo>
-                <a:lnTo>
-                  <a:pt x="8680450" y="0"/>
-                </a:lnTo>
-                <a:lnTo>
-                  <a:pt x="8680450" y="1070610"/>
+                  <a:pt x="762000" y="0"/>
+                </a:lnTo>
+                <a:lnTo>
+                  <a:pt x="762000" y="50800"/>
+                </a:lnTo>
+                <a:lnTo>
+                  <a:pt x="0" y="50800"/>
                 </a:lnTo>
                 <a:close/>
               </a:path>
@@ -10412,136 +10651,14 @@
       </p:sp>
       <p:sp>
         <p:nvSpPr>
-          <p:cNvPr id="6" name="deco.end-triangle"/>
-          <p:cNvSpPr/>
-          <p:nvPr/>
-        </p:nvSpPr>
-        <p:spPr>
-          <a:xfrm>
-            <a:off x="10998200" y="5702300"/>
-            <a:ext cx="933450" cy="933450"/>
-          </a:xfrm>
-          <a:custGeom>
-            <a:avLst/>
-            <a:gdLst/>
-            <a:ahLst/>
-            <a:cxnLst/>
-            <a:rect l="l" t="t" r="r" b="b"/>
-            <a:pathLst>
-              <a:path w="933450" h="933450">
-                <a:moveTo>
-                  <a:pt x="933450" y="0"/>
-                </a:moveTo>
-                <a:lnTo>
-                  <a:pt x="933450" y="933450"/>
-                </a:lnTo>
-                <a:lnTo>
-                  <a:pt x="0" y="933450"/>
-                </a:lnTo>
-                <a:close/>
-              </a:path>
-            </a:pathLst>
-          </a:custGeom>
-          <a:solidFill>
-            <a:schemeClr val="accent2"/>
-          </a:solidFill>
-          <a:ln>
-            <a:noFill/>
-          </a:ln>
-        </p:spPr>
-      </p:sp>
-      <p:sp>
-        <p:nvSpPr>
-          <p:cNvPr id="7" name="txt.eyebrow"/>
-          <p:cNvSpPr txBox="1"/>
-          <p:nvPr/>
-        </p:nvSpPr>
-        <p:spPr>
-          <a:xfrm rot="-2700000">
-            <a:off x="-355600" y="1003300"/>
-            <a:ext cx="3048000" cy="330200"/>
-          </a:xfrm>
-          <a:prstGeom prst="rect">
-            <a:avLst/>
-          </a:prstGeom>
-          <a:noFill/>
-        </p:spPr>
-        <p:txBody>
-          <a:bodyPr wrap="none" lIns="0" tIns="0" rIns="0" bIns="0" anchor="ctr" rtlCol="0">
-            <a:noAutofit/>
-          </a:bodyPr>
-          <a:lstStyle/>
-          <a:p>
-            <a:pPr algn="ctr" eaLnBrk="1" hangingPunct="1" latinLnBrk="0">
-              <a:lnSpc>
-                <a:spcPts val="2600"/>
-              </a:lnSpc>
-            </a:pPr>
-            <a:r>
-              <a:rPr lang="ja-JP" altLang="en-US" sz="2050" b="0" spc="400">
-                <a:solidFill>
-                  <a:schemeClr val="tx1"/>
-                </a:solidFill>
-                <a:latin typeface="Barlow"/>
-                <a:ea typeface="Noto Sans JP"/>
-              </a:rPr>
-              <a:t>Schedule</a:t>
-            </a:r>
-            <a:endParaRPr lang="ja-JP" altLang="en-US" sz="2050" b="0" dirty="0" spc="400"/>
-          </a:p>
-        </p:txBody>
-      </p:sp>
-      <p:sp>
-        <p:nvSpPr>
-          <p:cNvPr id="8" name="txt.headline"/>
-          <p:cNvSpPr txBox="1"/>
-          <p:nvPr/>
-        </p:nvSpPr>
-        <p:spPr>
-          <a:xfrm>
-            <a:off x="4978400" y="2362200"/>
-            <a:ext cx="7112000" cy="762000"/>
-          </a:xfrm>
-          <a:prstGeom prst="rect">
-            <a:avLst/>
-          </a:prstGeom>
-          <a:noFill/>
-        </p:spPr>
-        <p:txBody>
-          <a:bodyPr wrap="square" lIns="0" tIns="0" rIns="0" bIns="0" anchor="ctr" rtlCol="0">
-            <a:noAutofit/>
-          </a:bodyPr>
-          <a:lstStyle/>
-          <a:p>
-            <a:pPr algn="l" eaLnBrk="1" hangingPunct="1" latinLnBrk="0">
-              <a:lnSpc>
-                <a:spcPts val="4000"/>
-              </a:lnSpc>
-            </a:pPr>
-            <a:r>
-              <a:rPr lang="ja-JP" altLang="en-US" sz="3250" b="0">
-                <a:solidFill>
-                  <a:schemeClr val="tx1"/>
-                </a:solidFill>
-                <a:latin typeface="Noto Serif JP"/>
-                <a:ea typeface="Noto Serif JP"/>
-              </a:rPr>
-              <a:t>日程づくりを誰でもできるように</a:t>
-            </a:r>
-            <a:endParaRPr lang="ja-JP" altLang="en-US" sz="3250" b="0" dirty="0"/>
-          </a:p>
-        </p:txBody>
-      </p:sp>
-      <p:sp>
-        <p:nvSpPr>
           <p:cNvPr id="9" name="txt.body"/>
           <p:cNvSpPr txBox="1"/>
           <p:nvPr/>
         </p:nvSpPr>
         <p:spPr>
           <a:xfrm>
-            <a:off x="5232400" y="3810000"/>
-            <a:ext cx="6350000" cy="1320800"/>
+            <a:off x="6604000" y="2489200"/>
+            <a:ext cx="5080000" cy="2311400"/>
           </a:xfrm>
           <a:prstGeom prst="rect">
             <a:avLst/>
@@ -10560,66 +10677,16 @@
               </a:lnSpc>
             </a:pPr>
             <a:r>
-              <a:rPr lang="ja-JP" altLang="en-US" sz="1600" b="0">
+              <a:rPr lang="ja-JP" altLang="en-US" sz="1500" b="0">
                 <a:solidFill>
                   <a:schemeClr val="tx1"/>
                 </a:solidFill>
-                <a:latin typeface="Barlow Medium"/>
-                <a:ea typeface="Noto Sans JP Medium"/>
+                <a:latin typeface="Barlow"/>
+                <a:ea typeface="Noto Sans JP"/>
               </a:rPr>
-              <a:t>班長が頭の中で組んでいた日程の決め方を、</a:t>
-            </a:r>
-            <a:r>
-              <a:rPr lang="ja-JP" altLang="en-US" sz="1600" b="1" u="heavy">
-                <a:solidFill>
-                  <a:schemeClr val="tx1"/>
-                </a:solidFill>
-                <a:uFill>
-                  <a:solidFill>
-                    <a:schemeClr val="accent2"/>
-                  </a:solidFill>
-                </a:uFill>
-                <a:latin typeface="Barlow Medium"/>
-                <a:ea typeface="Noto Sans JP Medium"/>
-              </a:rPr>
-              <a:t>ルール</a:t>
-            </a:r>
-            <a:r>
-              <a:rPr lang="ja-JP" altLang="en-US" sz="1600" b="0">
-                <a:solidFill>
-                  <a:schemeClr val="tx1"/>
-                </a:solidFill>
-                <a:latin typeface="Barlow Medium"/>
-                <a:ea typeface="Noto Sans JP Medium"/>
-              </a:rPr>
-              <a:t>として書き出します。そのルールで日程の案を仕組みが作り、</a:t>
-            </a:r>
-            <a:r>
-              <a:rPr lang="ja-JP" altLang="en-US" sz="1600" b="1" u="heavy">
-                <a:solidFill>
-                  <a:schemeClr val="tx1"/>
-                </a:solidFill>
-                <a:uFill>
-                  <a:solidFill>
-                    <a:schemeClr val="accent2"/>
-                  </a:solidFill>
-                </a:uFill>
-                <a:latin typeface="Barlow Medium"/>
-                <a:ea typeface="Noto Sans JP Medium"/>
-              </a:rPr>
-              <a:t>人が確認</a:t>
-            </a:r>
-            <a:r>
-              <a:rPr lang="ja-JP" altLang="en-US" sz="1600" b="0">
-                <a:solidFill>
-                  <a:schemeClr val="tx1"/>
-                </a:solidFill>
-                <a:latin typeface="Barlow Medium"/>
-                <a:ea typeface="Noto Sans JP Medium"/>
-              </a:rPr>
-              <a:t>して決めます。</a:t>
-            </a:r>
-            <a:endParaRPr lang="ja-JP" altLang="en-US" sz="1600" b="0" dirty="0"/>
+              <a:t>班長が頭の中で組んでいた日程の決め方を、ルールとして書き出します。そのルールを使って仕組みが日程の案を作り、人が確認して決めます。</a:t>
+            </a:r>
+            <a:endParaRPr lang="ja-JP" altLang="en-US" sz="1500" b="0" dirty="0"/>
           </a:p>
         </p:txBody>
       </p:sp>
@@ -10981,6 +11048,24 @@
                 <a:latin typeface="Barlow"/>
                 <a:ea typeface="Noto Sans JP Medium"/>
               </a:rPr>
+              <a:t>3-Year</a:t>
+            </a:r>
+            <a:endParaRPr lang="ja-JP" altLang="en-US" sz="2050" b="0" dirty="0" spc="400"/>
+          </a:p>
+          <a:p>
+            <a:pPr algn="ctr" eaLnBrk="1" hangingPunct="1" latinLnBrk="0">
+              <a:lnSpc>
+                <a:spcPts val="2600"/>
+              </a:lnSpc>
+            </a:pPr>
+            <a:r>
+              <a:rPr lang="ja-JP" altLang="en-US" sz="2050" b="0" spc="400">
+                <a:solidFill>
+                  <a:schemeClr val="bg1"/>
+                </a:solidFill>
+                <a:latin typeface="Barlow"/>
+                <a:ea typeface="Noto Sans JP Medium"/>
+              </a:rPr>
               <a:t>Roadmap</a:t>
             </a:r>
             <a:endParaRPr lang="ja-JP" altLang="en-US" sz="2050" b="0" dirty="0" spc="400"/>
@@ -11124,29 +11209,14 @@
               </a:lnSpc>
             </a:pPr>
             <a:r>
-              <a:rPr lang="ja-JP" altLang="en-US" sz="1500" b="1" u="heavy">
+              <a:rPr lang="ja-JP" altLang="en-US" sz="1500" b="1">
                 <a:solidFill>
                   <a:schemeClr val="tx1"/>
                 </a:solidFill>
-                <a:uFill>
-                  <a:solidFill>
-                    <a:schemeClr val="accent2"/>
-                  </a:solidFill>
-                </a:uFill>
                 <a:latin typeface="Barlow"/>
                 <a:ea typeface="Noto Sans JP"/>
               </a:rPr>
-              <a:t>1年目</a:t>
-            </a:r>
-            <a:r>
-              <a:rPr lang="ja-JP" altLang="en-US" sz="1500" b="1">
-                <a:solidFill>
-                  <a:schemeClr val="tx1"/>
-                </a:solidFill>
-                <a:latin typeface="Barlow"/>
-                <a:ea typeface="Noto Sans JP"/>
-              </a:rPr>
-              <a:t>：指示書の</a:t>
+              <a:t>1年目：指示書の</a:t>
             </a:r>
             <a:endParaRPr lang="ja-JP" altLang="en-US" sz="1500" b="1" dirty="0"/>
           </a:p>
@@ -11164,7 +11234,7 @@
                 <a:latin typeface="Barlow"/>
                 <a:ea typeface="Noto Sans JP"/>
               </a:rPr>
-              <a:t>デジタル化。紙を無くす</a:t>
+              <a:t>デジタル化で紙を無くす</a:t>
             </a:r>
             <a:endParaRPr lang="ja-JP" altLang="en-US" sz="1500" b="1" dirty="0"/>
           </a:p>
@@ -11273,7 +11343,7 @@
                 <a:latin typeface="Barlow"/>
                 <a:ea typeface="Noto Sans JP"/>
               </a:rPr>
-              <a:t>2年目：稼働の見える</a:t>
+              <a:t>2年目：稼働の見える化。</a:t>
             </a:r>
             <a:endParaRPr lang="ja-JP" altLang="en-US" sz="1500" b="1" dirty="0"/>
           </a:p>
@@ -11291,7 +11361,7 @@
                 <a:latin typeface="Barlow"/>
                 <a:ea typeface="Noto Sans JP"/>
               </a:rPr>
-              <a:t>化。全20台にセンサー</a:t>
+              <a:t>全20台にセンサー</a:t>
             </a:r>
             <a:endParaRPr lang="ja-JP" altLang="en-US" sz="1500" b="1" dirty="0"/>
           </a:p>
@@ -11400,7 +11470,7 @@
                 <a:latin typeface="Barlow"/>
                 <a:ea typeface="Noto Sans JP"/>
               </a:rPr>
-              <a:t>3年目：日程の仕組み化。</a:t>
+              <a:t>3年目：日程を仕組み化。</a:t>
             </a:r>
             <a:endParaRPr lang="ja-JP" altLang="en-US" sz="1500" b="1" dirty="0"/>
           </a:p>
@@ -11651,7 +11721,25 @@
                 <a:latin typeface="Noto Serif JP"/>
                 <a:ea typeface="Noto Serif JP"/>
               </a:rPr>
-              <a:t>推進の体制</a:t>
+              <a:t>社長が責任者、</a:t>
+            </a:r>
+            <a:endParaRPr lang="ja-JP" altLang="en-US" sz="3250" b="0" dirty="0"/>
+          </a:p>
+          <a:p>
+            <a:pPr algn="l" eaLnBrk="1" hangingPunct="1" latinLnBrk="0">
+              <a:lnSpc>
+                <a:spcPts val="4000"/>
+              </a:lnSpc>
+            </a:pPr>
+            <a:r>
+              <a:rPr lang="ja-JP" altLang="en-US" sz="3250" b="0">
+                <a:solidFill>
+                  <a:schemeClr val="tx1"/>
+                </a:solidFill>
+                <a:latin typeface="Noto Serif JP"/>
+                <a:ea typeface="Noto Serif JP"/>
+              </a:rPr>
+              <a:t>現場で試して広げる</a:t>
             </a:r>
             <a:endParaRPr lang="ja-JP" altLang="en-US" sz="3250" b="0" dirty="0"/>
           </a:p>
@@ -11735,7 +11823,7 @@
                 <a:latin typeface="Barlow"/>
                 <a:ea typeface="Noto Sans JP"/>
               </a:rPr>
-              <a:t>社長を責任者とし、製造部・営業部・総務部から1名ずつ集めた</a:t>
+              <a:t>社長を責任者に、製造部・営業部・総務部から1名ずつの</a:t>
             </a:r>
             <a:r>
               <a:rPr lang="ja-JP" altLang="en-US" sz="1500" b="1" u="heavy">
@@ -11760,7 +11848,7 @@
                 <a:latin typeface="Barlow"/>
                 <a:ea typeface="Noto Sans JP"/>
               </a:rPr>
-              <a:t>を作ります。外部の専門家にも月に1回、助言をもらいます。</a:t>
+              <a:t>を作ります。外部の専門家の助言を月に1回もらい、各段階で現場の作業者に試してもらいます。</a:t>
             </a:r>
             <a:endParaRPr lang="ja-JP" altLang="en-US" sz="1500" b="0" dirty="0"/>
           </a:p>
@@ -12037,7 +12125,7 @@
                 <a:latin typeface="Barlow"/>
                 <a:ea typeface="Noto Sans JP"/>
               </a:rPr>
-              <a:t>Our Goal</a:t>
+              <a:t>Purpose</a:t>
             </a:r>
             <a:endParaRPr lang="ja-JP" altLang="en-US" sz="2050" b="0" dirty="0" spc="400"/>
           </a:p>
@@ -12078,7 +12166,7 @@
                 <a:latin typeface="Noto Serif JP"/>
                 <a:ea typeface="Noto Serif JP"/>
               </a:rPr>
-              <a:t>目的は仕組みではない</a:t>
+              <a:t>目的は、熟練者に頼らず回すこと</a:t>
             </a:r>
             <a:endParaRPr lang="ja-JP" altLang="en-US" sz="3250" b="0" dirty="0"/>
           </a:p>
@@ -12119,7 +12207,7 @@
                 <a:latin typeface="Barlow Medium"/>
                 <a:ea typeface="Noto Sans JP Medium"/>
               </a:rPr>
-              <a:t>目的は、</a:t>
+              <a:t>仕組みを入れることが目的ではありません。目的は、</a:t>
             </a:r>
             <a:r>
               <a:rPr lang="ja-JP" altLang="en-US" sz="1600" b="1" u="heavy">
@@ -12420,14 +12508,14 @@
       <p:grpSpPr/>
       <p:pic>
         <p:nvPicPr>
-          <p:cNvPr id="2" name="img.side" descr="左の写真"/>
+          <p:cNvPr id="2" name="img.right" descr="右の写真"/>
           <p:cNvPicPr>
             <a:picLocks noChangeAspect="1"/>
           </p:cNvPicPr>
           <p:nvPr/>
         </p:nvPicPr>
         <p:blipFill>
-          <a:blip r:embed="rId4-created"/>
+          <a:blip r:embed="rId5-created"/>
           <a:srcRect/>
           <a:stretch>
             <a:fillRect/>
@@ -12435,24 +12523,49 @@
         </p:blipFill>
         <p:spPr>
           <a:xfrm>
-            <a:off x="0" y="0"/>
-            <a:ext cx="3035300" cy="6858000"/>
+            <a:off x="2647950" y="0"/>
+            <a:ext cx="3333750" cy="6858000"/>
           </a:xfrm>
           <a:prstGeom prst="rect">
             <a:avLst/>
           </a:prstGeom>
         </p:spPr>
       </p:pic>
-      <p:sp>
-        <p:nvSpPr>
-          <p:cNvPr id="3" name="deco.side-tri-1"/>
+      <p:pic>
+        <p:nvPicPr>
+          <p:cNvPr id="3" name="img.left" descr="左の写真"/>
+          <p:cNvPicPr>
+            <a:picLocks noChangeAspect="1"/>
+          </p:cNvPicPr>
+          <p:nvPr/>
+        </p:nvPicPr>
+        <p:blipFill>
+          <a:blip r:embed="rId6-created"/>
+          <a:srcRect/>
+          <a:stretch>
+            <a:fillRect/>
+          </a:stretch>
+        </p:blipFill>
+        <p:spPr>
+          <a:xfrm>
+            <a:off x="393700" y="0"/>
+            <a:ext cx="2254250" cy="6858000"/>
+          </a:xfrm>
+          <a:prstGeom prst="rect">
+            <a:avLst/>
+          </a:prstGeom>
+        </p:spPr>
+      </p:pic>
+      <p:sp>
+        <p:nvSpPr>
+          <p:cNvPr id="4" name="deco.tri-top"/>
           <p:cNvSpPr/>
           <p:nvPr/>
         </p:nvSpPr>
         <p:spPr>
           <a:xfrm>
-            <a:off x="0" y="-323850"/>
-            <a:ext cx="3035300" cy="3035300"/>
+            <a:off x="2647950" y="0"/>
+            <a:ext cx="3326130" cy="3315970"/>
           </a:xfrm>
           <a:custGeom>
             <a:avLst/>
@@ -12461,15 +12574,15 @@
             <a:cxnLst/>
             <a:rect l="l" t="t" r="r" b="b"/>
             <a:pathLst>
-              <a:path w="3035300" h="3035300">
+              <a:path w="3326130" h="3315970">
                 <a:moveTo>
-                  <a:pt x="0" y="3035300"/>
+                  <a:pt x="0" y="0"/>
                 </a:moveTo>
                 <a:lnTo>
-                  <a:pt x="3035300" y="0"/>
-                </a:lnTo>
-                <a:lnTo>
-                  <a:pt x="3035300" y="3035300"/>
+                  <a:pt x="3326130" y="0"/>
+                </a:lnTo>
+                <a:lnTo>
+                  <a:pt x="0" y="3315970"/>
                 </a:lnTo>
                 <a:close/>
               </a:path>
@@ -12487,14 +12600,14 @@
       </p:sp>
       <p:sp>
         <p:nvSpPr>
-          <p:cNvPr id="4" name="deco.side-tri-2"/>
+          <p:cNvPr id="5" name="deco.tri-bottom"/>
           <p:cNvSpPr/>
           <p:nvPr/>
         </p:nvSpPr>
         <p:spPr>
           <a:xfrm>
-            <a:off x="0" y="2698750"/>
-            <a:ext cx="3035300" cy="3035300"/>
+            <a:off x="958850" y="5090160"/>
+            <a:ext cx="1689100" cy="1687830"/>
           </a:xfrm>
           <a:custGeom>
             <a:avLst/>
@@ -12503,15 +12616,15 @@
             <a:cxnLst/>
             <a:rect l="l" t="t" r="r" b="b"/>
             <a:pathLst>
-              <a:path w="3035300" h="3035300">
+              <a:path w="1689100" h="1687830">
                 <a:moveTo>
-                  <a:pt x="0" y="0"/>
+                  <a:pt x="0" y="1687830"/>
                 </a:moveTo>
                 <a:lnTo>
-                  <a:pt x="3035300" y="0"/>
-                </a:lnTo>
-                <a:lnTo>
-                  <a:pt x="0" y="3035300"/>
+                  <a:pt x="1689100" y="0"/>
+                </a:lnTo>
+                <a:lnTo>
+                  <a:pt x="1689100" y="1687830"/>
                 </a:lnTo>
                 <a:close/>
               </a:path>
@@ -12529,14 +12642,14 @@
       </p:sp>
       <p:sp>
         <p:nvSpPr>
-          <p:cNvPr id="5" name="deco.side-tri-3"/>
+          <p:cNvPr id="6" name="deco.end-triangle"/>
           <p:cNvSpPr/>
           <p:nvPr/>
         </p:nvSpPr>
         <p:spPr>
           <a:xfrm>
-            <a:off x="990600" y="4832350"/>
-            <a:ext cx="2044700" cy="2044700"/>
+            <a:off x="10998200" y="5702300"/>
+            <a:ext cx="933450" cy="933450"/>
           </a:xfrm>
           <a:custGeom>
             <a:avLst/>
@@ -12545,60 +12658,15 @@
             <a:cxnLst/>
             <a:rect l="l" t="t" r="r" b="b"/>
             <a:pathLst>
-              <a:path w="2044700" h="2044700">
+              <a:path w="933450" h="933450">
                 <a:moveTo>
-                  <a:pt x="0" y="2044700"/>
+                  <a:pt x="933450" y="0"/>
                 </a:moveTo>
                 <a:lnTo>
-                  <a:pt x="2044700" y="0"/>
-                </a:lnTo>
-                <a:lnTo>
-                  <a:pt x="2044700" y="2044700"/>
-                </a:lnTo>
-                <a:close/>
-              </a:path>
-            </a:pathLst>
-          </a:custGeom>
-          <a:solidFill>
-            <a:schemeClr val="accent1">
-              <a:alpha val="88000"/>
-            </a:schemeClr>
-          </a:solidFill>
-          <a:ln>
-            <a:noFill/>
-          </a:ln>
-        </p:spPr>
-      </p:sp>
-      <p:sp>
-        <p:nvSpPr>
-          <p:cNvPr id="6" name="deco.side-line"/>
-          <p:cNvSpPr/>
-          <p:nvPr/>
-        </p:nvSpPr>
-        <p:spPr>
-          <a:xfrm>
-            <a:off x="76200" y="1727200"/>
-            <a:ext cx="1244600" cy="1111250"/>
-          </a:xfrm>
-          <a:custGeom>
-            <a:avLst/>
-            <a:gdLst/>
-            <a:ahLst/>
-            <a:cxnLst/>
-            <a:rect l="l" t="t" r="r" b="b"/>
-            <a:pathLst>
-              <a:path w="1244600" h="1111250">
-                <a:moveTo>
-                  <a:pt x="0" y="1111250"/>
-                </a:moveTo>
-                <a:lnTo>
-                  <a:pt x="133350" y="1111250"/>
-                </a:lnTo>
-                <a:lnTo>
-                  <a:pt x="1244600" y="0"/>
-                </a:lnTo>
-                <a:lnTo>
-                  <a:pt x="1111250" y="0"/>
+                  <a:pt x="933450" y="933450"/>
+                </a:lnTo>
+                <a:lnTo>
+                  <a:pt x="0" y="933450"/>
                 </a:lnTo>
                 <a:close/>
               </a:path>
@@ -12614,14 +12682,88 @@
       </p:sp>
       <p:sp>
         <p:nvSpPr>
-          <p:cNvPr id="7" name="deco.top-band"/>
+          <p:cNvPr id="7" name="txt.headline"/>
+          <p:cNvSpPr txBox="1"/>
+          <p:nvPr/>
+        </p:nvSpPr>
+        <p:spPr>
+          <a:xfrm>
+            <a:off x="6604000" y="889000"/>
+            <a:ext cx="5080000" cy="1016000"/>
+          </a:xfrm>
+          <a:prstGeom prst="rect">
+            <a:avLst/>
+          </a:prstGeom>
+          <a:noFill/>
+        </p:spPr>
+        <p:txBody>
+          <a:bodyPr wrap="square" lIns="0" tIns="0" rIns="0" bIns="0" anchor="b" rtlCol="0">
+            <a:noAutofit/>
+          </a:bodyPr>
+          <a:lstStyle/>
+          <a:p>
+            <a:pPr algn="l" eaLnBrk="1" hangingPunct="1" latinLnBrk="0">
+              <a:lnSpc>
+                <a:spcPts val="4000"/>
+              </a:lnSpc>
+            </a:pPr>
+            <a:r>
+              <a:rPr lang="ja-JP" altLang="en-US" sz="3250" b="0">
+                <a:solidFill>
+                  <a:schemeClr val="tx1"/>
+                </a:solidFill>
+                <a:latin typeface="Noto Serif JP"/>
+                <a:ea typeface="Noto Serif JP"/>
+              </a:rPr>
+              <a:t>3年間の投資は</a:t>
+            </a:r>
+            <a:endParaRPr lang="ja-JP" altLang="en-US" sz="3250" b="0" dirty="0"/>
+          </a:p>
+          <a:p>
+            <a:pPr algn="l" eaLnBrk="1" hangingPunct="1" latinLnBrk="0">
+              <a:lnSpc>
+                <a:spcPts val="4000"/>
+              </a:lnSpc>
+            </a:pPr>
+            <a:r>
+              <a:rPr lang="ja-JP" altLang="en-US" sz="3250" b="0">
+                <a:solidFill>
+                  <a:schemeClr val="tx1"/>
+                </a:solidFill>
+                <a:latin typeface="Noto Serif JP"/>
+                <a:ea typeface="Noto Serif JP"/>
+              </a:rPr>
+              <a:t>合計</a:t>
+            </a:r>
+            <a:r>
+              <a:rPr lang="ja-JP" altLang="en-US" sz="3250" b="1" u="heavy">
+                <a:solidFill>
+                  <a:schemeClr val="tx1"/>
+                </a:solidFill>
+                <a:uFill>
+                  <a:solidFill>
+                    <a:schemeClr val="accent2"/>
+                  </a:solidFill>
+                </a:uFill>
+                <a:latin typeface="Noto Serif JP"/>
+                <a:ea typeface="Noto Serif JP"/>
+              </a:rPr>
+              <a:t>4,800万円</a:t>
+            </a:r>
+            <a:endParaRPr lang="ja-JP" altLang="en-US" sz="3250" b="0" dirty="0"/>
+          </a:p>
+        </p:txBody>
+      </p:sp>
+      <p:sp>
+        <p:nvSpPr>
+          <p:cNvPr id="8" name="deco.rule"/>
           <p:cNvSpPr/>
           <p:nvPr/>
         </p:nvSpPr>
         <p:spPr>
           <a:xfrm>
-            <a:off x="9455150" y="-482600"/>
-            <a:ext cx="3371850" cy="933450"/>
+            <a:off x="6604000" y="2108200"/>
+            <a:ext cx="762000" cy="50800"/>
           </a:xfrm>
           <a:custGeom>
             <a:avLst/>
@@ -12630,18 +12772,18 @@
             <a:cxnLst/>
             <a:rect l="l" t="t" r="r" b="b"/>
             <a:pathLst>
-              <a:path w="3371850" h="933450">
+              <a:path w="762000" h="50800">
                 <a:moveTo>
-                  <a:pt x="0" y="933450"/>
+                  <a:pt x="0" y="0"/>
                 </a:moveTo>
                 <a:lnTo>
-                  <a:pt x="933450" y="0"/>
-                </a:lnTo>
-                <a:lnTo>
-                  <a:pt x="3371850" y="0"/>
-                </a:lnTo>
-                <a:lnTo>
-                  <a:pt x="2444750" y="933450"/>
+                  <a:pt x="762000" y="0"/>
+                </a:lnTo>
+                <a:lnTo>
+                  <a:pt x="762000" y="50800"/>
+                </a:lnTo>
+                <a:lnTo>
+                  <a:pt x="0" y="50800"/>
                 </a:lnTo>
                 <a:close/>
               </a:path>
@@ -12657,144 +12799,14 @@
       </p:sp>
       <p:sp>
         <p:nvSpPr>
-          <p:cNvPr id="8" name="deco.slant-plate"/>
-          <p:cNvSpPr/>
-          <p:nvPr/>
-        </p:nvSpPr>
-        <p:spPr>
-          <a:xfrm>
-            <a:off x="4819650" y="1689100"/>
-            <a:ext cx="6350000" cy="3384550"/>
-          </a:xfrm>
-          <a:custGeom>
-            <a:avLst/>
-            <a:gdLst/>
-            <a:ahLst/>
-            <a:cxnLst/>
-            <a:rect l="l" t="t" r="r" b="b"/>
-            <a:pathLst>
-              <a:path w="6350000" h="3384550">
-                <a:moveTo>
-                  <a:pt x="0" y="3384550"/>
-                </a:moveTo>
-                <a:lnTo>
-                  <a:pt x="3384550" y="0"/>
-                </a:lnTo>
-                <a:lnTo>
-                  <a:pt x="6350000" y="0"/>
-                </a:lnTo>
-                <a:lnTo>
-                  <a:pt x="2965450" y="3384550"/>
-                </a:lnTo>
-                <a:close/>
-              </a:path>
-            </a:pathLst>
-          </a:custGeom>
-          <a:solidFill>
-            <a:schemeClr val="bg2">
-              <a:alpha val="70000"/>
-            </a:schemeClr>
-          </a:solidFill>
-          <a:ln>
-            <a:noFill/>
-          </a:ln>
-        </p:spPr>
-      </p:sp>
-      <p:sp>
-        <p:nvSpPr>
-          <p:cNvPr id="9" name="deco.title-band"/>
-          <p:cNvSpPr/>
-          <p:nvPr/>
-        </p:nvSpPr>
-        <p:spPr>
-          <a:xfrm>
-            <a:off x="1377950" y="520700"/>
-            <a:ext cx="10731500" cy="1073150"/>
-          </a:xfrm>
-          <a:custGeom>
-            <a:avLst/>
-            <a:gdLst/>
-            <a:ahLst/>
-            <a:cxnLst/>
-            <a:rect l="l" t="t" r="r" b="b"/>
-            <a:pathLst>
-              <a:path w="10731500" h="1073150">
-                <a:moveTo>
-                  <a:pt x="0" y="1073150"/>
-                </a:moveTo>
-                <a:lnTo>
-                  <a:pt x="1066800" y="0"/>
-                </a:lnTo>
-                <a:lnTo>
-                  <a:pt x="10731500" y="0"/>
-                </a:lnTo>
-                <a:lnTo>
-                  <a:pt x="10731500" y="1073150"/>
-                </a:lnTo>
-                <a:close/>
-              </a:path>
-            </a:pathLst>
-          </a:custGeom>
-          <a:solidFill>
-            <a:schemeClr val="bg2">
-              <a:alpha val="92000"/>
-            </a:schemeClr>
-          </a:solidFill>
-          <a:ln>
-            <a:noFill/>
-          </a:ln>
-        </p:spPr>
-      </p:sp>
-      <p:sp>
-        <p:nvSpPr>
-          <p:cNvPr id="10" name="deco.end-triangle"/>
-          <p:cNvSpPr/>
-          <p:nvPr/>
-        </p:nvSpPr>
-        <p:spPr>
-          <a:xfrm>
-            <a:off x="10998200" y="5702300"/>
-            <a:ext cx="933450" cy="933450"/>
-          </a:xfrm>
-          <a:custGeom>
-            <a:avLst/>
-            <a:gdLst/>
-            <a:ahLst/>
-            <a:cxnLst/>
-            <a:rect l="l" t="t" r="r" b="b"/>
-            <a:pathLst>
-              <a:path w="933450" h="933450">
-                <a:moveTo>
-                  <a:pt x="933450" y="0"/>
-                </a:moveTo>
-                <a:lnTo>
-                  <a:pt x="933450" y="933450"/>
-                </a:lnTo>
-                <a:lnTo>
-                  <a:pt x="0" y="933450"/>
-                </a:lnTo>
-                <a:close/>
-              </a:path>
-            </a:pathLst>
-          </a:custGeom>
-          <a:solidFill>
-            <a:schemeClr val="accent2"/>
-          </a:solidFill>
-          <a:ln>
-            <a:noFill/>
-          </a:ln>
-        </p:spPr>
-      </p:sp>
-      <p:sp>
-        <p:nvSpPr>
-          <p:cNvPr id="11" name="txt.eyebrow"/>
+          <p:cNvPr id="9" name="txt.body"/>
           <p:cNvSpPr txBox="1"/>
           <p:nvPr/>
         </p:nvSpPr>
         <p:spPr>
-          <a:xfrm rot="-2700000">
-            <a:off x="-431800" y="736600"/>
-            <a:ext cx="3048000" cy="711200"/>
+          <a:xfrm>
+            <a:off x="6604000" y="2489200"/>
+            <a:ext cx="5080000" cy="2311400"/>
           </a:xfrm>
           <a:prstGeom prst="rect">
             <a:avLst/>
@@ -12802,69 +12814,28 @@
           <a:noFill/>
         </p:spPr>
         <p:txBody>
-          <a:bodyPr wrap="none" lIns="0" tIns="0" rIns="0" bIns="0" anchor="ctr" rtlCol="0">
+          <a:bodyPr wrap="square" lIns="0" tIns="0" rIns="0" bIns="0" anchor="t" rtlCol="0">
             <a:noAutofit/>
           </a:bodyPr>
           <a:lstStyle/>
           <a:p>
-            <a:pPr algn="ctr" eaLnBrk="1" hangingPunct="1" latinLnBrk="0">
+            <a:pPr algn="l" eaLnBrk="1" hangingPunct="1" latinLnBrk="0">
               <a:lnSpc>
                 <a:spcPts val="2600"/>
               </a:lnSpc>
             </a:pPr>
             <a:r>
-              <a:rPr lang="ja-JP" altLang="en-US" sz="2050" b="0" spc="400">
-                <a:solidFill>
-                  <a:schemeClr val="bg1"/>
+              <a:rPr lang="ja-JP" altLang="en-US" sz="1500" b="0">
+                <a:solidFill>
+                  <a:schemeClr val="tx1"/>
                 </a:solidFill>
                 <a:latin typeface="Barlow"/>
                 <a:ea typeface="Noto Sans JP"/>
               </a:rPr>
-              <a:t>Budget</a:t>
-            </a:r>
-            <a:endParaRPr lang="ja-JP" altLang="en-US" sz="2050" b="0" dirty="0" spc="400"/>
-          </a:p>
-        </p:txBody>
-      </p:sp>
-      <p:sp>
-        <p:nvSpPr>
-          <p:cNvPr id="12" name="txt.headline"/>
-          <p:cNvSpPr txBox="1"/>
-          <p:nvPr/>
-        </p:nvSpPr>
-        <p:spPr>
-          <a:xfrm>
-            <a:off x="3416300" y="660400"/>
-            <a:ext cx="8382000" cy="787400"/>
-          </a:xfrm>
-          <a:prstGeom prst="rect">
-            <a:avLst/>
-          </a:prstGeom>
-          <a:noFill/>
-        </p:spPr>
-        <p:txBody>
-          <a:bodyPr wrap="square" lIns="0" tIns="0" rIns="0" bIns="0" anchor="ctr" rtlCol="0">
-            <a:noAutofit/>
-          </a:bodyPr>
-          <a:lstStyle/>
-          <a:p>
-            <a:pPr algn="l" eaLnBrk="1" hangingPunct="1" latinLnBrk="0">
-              <a:lnSpc>
-                <a:spcPts val="4000"/>
-              </a:lnSpc>
-            </a:pPr>
-            <a:r>
-              <a:rPr lang="ja-JP" altLang="en-US" sz="3250" b="0">
-                <a:solidFill>
-                  <a:schemeClr val="tx1"/>
-                </a:solidFill>
-                <a:latin typeface="Noto Serif JP"/>
-                <a:ea typeface="Noto Serif JP"/>
-              </a:rPr>
-              <a:t>3年間の投資額は</a:t>
-            </a:r>
-            <a:r>
-              <a:rPr lang="ja-JP" altLang="en-US" sz="3250" b="1" u="heavy">
+              <a:t>うち</a:t>
+            </a:r>
+            <a:r>
+              <a:rPr lang="ja-JP" altLang="en-US" sz="1500" b="1" u="heavy">
                 <a:solidFill>
                   <a:schemeClr val="tx1"/>
                 </a:solidFill>
@@ -12873,710 +12844,22 @@
                     <a:schemeClr val="accent2"/>
                   </a:solidFill>
                 </a:uFill>
-                <a:latin typeface="Noto Serif JP"/>
-                <a:ea typeface="Noto Serif JP"/>
-              </a:rPr>
-              <a:t>4,800万円</a:t>
-            </a:r>
-            <a:endParaRPr lang="ja-JP" altLang="en-US" sz="3250" b="0" dirty="0"/>
-          </a:p>
-        </p:txBody>
-      </p:sp>
-      <p:sp>
-        <p:nvSpPr>
-          <p:cNvPr id="13" name="txt.label.1"/>
-          <p:cNvSpPr txBox="1"/>
-          <p:nvPr/>
-        </p:nvSpPr>
-        <p:spPr>
-          <a:xfrm>
-            <a:off x="3765550" y="2286000"/>
-            <a:ext cx="2286000" cy="406400"/>
-          </a:xfrm>
-          <a:prstGeom prst="rect">
-            <a:avLst/>
-          </a:prstGeom>
-          <a:noFill/>
-        </p:spPr>
-        <p:txBody>
-          <a:bodyPr wrap="square" lIns="0" tIns="0" rIns="0" bIns="0" anchor="t" rtlCol="0">
-            <a:noAutofit/>
-          </a:bodyPr>
-          <a:lstStyle/>
-          <a:p>
-            <a:pPr algn="l" eaLnBrk="1" hangingPunct="1" latinLnBrk="0">
-              <a:lnSpc>
-                <a:spcPts val="3000"/>
-              </a:lnSpc>
-            </a:pPr>
-            <a:r>
-              <a:rPr lang="ja-JP" altLang="en-US" sz="2300" b="1">
-                <a:solidFill>
-                  <a:schemeClr val="tx1"/>
-                </a:solidFill>
                 <a:latin typeface="Barlow"/>
                 <a:ea typeface="Noto Sans JP"/>
               </a:rPr>
-              <a:t>計画の期間</a:t>
-            </a:r>
-            <a:endParaRPr lang="ja-JP" altLang="en-US" sz="2300" b="1" dirty="0"/>
-          </a:p>
-        </p:txBody>
-      </p:sp>
-      <p:sp>
-        <p:nvSpPr>
-          <p:cNvPr id="14" name="num.value.1"/>
-          <p:cNvSpPr txBox="1"/>
-          <p:nvPr/>
-        </p:nvSpPr>
-        <p:spPr>
-          <a:xfrm>
-            <a:off x="3765550" y="2692400"/>
-            <a:ext cx="2489200" cy="1320800"/>
-          </a:xfrm>
-          <a:prstGeom prst="rect">
-            <a:avLst/>
-          </a:prstGeom>
-          <a:noFill/>
-        </p:spPr>
-        <p:txBody>
-          <a:bodyPr wrap="square" lIns="0" tIns="0" rIns="0" bIns="0" anchor="t" rtlCol="0">
-            <a:noAutofit/>
-          </a:bodyPr>
-          <a:lstStyle/>
-          <a:p>
-            <a:pPr algn="l" eaLnBrk="1" hangingPunct="1" latinLnBrk="0">
-              <a:lnSpc>
-                <a:spcPts val="10400"/>
-              </a:lnSpc>
-            </a:pPr>
-            <a:r>
-              <a:rPr lang="ja-JP" altLang="en-US" sz="9900" b="0">
+              <a:t>1,600万円</a:t>
+            </a:r>
+            <a:r>
+              <a:rPr lang="ja-JP" altLang="en-US" sz="1500" b="0">
                 <a:solidFill>
                   <a:schemeClr val="tx1"/>
                 </a:solidFill>
                 <a:latin typeface="Barlow"/>
                 <a:ea typeface="Noto Sans JP"/>
               </a:rPr>
-              <a:t>3</a:t>
-            </a:r>
-            <a:endParaRPr lang="ja-JP" altLang="en-US" sz="9900" b="0" dirty="0"/>
-          </a:p>
-        </p:txBody>
-      </p:sp>
-      <p:sp>
-        <p:nvSpPr>
-          <p:cNvPr id="15" name="deco.value-1-rule"/>
-          <p:cNvSpPr/>
-          <p:nvPr/>
-        </p:nvSpPr>
-        <p:spPr>
-          <a:xfrm>
-            <a:off x="3708400" y="3848100"/>
-            <a:ext cx="1854200" cy="95250"/>
-          </a:xfrm>
-          <a:custGeom>
-            <a:avLst/>
-            <a:gdLst/>
-            <a:ahLst/>
-            <a:cxnLst/>
-            <a:rect l="l" t="t" r="r" b="b"/>
-            <a:pathLst>
-              <a:path w="1854200" h="95250">
-                <a:moveTo>
-                  <a:pt x="0" y="95250"/>
-                </a:moveTo>
-                <a:lnTo>
-                  <a:pt x="1854200" y="95250"/>
-                </a:lnTo>
-                <a:lnTo>
-                  <a:pt x="1765300" y="0"/>
-                </a:lnTo>
-                <a:lnTo>
-                  <a:pt x="95250" y="0"/>
-                </a:lnTo>
-                <a:close/>
-              </a:path>
-            </a:pathLst>
-          </a:custGeom>
-          <a:solidFill>
-            <a:schemeClr val="accent2"/>
-          </a:solidFill>
-          <a:ln>
-            <a:noFill/>
-          </a:ln>
-        </p:spPr>
-      </p:sp>
-      <p:sp>
-        <p:nvSpPr>
-          <p:cNvPr id="16" name="txt.unit.1"/>
-          <p:cNvSpPr txBox="1"/>
-          <p:nvPr/>
-        </p:nvSpPr>
-        <p:spPr>
-          <a:xfrm>
-            <a:off x="3765550" y="3962400"/>
-            <a:ext cx="1797050" cy="355600"/>
-          </a:xfrm>
-          <a:prstGeom prst="rect">
-            <a:avLst/>
-          </a:prstGeom>
-          <a:noFill/>
-        </p:spPr>
-        <p:txBody>
-          <a:bodyPr wrap="square" lIns="0" tIns="0" rIns="0" bIns="0" anchor="t" rtlCol="0">
-            <a:noAutofit/>
-          </a:bodyPr>
-          <a:lstStyle/>
-          <a:p>
-            <a:pPr algn="r" eaLnBrk="1" hangingPunct="1" latinLnBrk="0">
-              <a:lnSpc>
-                <a:spcPts val="2800"/>
-              </a:lnSpc>
-            </a:pPr>
-            <a:r>
-              <a:rPr lang="ja-JP" altLang="en-US" sz="2300" b="1">
-                <a:solidFill>
-                  <a:schemeClr val="tx1"/>
-                </a:solidFill>
-                <a:latin typeface="Barlow"/>
-                <a:ea typeface="Noto Sans JP"/>
-              </a:rPr>
-              <a:t>年</a:t>
-            </a:r>
-            <a:endParaRPr lang="ja-JP" altLang="en-US" sz="2300" b="1" dirty="0"/>
-          </a:p>
-        </p:txBody>
-      </p:sp>
-      <p:sp>
-        <p:nvSpPr>
-          <p:cNvPr id="17" name="txt.note.1"/>
-          <p:cNvSpPr txBox="1"/>
-          <p:nvPr/>
-        </p:nvSpPr>
-        <p:spPr>
-          <a:xfrm>
-            <a:off x="3841750" y="4368800"/>
-            <a:ext cx="2286000" cy="584200"/>
-          </a:xfrm>
-          <a:prstGeom prst="rect">
-            <a:avLst/>
-          </a:prstGeom>
-          <a:noFill/>
-        </p:spPr>
-        <p:txBody>
-          <a:bodyPr wrap="square" lIns="0" tIns="0" rIns="0" bIns="0" anchor="t" rtlCol="0">
-            <a:noAutofit/>
-          </a:bodyPr>
-          <a:lstStyle/>
-          <a:p>
-            <a:pPr algn="l" eaLnBrk="1" hangingPunct="1" latinLnBrk="0">
-              <a:lnSpc>
-                <a:spcPts val="2200"/>
-              </a:lnSpc>
-            </a:pPr>
-            <a:r>
-              <a:rPr lang="ja-JP" altLang="en-US" sz="1500" b="1">
-                <a:solidFill>
-                  <a:schemeClr val="tx1"/>
-                </a:solidFill>
-                <a:latin typeface="Barlow"/>
-                <a:ea typeface="Noto Sans JP"/>
-              </a:rPr>
-              <a:t>受注から日程まで</a:t>
-            </a:r>
-            <a:endParaRPr lang="ja-JP" altLang="en-US" sz="1500" b="1" dirty="0"/>
-          </a:p>
-          <a:p>
-            <a:pPr algn="l" eaLnBrk="1" hangingPunct="1" latinLnBrk="0">
-              <a:lnSpc>
-                <a:spcPts val="2200"/>
-              </a:lnSpc>
-            </a:pPr>
-            <a:r>
-              <a:rPr lang="ja-JP" altLang="en-US" sz="1500" b="1">
-                <a:solidFill>
-                  <a:schemeClr val="tx1"/>
-                </a:solidFill>
-                <a:latin typeface="Barlow"/>
-                <a:ea typeface="Noto Sans JP"/>
-              </a:rPr>
-              <a:t>段階的に進める</a:t>
-            </a:r>
-            <a:endParaRPr lang="ja-JP" altLang="en-US" sz="1500" b="1" dirty="0"/>
-          </a:p>
-        </p:txBody>
-      </p:sp>
-      <p:sp>
-        <p:nvSpPr>
-          <p:cNvPr id="18" name="txt.label.2"/>
-          <p:cNvSpPr txBox="1"/>
-          <p:nvPr/>
-        </p:nvSpPr>
-        <p:spPr>
-          <a:xfrm>
-            <a:off x="6318250" y="2286000"/>
-            <a:ext cx="2286000" cy="406400"/>
-          </a:xfrm>
-          <a:prstGeom prst="rect">
-            <a:avLst/>
-          </a:prstGeom>
-          <a:noFill/>
-        </p:spPr>
-        <p:txBody>
-          <a:bodyPr wrap="square" lIns="0" tIns="0" rIns="0" bIns="0" anchor="t" rtlCol="0">
-            <a:noAutofit/>
-          </a:bodyPr>
-          <a:lstStyle/>
-          <a:p>
-            <a:pPr algn="l" eaLnBrk="1" hangingPunct="1" latinLnBrk="0">
-              <a:lnSpc>
-                <a:spcPts val="3000"/>
-              </a:lnSpc>
-            </a:pPr>
-            <a:r>
-              <a:rPr lang="ja-JP" altLang="en-US" sz="2300" b="1">
-                <a:solidFill>
-                  <a:schemeClr val="tx1"/>
-                </a:solidFill>
-                <a:latin typeface="Barlow"/>
-                <a:ea typeface="Noto Sans JP"/>
-              </a:rPr>
-              <a:t>センサー</a:t>
-            </a:r>
-            <a:endParaRPr lang="ja-JP" altLang="en-US" sz="2300" b="1" dirty="0"/>
-          </a:p>
-        </p:txBody>
-      </p:sp>
-      <p:sp>
-        <p:nvSpPr>
-          <p:cNvPr id="19" name="num.value.2"/>
-          <p:cNvSpPr txBox="1"/>
-          <p:nvPr/>
-        </p:nvSpPr>
-        <p:spPr>
-          <a:xfrm>
-            <a:off x="6318250" y="2692400"/>
-            <a:ext cx="3276600" cy="1320800"/>
-          </a:xfrm>
-          <a:prstGeom prst="rect">
-            <a:avLst/>
-          </a:prstGeom>
-          <a:noFill/>
-        </p:spPr>
-        <p:txBody>
-          <a:bodyPr wrap="square" lIns="0" tIns="0" rIns="0" bIns="0" anchor="t" rtlCol="0">
-            <a:noAutofit/>
-          </a:bodyPr>
-          <a:lstStyle/>
-          <a:p>
-            <a:pPr algn="l" eaLnBrk="1" hangingPunct="1" latinLnBrk="0">
-              <a:lnSpc>
-                <a:spcPts val="10400"/>
-              </a:lnSpc>
-            </a:pPr>
-            <a:r>
-              <a:rPr lang="ja-JP" altLang="en-US" sz="9900" b="0">
-                <a:solidFill>
-                  <a:schemeClr val="tx1"/>
-                </a:solidFill>
-                <a:latin typeface="Barlow"/>
-                <a:ea typeface="Noto Sans JP"/>
-              </a:rPr>
-              <a:t>20</a:t>
-            </a:r>
-            <a:endParaRPr lang="ja-JP" altLang="en-US" sz="9900" b="0" dirty="0"/>
-          </a:p>
-        </p:txBody>
-      </p:sp>
-      <p:sp>
-        <p:nvSpPr>
-          <p:cNvPr id="20" name="deco.value-2-rule"/>
-          <p:cNvSpPr/>
-          <p:nvPr/>
-        </p:nvSpPr>
-        <p:spPr>
-          <a:xfrm>
-            <a:off x="6261100" y="3848100"/>
-            <a:ext cx="1854200" cy="95250"/>
-          </a:xfrm>
-          <a:custGeom>
-            <a:avLst/>
-            <a:gdLst/>
-            <a:ahLst/>
-            <a:cxnLst/>
-            <a:rect l="l" t="t" r="r" b="b"/>
-            <a:pathLst>
-              <a:path w="1854200" h="95250">
-                <a:moveTo>
-                  <a:pt x="0" y="95250"/>
-                </a:moveTo>
-                <a:lnTo>
-                  <a:pt x="1854200" y="95250"/>
-                </a:lnTo>
-                <a:lnTo>
-                  <a:pt x="1765300" y="0"/>
-                </a:lnTo>
-                <a:lnTo>
-                  <a:pt x="95250" y="0"/>
-                </a:lnTo>
-                <a:close/>
-              </a:path>
-            </a:pathLst>
-          </a:custGeom>
-          <a:solidFill>
-            <a:schemeClr val="accent2"/>
-          </a:solidFill>
-          <a:ln>
-            <a:noFill/>
-          </a:ln>
-        </p:spPr>
-      </p:sp>
-      <p:sp>
-        <p:nvSpPr>
-          <p:cNvPr id="21" name="txt.unit.2"/>
-          <p:cNvSpPr txBox="1"/>
-          <p:nvPr/>
-        </p:nvSpPr>
-        <p:spPr>
-          <a:xfrm>
-            <a:off x="6318250" y="3962400"/>
-            <a:ext cx="1797050" cy="355600"/>
-          </a:xfrm>
-          <a:prstGeom prst="rect">
-            <a:avLst/>
-          </a:prstGeom>
-          <a:noFill/>
-        </p:spPr>
-        <p:txBody>
-          <a:bodyPr wrap="square" lIns="0" tIns="0" rIns="0" bIns="0" anchor="t" rtlCol="0">
-            <a:noAutofit/>
-          </a:bodyPr>
-          <a:lstStyle/>
-          <a:p>
-            <a:pPr algn="r" eaLnBrk="1" hangingPunct="1" latinLnBrk="0">
-              <a:lnSpc>
-                <a:spcPts val="2800"/>
-              </a:lnSpc>
-            </a:pPr>
-            <a:r>
-              <a:rPr lang="ja-JP" altLang="en-US" sz="2300" b="1">
-                <a:solidFill>
-                  <a:schemeClr val="tx1"/>
-                </a:solidFill>
-                <a:latin typeface="Barlow"/>
-                <a:ea typeface="Noto Sans JP"/>
-              </a:rPr>
-              <a:t>台</a:t>
-            </a:r>
-            <a:endParaRPr lang="ja-JP" altLang="en-US" sz="2300" b="1" dirty="0"/>
-          </a:p>
-        </p:txBody>
-      </p:sp>
-      <p:sp>
-        <p:nvSpPr>
-          <p:cNvPr id="22" name="txt.note.2"/>
-          <p:cNvSpPr txBox="1"/>
-          <p:nvPr/>
-        </p:nvSpPr>
-        <p:spPr>
-          <a:xfrm>
-            <a:off x="6394450" y="4368800"/>
-            <a:ext cx="2286000" cy="584200"/>
-          </a:xfrm>
-          <a:prstGeom prst="rect">
-            <a:avLst/>
-          </a:prstGeom>
-          <a:noFill/>
-        </p:spPr>
-        <p:txBody>
-          <a:bodyPr wrap="square" lIns="0" tIns="0" rIns="0" bIns="0" anchor="t" rtlCol="0">
-            <a:noAutofit/>
-          </a:bodyPr>
-          <a:lstStyle/>
-          <a:p>
-            <a:pPr algn="l" eaLnBrk="1" hangingPunct="1" latinLnBrk="0">
-              <a:lnSpc>
-                <a:spcPts val="2200"/>
-              </a:lnSpc>
-            </a:pPr>
-            <a:r>
-              <a:rPr lang="ja-JP" altLang="en-US" sz="1500" b="1">
-                <a:solidFill>
-                  <a:schemeClr val="tx1"/>
-                </a:solidFill>
-                <a:latin typeface="Barlow"/>
-                <a:ea typeface="Noto Sans JP"/>
-              </a:rPr>
-              <a:t>2年目に全台へ設置</a:t>
-            </a:r>
-            <a:endParaRPr lang="ja-JP" altLang="en-US" sz="1500" b="1" dirty="0"/>
-          </a:p>
-        </p:txBody>
-      </p:sp>
-      <p:sp>
-        <p:nvSpPr>
-          <p:cNvPr id="23" name="txt.label.3"/>
-          <p:cNvSpPr txBox="1"/>
-          <p:nvPr/>
-        </p:nvSpPr>
-        <p:spPr>
-          <a:xfrm>
-            <a:off x="9683750" y="2286000"/>
-            <a:ext cx="2286000" cy="406400"/>
-          </a:xfrm>
-          <a:prstGeom prst="rect">
-            <a:avLst/>
-          </a:prstGeom>
-          <a:noFill/>
-        </p:spPr>
-        <p:txBody>
-          <a:bodyPr wrap="square" lIns="0" tIns="0" rIns="0" bIns="0" anchor="t" rtlCol="0">
-            <a:noAutofit/>
-          </a:bodyPr>
-          <a:lstStyle/>
-          <a:p>
-            <a:pPr algn="l" eaLnBrk="1" hangingPunct="1" latinLnBrk="0">
-              <a:lnSpc>
-                <a:spcPts val="3000"/>
-              </a:lnSpc>
-            </a:pPr>
-            <a:r>
-              <a:rPr lang="ja-JP" altLang="en-US" sz="2300" b="1">
-                <a:solidFill>
-                  <a:schemeClr val="tx1"/>
-                </a:solidFill>
-                <a:latin typeface="Barlow"/>
-                <a:ea typeface="Noto Sans JP"/>
-              </a:rPr>
-              <a:t>段取り替え</a:t>
-            </a:r>
-            <a:endParaRPr lang="ja-JP" altLang="en-US" sz="2300" b="1" dirty="0"/>
-          </a:p>
-        </p:txBody>
-      </p:sp>
-      <p:sp>
-        <p:nvSpPr>
-          <p:cNvPr id="24" name="num.value.3"/>
-          <p:cNvSpPr txBox="1"/>
-          <p:nvPr/>
-        </p:nvSpPr>
-        <p:spPr>
-          <a:xfrm>
-            <a:off x="9683750" y="2692400"/>
-            <a:ext cx="2413000" cy="1320800"/>
-          </a:xfrm>
-          <a:prstGeom prst="rect">
-            <a:avLst/>
-          </a:prstGeom>
-          <a:noFill/>
-        </p:spPr>
-        <p:txBody>
-          <a:bodyPr wrap="square" lIns="0" tIns="0" rIns="0" bIns="0" anchor="t" rtlCol="0">
-            <a:noAutofit/>
-          </a:bodyPr>
-          <a:lstStyle/>
-          <a:p>
-            <a:pPr algn="l" eaLnBrk="1" hangingPunct="1" latinLnBrk="0">
-              <a:lnSpc>
-                <a:spcPts val="10400"/>
-              </a:lnSpc>
-            </a:pPr>
-            <a:r>
-              <a:rPr lang="ja-JP" altLang="en-US" sz="9900" b="0">
-                <a:solidFill>
-                  <a:schemeClr val="tx1"/>
-                </a:solidFill>
-                <a:latin typeface="Barlow"/>
-                <a:ea typeface="Noto Sans JP"/>
-              </a:rPr>
-              <a:t>20</a:t>
-            </a:r>
-            <a:endParaRPr lang="ja-JP" altLang="en-US" sz="9900" b="0" dirty="0"/>
-          </a:p>
-        </p:txBody>
-      </p:sp>
-      <p:sp>
-        <p:nvSpPr>
-          <p:cNvPr id="25" name="deco.value-3-rule"/>
-          <p:cNvSpPr/>
-          <p:nvPr/>
-        </p:nvSpPr>
-        <p:spPr>
-          <a:xfrm>
-            <a:off x="9626600" y="3848100"/>
-            <a:ext cx="1854200" cy="95250"/>
-          </a:xfrm>
-          <a:custGeom>
-            <a:avLst/>
-            <a:gdLst/>
-            <a:ahLst/>
-            <a:cxnLst/>
-            <a:rect l="l" t="t" r="r" b="b"/>
-            <a:pathLst>
-              <a:path w="1854200" h="95250">
-                <a:moveTo>
-                  <a:pt x="0" y="95250"/>
-                </a:moveTo>
-                <a:lnTo>
-                  <a:pt x="1854200" y="95250"/>
-                </a:lnTo>
-                <a:lnTo>
-                  <a:pt x="1765300" y="0"/>
-                </a:lnTo>
-                <a:lnTo>
-                  <a:pt x="95250" y="0"/>
-                </a:lnTo>
-                <a:close/>
-              </a:path>
-            </a:pathLst>
-          </a:custGeom>
-          <a:solidFill>
-            <a:schemeClr val="accent2"/>
-          </a:solidFill>
-          <a:ln>
-            <a:noFill/>
-          </a:ln>
-        </p:spPr>
-      </p:sp>
-      <p:sp>
-        <p:nvSpPr>
-          <p:cNvPr id="26" name="txt.unit.3"/>
-          <p:cNvSpPr txBox="1"/>
-          <p:nvPr/>
-        </p:nvSpPr>
-        <p:spPr>
-          <a:xfrm>
-            <a:off x="9683750" y="3962400"/>
-            <a:ext cx="1797050" cy="355600"/>
-          </a:xfrm>
-          <a:prstGeom prst="rect">
-            <a:avLst/>
-          </a:prstGeom>
-          <a:noFill/>
-        </p:spPr>
-        <p:txBody>
-          <a:bodyPr wrap="square" lIns="0" tIns="0" rIns="0" bIns="0" anchor="t" rtlCol="0">
-            <a:noAutofit/>
-          </a:bodyPr>
-          <a:lstStyle/>
-          <a:p>
-            <a:pPr algn="r" eaLnBrk="1" hangingPunct="1" latinLnBrk="0">
-              <a:lnSpc>
-                <a:spcPts val="2800"/>
-              </a:lnSpc>
-            </a:pPr>
-            <a:r>
-              <a:rPr lang="ja-JP" altLang="en-US" sz="2300" b="1">
-                <a:solidFill>
-                  <a:schemeClr val="tx1"/>
-                </a:solidFill>
-                <a:latin typeface="Barlow"/>
-                <a:ea typeface="Noto Sans JP"/>
-              </a:rPr>
-              <a:t>分</a:t>
-            </a:r>
-            <a:endParaRPr lang="ja-JP" altLang="en-US" sz="2300" b="1" dirty="0"/>
-          </a:p>
-        </p:txBody>
-      </p:sp>
-      <p:sp>
-        <p:nvSpPr>
-          <p:cNvPr id="27" name="txt.note.3"/>
-          <p:cNvSpPr txBox="1"/>
-          <p:nvPr/>
-        </p:nvSpPr>
-        <p:spPr>
-          <a:xfrm>
-            <a:off x="9759950" y="4368800"/>
-            <a:ext cx="2286000" cy="584200"/>
-          </a:xfrm>
-          <a:prstGeom prst="rect">
-            <a:avLst/>
-          </a:prstGeom>
-          <a:noFill/>
-        </p:spPr>
-        <p:txBody>
-          <a:bodyPr wrap="square" lIns="0" tIns="0" rIns="0" bIns="0" anchor="t" rtlCol="0">
-            <a:noAutofit/>
-          </a:bodyPr>
-          <a:lstStyle/>
-          <a:p>
-            <a:pPr algn="l" eaLnBrk="1" hangingPunct="1" latinLnBrk="0">
-              <a:lnSpc>
-                <a:spcPts val="2200"/>
-              </a:lnSpc>
-            </a:pPr>
-            <a:r>
-              <a:rPr lang="ja-JP" altLang="en-US" sz="1500" b="1">
-                <a:solidFill>
-                  <a:schemeClr val="tx1"/>
-                </a:solidFill>
-                <a:latin typeface="Barlow"/>
-                <a:ea typeface="Noto Sans JP"/>
-              </a:rPr>
-              <a:t>平均45分から</a:t>
-            </a:r>
-            <a:endParaRPr lang="ja-JP" altLang="en-US" sz="1500" b="1" dirty="0"/>
-          </a:p>
-          <a:p>
-            <a:pPr algn="l" eaLnBrk="1" hangingPunct="1" latinLnBrk="0">
-              <a:lnSpc>
-                <a:spcPts val="2200"/>
-              </a:lnSpc>
-            </a:pPr>
-            <a:r>
-              <a:rPr lang="ja-JP" altLang="en-US" sz="1500" b="1">
-                <a:solidFill>
-                  <a:schemeClr val="tx1"/>
-                </a:solidFill>
-                <a:latin typeface="Barlow"/>
-                <a:ea typeface="Noto Sans JP"/>
-              </a:rPr>
-              <a:t>短縮を目指す</a:t>
-            </a:r>
-            <a:endParaRPr lang="ja-JP" altLang="en-US" sz="1500" b="1" dirty="0"/>
-          </a:p>
-        </p:txBody>
-      </p:sp>
-      <p:sp>
-        <p:nvSpPr>
-          <p:cNvPr id="28" name="txt.footnote"/>
-          <p:cNvSpPr txBox="1"/>
-          <p:nvPr/>
-        </p:nvSpPr>
-        <p:spPr>
-          <a:xfrm>
-            <a:off x="3816350" y="5867400"/>
-            <a:ext cx="7620000" cy="558800"/>
-          </a:xfrm>
-          <a:prstGeom prst="rect">
-            <a:avLst/>
-          </a:prstGeom>
-          <a:noFill/>
-        </p:spPr>
-        <p:txBody>
-          <a:bodyPr wrap="square" lIns="0" tIns="0" rIns="0" bIns="0" anchor="t" rtlCol="0">
-            <a:noAutofit/>
-          </a:bodyPr>
-          <a:lstStyle/>
-          <a:p>
-            <a:pPr algn="l" eaLnBrk="1" hangingPunct="1" latinLnBrk="0">
-              <a:lnSpc>
-                <a:spcPts val="2200"/>
-              </a:lnSpc>
-            </a:pPr>
-            <a:r>
-              <a:rPr lang="ja-JP" altLang="en-US" sz="1300" b="1">
-                <a:solidFill>
-                  <a:schemeClr val="tx1"/>
-                </a:solidFill>
-                <a:latin typeface="Barlow"/>
-                <a:ea typeface="Noto Sans JP"/>
-              </a:rPr>
-              <a:t>うち1,600万円は国の補助金を活用予定です。</a:t>
-            </a:r>
-            <a:endParaRPr lang="ja-JP" altLang="en-US" sz="1300" b="1" dirty="0"/>
+              <a:t>は、国の補助金の活用を予定しています。小さく始めて、効果を確かめながら進めます。</a:t>
+            </a:r>
+            <a:endParaRPr lang="ja-JP" altLang="en-US" sz="1500" b="0" dirty="0"/>
           </a:p>
         </p:txBody>
       </p:sp>
@@ -13600,7 +12883,7 @@
       <p:grpSpPr/>
       <p:pic>
         <p:nvPicPr>
-          <p:cNvPr id="2" name="img.hero" descr="左の写真"/>
+          <p:cNvPr id="2" name="img.side" descr="左の写真"/>
           <p:cNvPicPr>
             <a:picLocks noChangeAspect="1"/>
           </p:cNvPicPr>
@@ -13616,7 +12899,7 @@
         <p:spPr>
           <a:xfrm>
             <a:off x="0" y="0"/>
-            <a:ext cx="6426200" cy="6858000"/>
+            <a:ext cx="3035300" cy="6858000"/>
           </a:xfrm>
           <a:prstGeom prst="rect">
             <a:avLst/>
@@ -13625,14 +12908,14 @@
       </p:pic>
       <p:sp>
         <p:nvSpPr>
-          <p:cNvPr id="3" name="deco.tri-1"/>
+          <p:cNvPr id="3" name="deco.side-tri-1"/>
           <p:cNvSpPr/>
           <p:nvPr/>
         </p:nvSpPr>
         <p:spPr>
           <a:xfrm>
-            <a:off x="-232410" y="78740"/>
-            <a:ext cx="3328670" cy="3328670"/>
+            <a:off x="0" y="-323850"/>
+            <a:ext cx="3035300" cy="3035300"/>
           </a:xfrm>
           <a:custGeom>
             <a:avLst/>
@@ -13641,15 +12924,15 @@
             <a:cxnLst/>
             <a:rect l="l" t="t" r="r" b="b"/>
             <a:pathLst>
-              <a:path w="3328670" h="3328670">
+              <a:path w="3035300" h="3035300">
                 <a:moveTo>
-                  <a:pt x="3328670" y="0"/>
+                  <a:pt x="0" y="3035300"/>
                 </a:moveTo>
                 <a:lnTo>
-                  <a:pt x="3328670" y="3328670"/>
-                </a:lnTo>
-                <a:lnTo>
-                  <a:pt x="0" y="3328670"/>
+                  <a:pt x="3035300" y="0"/>
+                </a:lnTo>
+                <a:lnTo>
+                  <a:pt x="3035300" y="3035300"/>
                 </a:lnTo>
                 <a:close/>
               </a:path>
@@ -13667,14 +12950,14 @@
       </p:sp>
       <p:sp>
         <p:nvSpPr>
-          <p:cNvPr id="4" name="deco.tri-2"/>
+          <p:cNvPr id="4" name="deco.side-tri-2"/>
           <p:cNvSpPr/>
           <p:nvPr/>
         </p:nvSpPr>
         <p:spPr>
           <a:xfrm>
-            <a:off x="-232410" y="3392170"/>
-            <a:ext cx="3328670" cy="3328670"/>
+            <a:off x="0" y="2698750"/>
+            <a:ext cx="3035300" cy="3035300"/>
           </a:xfrm>
           <a:custGeom>
             <a:avLst/>
@@ -13683,15 +12966,15 @@
             <a:cxnLst/>
             <a:rect l="l" t="t" r="r" b="b"/>
             <a:pathLst>
-              <a:path w="3328670" h="3328670">
+              <a:path w="3035300" h="3035300">
                 <a:moveTo>
-                  <a:pt x="0" y="3328670"/>
+                  <a:pt x="0" y="0"/>
                 </a:moveTo>
                 <a:lnTo>
-                  <a:pt x="0" y="0"/>
-                </a:lnTo>
-                <a:lnTo>
-                  <a:pt x="3328670" y="0"/>
+                  <a:pt x="3035300" y="0"/>
+                </a:lnTo>
+                <a:lnTo>
+                  <a:pt x="0" y="3035300"/>
                 </a:lnTo>
                 <a:close/>
               </a:path>
@@ -13709,14 +12992,14 @@
       </p:sp>
       <p:sp>
         <p:nvSpPr>
-          <p:cNvPr id="5" name="deco.tri-3"/>
+          <p:cNvPr id="5" name="deco.side-tri-3"/>
           <p:cNvSpPr/>
           <p:nvPr/>
         </p:nvSpPr>
         <p:spPr>
           <a:xfrm>
-            <a:off x="3102610" y="106680"/>
-            <a:ext cx="3328670" cy="3327400"/>
+            <a:off x="990600" y="4832350"/>
+            <a:ext cx="2044700" cy="2044700"/>
           </a:xfrm>
           <a:custGeom>
             <a:avLst/>
@@ -13725,15 +13008,15 @@
             <a:cxnLst/>
             <a:rect l="l" t="t" r="r" b="b"/>
             <a:pathLst>
-              <a:path w="3328670" h="3327400">
+              <a:path w="2044700" h="2044700">
                 <a:moveTo>
-                  <a:pt x="3328670" y="0"/>
+                  <a:pt x="0" y="2044700"/>
                 </a:moveTo>
                 <a:lnTo>
-                  <a:pt x="3328670" y="3327400"/>
-                </a:lnTo>
-                <a:lnTo>
-                  <a:pt x="0" y="3327400"/>
+                  <a:pt x="2044700" y="0"/>
+                </a:lnTo>
+                <a:lnTo>
+                  <a:pt x="2044700" y="2044700"/>
                 </a:lnTo>
                 <a:close/>
               </a:path>
@@ -13751,14 +13034,14 @@
       </p:sp>
       <p:sp>
         <p:nvSpPr>
-          <p:cNvPr id="6" name="deco.tri-4"/>
+          <p:cNvPr id="6" name="deco.side-line"/>
           <p:cNvSpPr/>
           <p:nvPr/>
         </p:nvSpPr>
         <p:spPr>
           <a:xfrm>
-            <a:off x="3102610" y="3420110"/>
-            <a:ext cx="3328670" cy="3327400"/>
+            <a:off x="76200" y="1727200"/>
+            <a:ext cx="1244600" cy="1111250"/>
           </a:xfrm>
           <a:custGeom>
             <a:avLst/>
@@ -13767,101 +13050,18 @@
             <a:cxnLst/>
             <a:rect l="l" t="t" r="r" b="b"/>
             <a:pathLst>
-              <a:path w="3328670" h="3327400">
+              <a:path w="1244600" h="1111250">
                 <a:moveTo>
-                  <a:pt x="0" y="3327400"/>
+                  <a:pt x="0" y="1111250"/>
                 </a:moveTo>
                 <a:lnTo>
-                  <a:pt x="0" y="0"/>
-                </a:lnTo>
-                <a:lnTo>
-                  <a:pt x="3328670" y="0"/>
-                </a:lnTo>
-                <a:close/>
-              </a:path>
-            </a:pathLst>
-          </a:custGeom>
-          <a:solidFill>
-            <a:schemeClr val="accent1">
-              <a:alpha val="88000"/>
-            </a:schemeClr>
-          </a:solidFill>
-          <a:ln>
-            <a:noFill/>
-          </a:ln>
-        </p:spPr>
-      </p:sp>
-      <p:sp>
-        <p:nvSpPr>
-          <p:cNvPr id="7" name="txt.headline"/>
-          <p:cNvSpPr txBox="1"/>
-          <p:nvPr/>
-        </p:nvSpPr>
-        <p:spPr>
-          <a:xfrm>
-            <a:off x="7061200" y="889000"/>
-            <a:ext cx="4699000" cy="1016000"/>
-          </a:xfrm>
-          <a:prstGeom prst="rect">
-            <a:avLst/>
-          </a:prstGeom>
-          <a:noFill/>
-        </p:spPr>
-        <p:txBody>
-          <a:bodyPr wrap="square" lIns="0" tIns="0" rIns="0" bIns="0" anchor="b" rtlCol="0">
-            <a:noAutofit/>
-          </a:bodyPr>
-          <a:lstStyle/>
-          <a:p>
-            <a:pPr algn="l" eaLnBrk="1" hangingPunct="1" latinLnBrk="0">
-              <a:lnSpc>
-                <a:spcPts val="4000"/>
-              </a:lnSpc>
-            </a:pPr>
-            <a:r>
-              <a:rPr lang="ja-JP" altLang="en-US" sz="3250" b="0">
-                <a:solidFill>
-                  <a:schemeClr val="tx1"/>
-                </a:solidFill>
-                <a:latin typeface="Noto Serif JP"/>
-                <a:ea typeface="Noto Serif JP"/>
-              </a:rPr>
-              <a:t>期待する効果</a:t>
-            </a:r>
-            <a:endParaRPr lang="ja-JP" altLang="en-US" sz="3250" b="0" dirty="0"/>
-          </a:p>
-        </p:txBody>
-      </p:sp>
-      <p:sp>
-        <p:nvSpPr>
-          <p:cNvPr id="8" name="deco.point-1"/>
-          <p:cNvSpPr/>
-          <p:nvPr/>
-        </p:nvSpPr>
-        <p:spPr>
-          <a:xfrm>
-            <a:off x="7061200" y="2603500"/>
-            <a:ext cx="152400" cy="152400"/>
-          </a:xfrm>
-          <a:custGeom>
-            <a:avLst/>
-            <a:gdLst/>
-            <a:ahLst/>
-            <a:cxnLst/>
-            <a:rect l="l" t="t" r="r" b="b"/>
-            <a:pathLst>
-              <a:path w="152400" h="152400">
-                <a:moveTo>
-                  <a:pt x="0" y="0"/>
-                </a:moveTo>
-                <a:lnTo>
-                  <a:pt x="152400" y="0"/>
-                </a:lnTo>
-                <a:lnTo>
-                  <a:pt x="152400" y="152400"/>
-                </a:lnTo>
-                <a:lnTo>
-                  <a:pt x="0" y="152400"/>
+                  <a:pt x="133350" y="1111250"/>
+                </a:lnTo>
+                <a:lnTo>
+                  <a:pt x="1244600" y="0"/>
+                </a:lnTo>
+                <a:lnTo>
+                  <a:pt x="1111250" y="0"/>
                 </a:lnTo>
                 <a:close/>
               </a:path>
@@ -13877,98 +13077,14 @@
       </p:sp>
       <p:sp>
         <p:nvSpPr>
-          <p:cNvPr id="9" name="txt.item.1"/>
-          <p:cNvSpPr txBox="1"/>
-          <p:nvPr/>
-        </p:nvSpPr>
-        <p:spPr>
-          <a:xfrm>
-            <a:off x="7366000" y="2540000"/>
-            <a:ext cx="4394200" cy="838200"/>
-          </a:xfrm>
-          <a:prstGeom prst="rect">
-            <a:avLst/>
-          </a:prstGeom>
-          <a:noFill/>
-        </p:spPr>
-        <p:txBody>
-          <a:bodyPr wrap="square" lIns="0" tIns="0" rIns="0" bIns="0" anchor="t" rtlCol="0">
-            <a:noAutofit/>
-          </a:bodyPr>
-          <a:lstStyle/>
-          <a:p>
-            <a:pPr algn="l" eaLnBrk="1" hangingPunct="1" latinLnBrk="0">
-              <a:lnSpc>
-                <a:spcPts val="2200"/>
-              </a:lnSpc>
-            </a:pPr>
-            <a:r>
-              <a:rPr lang="ja-JP" altLang="en-US" sz="1600" b="0">
-                <a:solidFill>
-                  <a:schemeClr val="tx1"/>
-                </a:solidFill>
-                <a:latin typeface="Barlow Medium"/>
-                <a:ea typeface="Noto Sans JP Medium"/>
-              </a:rPr>
-              <a:t>段取り替えの時間を、平均45</a:t>
-            </a:r>
-            <a:endParaRPr lang="ja-JP" altLang="en-US" sz="1600" b="0" dirty="0"/>
-          </a:p>
-          <a:p>
-            <a:pPr algn="l" eaLnBrk="1" hangingPunct="1" latinLnBrk="0">
-              <a:lnSpc>
-                <a:spcPts val="2200"/>
-              </a:lnSpc>
-            </a:pPr>
-            <a:r>
-              <a:rPr lang="ja-JP" altLang="en-US" sz="1600" b="0">
-                <a:solidFill>
-                  <a:schemeClr val="tx1"/>
-                </a:solidFill>
-                <a:latin typeface="Barlow Medium"/>
-                <a:ea typeface="Noto Sans JP Medium"/>
-              </a:rPr>
-              <a:t>分から</a:t>
-            </a:r>
-            <a:r>
-              <a:rPr lang="ja-JP" altLang="en-US" sz="1600" b="1" u="heavy">
-                <a:solidFill>
-                  <a:schemeClr val="tx1"/>
-                </a:solidFill>
-                <a:uFill>
-                  <a:solidFill>
-                    <a:schemeClr val="accent2"/>
-                  </a:solidFill>
-                </a:uFill>
-                <a:latin typeface="Barlow Medium"/>
-                <a:ea typeface="Noto Sans JP Medium"/>
-              </a:rPr>
-              <a:t>20分</a:t>
-            </a:r>
-            <a:r>
-              <a:rPr lang="ja-JP" altLang="en-US" sz="1600" b="0">
-                <a:solidFill>
-                  <a:schemeClr val="tx1"/>
-                </a:solidFill>
-                <a:latin typeface="Barlow Medium"/>
-                <a:ea typeface="Noto Sans JP Medium"/>
-              </a:rPr>
-              <a:t>へ短縮します。</a:t>
-            </a:r>
-            <a:endParaRPr lang="ja-JP" altLang="en-US" sz="1600" b="0" dirty="0"/>
-          </a:p>
-        </p:txBody>
-      </p:sp>
-      <p:sp>
-        <p:nvSpPr>
-          <p:cNvPr id="10" name="deco.point-2"/>
+          <p:cNvPr id="7" name="deco.top-band"/>
           <p:cNvSpPr/>
           <p:nvPr/>
         </p:nvSpPr>
         <p:spPr>
           <a:xfrm>
-            <a:off x="7061200" y="3771900"/>
-            <a:ext cx="152400" cy="152400"/>
+            <a:off x="9455150" y="-482600"/>
+            <a:ext cx="3371850" cy="933450"/>
           </a:xfrm>
           <a:custGeom>
             <a:avLst/>
@@ -13977,18 +13093,18 @@
             <a:cxnLst/>
             <a:rect l="l" t="t" r="r" b="b"/>
             <a:pathLst>
-              <a:path w="152400" h="152400">
+              <a:path w="3371850" h="933450">
                 <a:moveTo>
-                  <a:pt x="0" y="0"/>
+                  <a:pt x="0" y="933450"/>
                 </a:moveTo>
                 <a:lnTo>
-                  <a:pt x="152400" y="0"/>
-                </a:lnTo>
-                <a:lnTo>
-                  <a:pt x="152400" y="152400"/>
-                </a:lnTo>
-                <a:lnTo>
-                  <a:pt x="0" y="152400"/>
+                  <a:pt x="933450" y="0"/>
+                </a:lnTo>
+                <a:lnTo>
+                  <a:pt x="3371850" y="0"/>
+                </a:lnTo>
+                <a:lnTo>
+                  <a:pt x="2444750" y="933450"/>
                 </a:lnTo>
                 <a:close/>
               </a:path>
@@ -14004,55 +13120,14 @@
       </p:sp>
       <p:sp>
         <p:nvSpPr>
-          <p:cNvPr id="11" name="txt.item.2"/>
-          <p:cNvSpPr txBox="1"/>
-          <p:nvPr/>
-        </p:nvSpPr>
-        <p:spPr>
-          <a:xfrm>
-            <a:off x="7366000" y="3708400"/>
-            <a:ext cx="4394200" cy="838200"/>
-          </a:xfrm>
-          <a:prstGeom prst="rect">
-            <a:avLst/>
-          </a:prstGeom>
-          <a:noFill/>
-        </p:spPr>
-        <p:txBody>
-          <a:bodyPr wrap="square" lIns="0" tIns="0" rIns="0" bIns="0" anchor="t" rtlCol="0">
-            <a:noAutofit/>
-          </a:bodyPr>
-          <a:lstStyle/>
-          <a:p>
-            <a:pPr algn="l" eaLnBrk="1" hangingPunct="1" latinLnBrk="0">
-              <a:lnSpc>
-                <a:spcPts val="2200"/>
-              </a:lnSpc>
-            </a:pPr>
-            <a:r>
-              <a:rPr lang="ja-JP" altLang="en-US" sz="1600" b="0">
-                <a:solidFill>
-                  <a:schemeClr val="tx1"/>
-                </a:solidFill>
-                <a:latin typeface="Barlow Medium"/>
-                <a:ea typeface="Noto Sans JP Medium"/>
-              </a:rPr>
-              <a:t>材料の在庫を、今の半分へ減らします。</a:t>
-            </a:r>
-            <a:endParaRPr lang="ja-JP" altLang="en-US" sz="1600" b="0" dirty="0"/>
-          </a:p>
-        </p:txBody>
-      </p:sp>
-      <p:sp>
-        <p:nvSpPr>
-          <p:cNvPr id="12" name="deco.point-3"/>
+          <p:cNvPr id="8" name="deco.slant-plate"/>
           <p:cNvSpPr/>
           <p:nvPr/>
         </p:nvSpPr>
         <p:spPr>
           <a:xfrm>
-            <a:off x="7061200" y="4940300"/>
-            <a:ext cx="152400" cy="152400"/>
+            <a:off x="4819650" y="1689100"/>
+            <a:ext cx="6350000" cy="3384550"/>
           </a:xfrm>
           <a:custGeom>
             <a:avLst/>
@@ -14061,18 +13136,105 @@
             <a:cxnLst/>
             <a:rect l="l" t="t" r="r" b="b"/>
             <a:pathLst>
-              <a:path w="152400" h="152400">
+              <a:path w="6350000" h="3384550">
                 <a:moveTo>
-                  <a:pt x="0" y="0"/>
+                  <a:pt x="0" y="3384550"/>
                 </a:moveTo>
                 <a:lnTo>
-                  <a:pt x="152400" y="0"/>
-                </a:lnTo>
-                <a:lnTo>
-                  <a:pt x="152400" y="152400"/>
-                </a:lnTo>
-                <a:lnTo>
-                  <a:pt x="0" y="152400"/>
+                  <a:pt x="3384550" y="0"/>
+                </a:lnTo>
+                <a:lnTo>
+                  <a:pt x="6350000" y="0"/>
+                </a:lnTo>
+                <a:lnTo>
+                  <a:pt x="2965450" y="3384550"/>
+                </a:lnTo>
+                <a:close/>
+              </a:path>
+            </a:pathLst>
+          </a:custGeom>
+          <a:solidFill>
+            <a:schemeClr val="bg2">
+              <a:alpha val="70000"/>
+            </a:schemeClr>
+          </a:solidFill>
+          <a:ln>
+            <a:noFill/>
+          </a:ln>
+        </p:spPr>
+      </p:sp>
+      <p:sp>
+        <p:nvSpPr>
+          <p:cNvPr id="9" name="deco.title-band"/>
+          <p:cNvSpPr/>
+          <p:nvPr/>
+        </p:nvSpPr>
+        <p:spPr>
+          <a:xfrm>
+            <a:off x="1377950" y="520700"/>
+            <a:ext cx="10731500" cy="1073150"/>
+          </a:xfrm>
+          <a:custGeom>
+            <a:avLst/>
+            <a:gdLst/>
+            <a:ahLst/>
+            <a:cxnLst/>
+            <a:rect l="l" t="t" r="r" b="b"/>
+            <a:pathLst>
+              <a:path w="10731500" h="1073150">
+                <a:moveTo>
+                  <a:pt x="0" y="1073150"/>
+                </a:moveTo>
+                <a:lnTo>
+                  <a:pt x="1066800" y="0"/>
+                </a:lnTo>
+                <a:lnTo>
+                  <a:pt x="10731500" y="0"/>
+                </a:lnTo>
+                <a:lnTo>
+                  <a:pt x="10731500" y="1073150"/>
+                </a:lnTo>
+                <a:close/>
+              </a:path>
+            </a:pathLst>
+          </a:custGeom>
+          <a:solidFill>
+            <a:schemeClr val="bg2">
+              <a:alpha val="92000"/>
+            </a:schemeClr>
+          </a:solidFill>
+          <a:ln>
+            <a:noFill/>
+          </a:ln>
+        </p:spPr>
+      </p:sp>
+      <p:sp>
+        <p:nvSpPr>
+          <p:cNvPr id="10" name="deco.end-triangle"/>
+          <p:cNvSpPr/>
+          <p:nvPr/>
+        </p:nvSpPr>
+        <p:spPr>
+          <a:xfrm>
+            <a:off x="10998200" y="5702300"/>
+            <a:ext cx="933450" cy="933450"/>
+          </a:xfrm>
+          <a:custGeom>
+            <a:avLst/>
+            <a:gdLst/>
+            <a:ahLst/>
+            <a:cxnLst/>
+            <a:rect l="l" t="t" r="r" b="b"/>
+            <a:pathLst>
+              <a:path w="933450" h="933450">
+                <a:moveTo>
+                  <a:pt x="933450" y="0"/>
+                </a:moveTo>
+                <a:lnTo>
+                  <a:pt x="933450" y="933450"/>
+                </a:lnTo>
+                <a:lnTo>
+                  <a:pt x="0" y="933450"/>
                 </a:lnTo>
                 <a:close/>
               </a:path>
@@ -14088,14 +13250,262 @@
       </p:sp>
       <p:sp>
         <p:nvSpPr>
-          <p:cNvPr id="13" name="txt.item.3"/>
+          <p:cNvPr id="11" name="txt.eyebrow"/>
           <p:cNvSpPr txBox="1"/>
           <p:nvPr/>
         </p:nvSpPr>
         <p:spPr>
-          <a:xfrm>
-            <a:off x="7366000" y="4876800"/>
-            <a:ext cx="4394200" cy="838200"/>
+          <a:xfrm rot="-2700000">
+            <a:off x="-431800" y="736600"/>
+            <a:ext cx="3048000" cy="711200"/>
+          </a:xfrm>
+          <a:prstGeom prst="rect">
+            <a:avLst/>
+          </a:prstGeom>
+          <a:noFill/>
+        </p:spPr>
+        <p:txBody>
+          <a:bodyPr wrap="none" lIns="0" tIns="0" rIns="0" bIns="0" anchor="ctr" rtlCol="0">
+            <a:noAutofit/>
+          </a:bodyPr>
+          <a:lstStyle/>
+          <a:p>
+            <a:pPr algn="ctr" eaLnBrk="1" hangingPunct="1" latinLnBrk="0">
+              <a:lnSpc>
+                <a:spcPts val="2600"/>
+              </a:lnSpc>
+            </a:pPr>
+            <a:r>
+              <a:rPr lang="ja-JP" altLang="en-US" sz="2050" b="0" spc="400">
+                <a:solidFill>
+                  <a:schemeClr val="bg1"/>
+                </a:solidFill>
+                <a:latin typeface="Barlow"/>
+                <a:ea typeface="Noto Sans JP"/>
+              </a:rPr>
+              <a:t>Impact</a:t>
+            </a:r>
+            <a:endParaRPr lang="ja-JP" altLang="en-US" sz="2050" b="0" dirty="0" spc="400"/>
+          </a:p>
+        </p:txBody>
+      </p:sp>
+      <p:sp>
+        <p:nvSpPr>
+          <p:cNvPr id="12" name="txt.headline"/>
+          <p:cNvSpPr txBox="1"/>
+          <p:nvPr/>
+        </p:nvSpPr>
+        <p:spPr>
+          <a:xfrm>
+            <a:off x="3416300" y="660400"/>
+            <a:ext cx="8382000" cy="787400"/>
+          </a:xfrm>
+          <a:prstGeom prst="rect">
+            <a:avLst/>
+          </a:prstGeom>
+          <a:noFill/>
+        </p:spPr>
+        <p:txBody>
+          <a:bodyPr wrap="square" lIns="0" tIns="0" rIns="0" bIns="0" anchor="ctr" rtlCol="0">
+            <a:noAutofit/>
+          </a:bodyPr>
+          <a:lstStyle/>
+          <a:p>
+            <a:pPr algn="l" eaLnBrk="1" hangingPunct="1" latinLnBrk="0">
+              <a:lnSpc>
+                <a:spcPts val="4000"/>
+              </a:lnSpc>
+            </a:pPr>
+            <a:r>
+              <a:rPr lang="ja-JP" altLang="en-US" sz="3250" b="0">
+                <a:solidFill>
+                  <a:schemeClr val="tx1"/>
+                </a:solidFill>
+                <a:latin typeface="Noto Serif JP"/>
+                <a:ea typeface="Noto Serif JP"/>
+              </a:rPr>
+              <a:t>期待する効果</a:t>
+            </a:r>
+            <a:endParaRPr lang="ja-JP" altLang="en-US" sz="3250" b="0" dirty="0"/>
+          </a:p>
+        </p:txBody>
+      </p:sp>
+      <p:sp>
+        <p:nvSpPr>
+          <p:cNvPr id="13" name="txt.label.1"/>
+          <p:cNvSpPr txBox="1"/>
+          <p:nvPr/>
+        </p:nvSpPr>
+        <p:spPr>
+          <a:xfrm>
+            <a:off x="3765550" y="2286000"/>
+            <a:ext cx="2286000" cy="406400"/>
+          </a:xfrm>
+          <a:prstGeom prst="rect">
+            <a:avLst/>
+          </a:prstGeom>
+          <a:noFill/>
+        </p:spPr>
+        <p:txBody>
+          <a:bodyPr wrap="square" lIns="0" tIns="0" rIns="0" bIns="0" anchor="t" rtlCol="0">
+            <a:noAutofit/>
+          </a:bodyPr>
+          <a:lstStyle/>
+          <a:p>
+            <a:pPr algn="l" eaLnBrk="1" hangingPunct="1" latinLnBrk="0">
+              <a:lnSpc>
+                <a:spcPts val="3000"/>
+              </a:lnSpc>
+            </a:pPr>
+            <a:r>
+              <a:rPr lang="ja-JP" altLang="en-US" sz="2300" b="1">
+                <a:solidFill>
+                  <a:schemeClr val="tx1"/>
+                </a:solidFill>
+                <a:latin typeface="Barlow"/>
+                <a:ea typeface="Noto Sans JP"/>
+              </a:rPr>
+              <a:t>段取り替え</a:t>
+            </a:r>
+            <a:endParaRPr lang="ja-JP" altLang="en-US" sz="2300" b="1" dirty="0"/>
+          </a:p>
+        </p:txBody>
+      </p:sp>
+      <p:sp>
+        <p:nvSpPr>
+          <p:cNvPr id="14" name="num.value.1"/>
+          <p:cNvSpPr txBox="1"/>
+          <p:nvPr/>
+        </p:nvSpPr>
+        <p:spPr>
+          <a:xfrm>
+            <a:off x="3765550" y="2692400"/>
+            <a:ext cx="2489200" cy="1320800"/>
+          </a:xfrm>
+          <a:prstGeom prst="rect">
+            <a:avLst/>
+          </a:prstGeom>
+          <a:noFill/>
+        </p:spPr>
+        <p:txBody>
+          <a:bodyPr wrap="square" lIns="0" tIns="0" rIns="0" bIns="0" anchor="t" rtlCol="0">
+            <a:noAutofit/>
+          </a:bodyPr>
+          <a:lstStyle/>
+          <a:p>
+            <a:pPr algn="l" eaLnBrk="1" hangingPunct="1" latinLnBrk="0">
+              <a:lnSpc>
+                <a:spcPts val="10400"/>
+              </a:lnSpc>
+            </a:pPr>
+            <a:r>
+              <a:rPr lang="ja-JP" altLang="en-US" sz="9900" b="0">
+                <a:solidFill>
+                  <a:schemeClr val="tx1"/>
+                </a:solidFill>
+                <a:latin typeface="Barlow"/>
+                <a:ea typeface="Noto Sans JP"/>
+              </a:rPr>
+              <a:t>20</a:t>
+            </a:r>
+            <a:endParaRPr lang="ja-JP" altLang="en-US" sz="9900" b="0" dirty="0"/>
+          </a:p>
+        </p:txBody>
+      </p:sp>
+      <p:sp>
+        <p:nvSpPr>
+          <p:cNvPr id="15" name="deco.value-1-rule"/>
+          <p:cNvSpPr/>
+          <p:nvPr/>
+        </p:nvSpPr>
+        <p:spPr>
+          <a:xfrm>
+            <a:off x="3708400" y="3848100"/>
+            <a:ext cx="1854200" cy="95250"/>
+          </a:xfrm>
+          <a:custGeom>
+            <a:avLst/>
+            <a:gdLst/>
+            <a:ahLst/>
+            <a:cxnLst/>
+            <a:rect l="l" t="t" r="r" b="b"/>
+            <a:pathLst>
+              <a:path w="1854200" h="95250">
+                <a:moveTo>
+                  <a:pt x="0" y="95250"/>
+                </a:moveTo>
+                <a:lnTo>
+                  <a:pt x="1854200" y="95250"/>
+                </a:lnTo>
+                <a:lnTo>
+                  <a:pt x="1765300" y="0"/>
+                </a:lnTo>
+                <a:lnTo>
+                  <a:pt x="95250" y="0"/>
+                </a:lnTo>
+                <a:close/>
+              </a:path>
+            </a:pathLst>
+          </a:custGeom>
+          <a:solidFill>
+            <a:schemeClr val="accent2"/>
+          </a:solidFill>
+          <a:ln>
+            <a:noFill/>
+          </a:ln>
+        </p:spPr>
+      </p:sp>
+      <p:sp>
+        <p:nvSpPr>
+          <p:cNvPr id="16" name="txt.unit.1"/>
+          <p:cNvSpPr txBox="1"/>
+          <p:nvPr/>
+        </p:nvSpPr>
+        <p:spPr>
+          <a:xfrm>
+            <a:off x="3765550" y="3962400"/>
+            <a:ext cx="1797050" cy="355600"/>
+          </a:xfrm>
+          <a:prstGeom prst="rect">
+            <a:avLst/>
+          </a:prstGeom>
+          <a:noFill/>
+        </p:spPr>
+        <p:txBody>
+          <a:bodyPr wrap="square" lIns="0" tIns="0" rIns="0" bIns="0" anchor="t" rtlCol="0">
+            <a:noAutofit/>
+          </a:bodyPr>
+          <a:lstStyle/>
+          <a:p>
+            <a:pPr algn="r" eaLnBrk="1" hangingPunct="1" latinLnBrk="0">
+              <a:lnSpc>
+                <a:spcPts val="2800"/>
+              </a:lnSpc>
+            </a:pPr>
+            <a:r>
+              <a:rPr lang="ja-JP" altLang="en-US" sz="2300" b="1">
+                <a:solidFill>
+                  <a:schemeClr val="tx1"/>
+                </a:solidFill>
+                <a:latin typeface="Barlow"/>
+                <a:ea typeface="Noto Sans JP"/>
+              </a:rPr>
+              <a:t>分</a:t>
+            </a:r>
+            <a:endParaRPr lang="ja-JP" altLang="en-US" sz="2300" b="1" dirty="0"/>
+          </a:p>
+        </p:txBody>
+      </p:sp>
+      <p:sp>
+        <p:nvSpPr>
+          <p:cNvPr id="17" name="txt.note.1"/>
+          <p:cNvSpPr txBox="1"/>
+          <p:nvPr/>
+        </p:nvSpPr>
+        <p:spPr>
+          <a:xfrm>
+            <a:off x="3841750" y="4368800"/>
+            <a:ext cx="2286000" cy="584200"/>
           </a:xfrm>
           <a:prstGeom prst="rect">
             <a:avLst/>
@@ -14114,16 +13524,507 @@
               </a:lnSpc>
             </a:pPr>
             <a:r>
-              <a:rPr lang="ja-JP" altLang="en-US" sz="1600" b="0">
+              <a:rPr lang="ja-JP" altLang="en-US" sz="1500" b="1">
                 <a:solidFill>
                   <a:schemeClr val="tx1"/>
                 </a:solidFill>
-                <a:latin typeface="Barlow Medium"/>
-                <a:ea typeface="Noto Sans JP Medium"/>
+                <a:latin typeface="Barlow"/>
+                <a:ea typeface="Noto Sans JP"/>
               </a:rPr>
-              <a:t>残業は月20時間から10時間へ減らします。</a:t>
-            </a:r>
-            <a:endParaRPr lang="ja-JP" altLang="en-US" sz="1600" b="0" dirty="0"/>
+              <a:t>平均45分から20分へ</a:t>
+            </a:r>
+            <a:endParaRPr lang="ja-JP" altLang="en-US" sz="1500" b="1" dirty="0"/>
+          </a:p>
+        </p:txBody>
+      </p:sp>
+      <p:sp>
+        <p:nvSpPr>
+          <p:cNvPr id="18" name="txt.label.2"/>
+          <p:cNvSpPr txBox="1"/>
+          <p:nvPr/>
+        </p:nvSpPr>
+        <p:spPr>
+          <a:xfrm>
+            <a:off x="6318250" y="2286000"/>
+            <a:ext cx="2286000" cy="406400"/>
+          </a:xfrm>
+          <a:prstGeom prst="rect">
+            <a:avLst/>
+          </a:prstGeom>
+          <a:noFill/>
+        </p:spPr>
+        <p:txBody>
+          <a:bodyPr wrap="square" lIns="0" tIns="0" rIns="0" bIns="0" anchor="t" rtlCol="0">
+            <a:noAutofit/>
+          </a:bodyPr>
+          <a:lstStyle/>
+          <a:p>
+            <a:pPr algn="l" eaLnBrk="1" hangingPunct="1" latinLnBrk="0">
+              <a:lnSpc>
+                <a:spcPts val="3000"/>
+              </a:lnSpc>
+            </a:pPr>
+            <a:r>
+              <a:rPr lang="ja-JP" altLang="en-US" sz="2300" b="1">
+                <a:solidFill>
+                  <a:schemeClr val="tx1"/>
+                </a:solidFill>
+                <a:latin typeface="Barlow"/>
+                <a:ea typeface="Noto Sans JP"/>
+              </a:rPr>
+              <a:t>月の残業</a:t>
+            </a:r>
+            <a:endParaRPr lang="ja-JP" altLang="en-US" sz="2300" b="1" dirty="0"/>
+          </a:p>
+        </p:txBody>
+      </p:sp>
+      <p:sp>
+        <p:nvSpPr>
+          <p:cNvPr id="19" name="num.value.2"/>
+          <p:cNvSpPr txBox="1"/>
+          <p:nvPr/>
+        </p:nvSpPr>
+        <p:spPr>
+          <a:xfrm>
+            <a:off x="6318250" y="2692400"/>
+            <a:ext cx="3276600" cy="1320800"/>
+          </a:xfrm>
+          <a:prstGeom prst="rect">
+            <a:avLst/>
+          </a:prstGeom>
+          <a:noFill/>
+        </p:spPr>
+        <p:txBody>
+          <a:bodyPr wrap="square" lIns="0" tIns="0" rIns="0" bIns="0" anchor="t" rtlCol="0">
+            <a:noAutofit/>
+          </a:bodyPr>
+          <a:lstStyle/>
+          <a:p>
+            <a:pPr algn="l" eaLnBrk="1" hangingPunct="1" latinLnBrk="0">
+              <a:lnSpc>
+                <a:spcPts val="10400"/>
+              </a:lnSpc>
+            </a:pPr>
+            <a:r>
+              <a:rPr lang="ja-JP" altLang="en-US" sz="9900" b="0">
+                <a:solidFill>
+                  <a:schemeClr val="tx1"/>
+                </a:solidFill>
+                <a:latin typeface="Barlow"/>
+                <a:ea typeface="Noto Sans JP"/>
+              </a:rPr>
+              <a:t>10</a:t>
+            </a:r>
+            <a:endParaRPr lang="ja-JP" altLang="en-US" sz="9900" b="0" dirty="0"/>
+          </a:p>
+        </p:txBody>
+      </p:sp>
+      <p:sp>
+        <p:nvSpPr>
+          <p:cNvPr id="20" name="deco.value-2-rule"/>
+          <p:cNvSpPr/>
+          <p:nvPr/>
+        </p:nvSpPr>
+        <p:spPr>
+          <a:xfrm>
+            <a:off x="6261100" y="3848100"/>
+            <a:ext cx="1854200" cy="95250"/>
+          </a:xfrm>
+          <a:custGeom>
+            <a:avLst/>
+            <a:gdLst/>
+            <a:ahLst/>
+            <a:cxnLst/>
+            <a:rect l="l" t="t" r="r" b="b"/>
+            <a:pathLst>
+              <a:path w="1854200" h="95250">
+                <a:moveTo>
+                  <a:pt x="0" y="95250"/>
+                </a:moveTo>
+                <a:lnTo>
+                  <a:pt x="1854200" y="95250"/>
+                </a:lnTo>
+                <a:lnTo>
+                  <a:pt x="1765300" y="0"/>
+                </a:lnTo>
+                <a:lnTo>
+                  <a:pt x="95250" y="0"/>
+                </a:lnTo>
+                <a:close/>
+              </a:path>
+            </a:pathLst>
+          </a:custGeom>
+          <a:solidFill>
+            <a:schemeClr val="accent2"/>
+          </a:solidFill>
+          <a:ln>
+            <a:noFill/>
+          </a:ln>
+        </p:spPr>
+      </p:sp>
+      <p:sp>
+        <p:nvSpPr>
+          <p:cNvPr id="21" name="txt.unit.2"/>
+          <p:cNvSpPr txBox="1"/>
+          <p:nvPr/>
+        </p:nvSpPr>
+        <p:spPr>
+          <a:xfrm>
+            <a:off x="6318250" y="3962400"/>
+            <a:ext cx="1797050" cy="355600"/>
+          </a:xfrm>
+          <a:prstGeom prst="rect">
+            <a:avLst/>
+          </a:prstGeom>
+          <a:noFill/>
+        </p:spPr>
+        <p:txBody>
+          <a:bodyPr wrap="square" lIns="0" tIns="0" rIns="0" bIns="0" anchor="t" rtlCol="0">
+            <a:noAutofit/>
+          </a:bodyPr>
+          <a:lstStyle/>
+          <a:p>
+            <a:pPr algn="r" eaLnBrk="1" hangingPunct="1" latinLnBrk="0">
+              <a:lnSpc>
+                <a:spcPts val="2800"/>
+              </a:lnSpc>
+            </a:pPr>
+            <a:r>
+              <a:rPr lang="ja-JP" altLang="en-US" sz="2300" b="1">
+                <a:solidFill>
+                  <a:schemeClr val="tx1"/>
+                </a:solidFill>
+                <a:latin typeface="Barlow"/>
+                <a:ea typeface="Noto Sans JP"/>
+              </a:rPr>
+              <a:t>時間</a:t>
+            </a:r>
+            <a:endParaRPr lang="ja-JP" altLang="en-US" sz="2300" b="1" dirty="0"/>
+          </a:p>
+        </p:txBody>
+      </p:sp>
+      <p:sp>
+        <p:nvSpPr>
+          <p:cNvPr id="22" name="txt.note.2"/>
+          <p:cNvSpPr txBox="1"/>
+          <p:nvPr/>
+        </p:nvSpPr>
+        <p:spPr>
+          <a:xfrm>
+            <a:off x="6394450" y="4368800"/>
+            <a:ext cx="2286000" cy="584200"/>
+          </a:xfrm>
+          <a:prstGeom prst="rect">
+            <a:avLst/>
+          </a:prstGeom>
+          <a:noFill/>
+        </p:spPr>
+        <p:txBody>
+          <a:bodyPr wrap="square" lIns="0" tIns="0" rIns="0" bIns="0" anchor="t" rtlCol="0">
+            <a:noAutofit/>
+          </a:bodyPr>
+          <a:lstStyle/>
+          <a:p>
+            <a:pPr algn="l" eaLnBrk="1" hangingPunct="1" latinLnBrk="0">
+              <a:lnSpc>
+                <a:spcPts val="2200"/>
+              </a:lnSpc>
+            </a:pPr>
+            <a:r>
+              <a:rPr lang="ja-JP" altLang="en-US" sz="1500" b="1">
+                <a:solidFill>
+                  <a:schemeClr val="tx1"/>
+                </a:solidFill>
+                <a:latin typeface="Barlow"/>
+                <a:ea typeface="Noto Sans JP"/>
+              </a:rPr>
+              <a:t>1人月20時間から</a:t>
+            </a:r>
+            <a:endParaRPr lang="ja-JP" altLang="en-US" sz="1500" b="1" dirty="0"/>
+          </a:p>
+          <a:p>
+            <a:pPr algn="l" eaLnBrk="1" hangingPunct="1" latinLnBrk="0">
+              <a:lnSpc>
+                <a:spcPts val="2200"/>
+              </a:lnSpc>
+            </a:pPr>
+            <a:r>
+              <a:rPr lang="ja-JP" altLang="en-US" sz="1500" b="1">
+                <a:solidFill>
+                  <a:schemeClr val="tx1"/>
+                </a:solidFill>
+                <a:latin typeface="Barlow"/>
+                <a:ea typeface="Noto Sans JP"/>
+              </a:rPr>
+              <a:t>10時間へ</a:t>
+            </a:r>
+            <a:endParaRPr lang="ja-JP" altLang="en-US" sz="1500" b="1" dirty="0"/>
+          </a:p>
+        </p:txBody>
+      </p:sp>
+      <p:sp>
+        <p:nvSpPr>
+          <p:cNvPr id="23" name="txt.label.3"/>
+          <p:cNvSpPr txBox="1"/>
+          <p:nvPr/>
+        </p:nvSpPr>
+        <p:spPr>
+          <a:xfrm>
+            <a:off x="9683750" y="2286000"/>
+            <a:ext cx="2286000" cy="406400"/>
+          </a:xfrm>
+          <a:prstGeom prst="rect">
+            <a:avLst/>
+          </a:prstGeom>
+          <a:noFill/>
+        </p:spPr>
+        <p:txBody>
+          <a:bodyPr wrap="square" lIns="0" tIns="0" rIns="0" bIns="0" anchor="t" rtlCol="0">
+            <a:noAutofit/>
+          </a:bodyPr>
+          <a:lstStyle/>
+          <a:p>
+            <a:pPr algn="l" eaLnBrk="1" hangingPunct="1" latinLnBrk="0">
+              <a:lnSpc>
+                <a:spcPts val="3000"/>
+              </a:lnSpc>
+            </a:pPr>
+            <a:r>
+              <a:rPr lang="ja-JP" altLang="en-US" sz="2300" b="1">
+                <a:solidFill>
+                  <a:schemeClr val="tx1"/>
+                </a:solidFill>
+                <a:latin typeface="Barlow"/>
+                <a:ea typeface="Noto Sans JP"/>
+              </a:rPr>
+              <a:t>若手育成</a:t>
+            </a:r>
+            <a:endParaRPr lang="ja-JP" altLang="en-US" sz="2300" b="1" dirty="0"/>
+          </a:p>
+        </p:txBody>
+      </p:sp>
+      <p:sp>
+        <p:nvSpPr>
+          <p:cNvPr id="24" name="num.value.3"/>
+          <p:cNvSpPr txBox="1"/>
+          <p:nvPr/>
+        </p:nvSpPr>
+        <p:spPr>
+          <a:xfrm>
+            <a:off x="9683750" y="2692400"/>
+            <a:ext cx="2413000" cy="1320800"/>
+          </a:xfrm>
+          <a:prstGeom prst="rect">
+            <a:avLst/>
+          </a:prstGeom>
+          <a:noFill/>
+        </p:spPr>
+        <p:txBody>
+          <a:bodyPr wrap="square" lIns="0" tIns="0" rIns="0" bIns="0" anchor="t" rtlCol="0">
+            <a:noAutofit/>
+          </a:bodyPr>
+          <a:lstStyle/>
+          <a:p>
+            <a:pPr algn="l" eaLnBrk="1" hangingPunct="1" latinLnBrk="0">
+              <a:lnSpc>
+                <a:spcPts val="10400"/>
+              </a:lnSpc>
+            </a:pPr>
+            <a:r>
+              <a:rPr lang="ja-JP" altLang="en-US" sz="9900" b="0">
+                <a:solidFill>
+                  <a:schemeClr val="tx1"/>
+                </a:solidFill>
+                <a:latin typeface="Barlow"/>
+                <a:ea typeface="Noto Sans JP"/>
+              </a:rPr>
+              <a:t>2</a:t>
+            </a:r>
+            <a:endParaRPr lang="ja-JP" altLang="en-US" sz="9900" b="0" dirty="0"/>
+          </a:p>
+        </p:txBody>
+      </p:sp>
+      <p:sp>
+        <p:nvSpPr>
+          <p:cNvPr id="25" name="deco.value-3-rule"/>
+          <p:cNvSpPr/>
+          <p:nvPr/>
+        </p:nvSpPr>
+        <p:spPr>
+          <a:xfrm>
+            <a:off x="9626600" y="3848100"/>
+            <a:ext cx="1854200" cy="95250"/>
+          </a:xfrm>
+          <a:custGeom>
+            <a:avLst/>
+            <a:gdLst/>
+            <a:ahLst/>
+            <a:cxnLst/>
+            <a:rect l="l" t="t" r="r" b="b"/>
+            <a:pathLst>
+              <a:path w="1854200" h="95250">
+                <a:moveTo>
+                  <a:pt x="0" y="95250"/>
+                </a:moveTo>
+                <a:lnTo>
+                  <a:pt x="1854200" y="95250"/>
+                </a:lnTo>
+                <a:lnTo>
+                  <a:pt x="1765300" y="0"/>
+                </a:lnTo>
+                <a:lnTo>
+                  <a:pt x="95250" y="0"/>
+                </a:lnTo>
+                <a:close/>
+              </a:path>
+            </a:pathLst>
+          </a:custGeom>
+          <a:solidFill>
+            <a:schemeClr val="accent2"/>
+          </a:solidFill>
+          <a:ln>
+            <a:noFill/>
+          </a:ln>
+        </p:spPr>
+      </p:sp>
+      <p:sp>
+        <p:nvSpPr>
+          <p:cNvPr id="26" name="txt.unit.3"/>
+          <p:cNvSpPr txBox="1"/>
+          <p:nvPr/>
+        </p:nvSpPr>
+        <p:spPr>
+          <a:xfrm>
+            <a:off x="9683750" y="3962400"/>
+            <a:ext cx="1797050" cy="355600"/>
+          </a:xfrm>
+          <a:prstGeom prst="rect">
+            <a:avLst/>
+          </a:prstGeom>
+          <a:noFill/>
+        </p:spPr>
+        <p:txBody>
+          <a:bodyPr wrap="square" lIns="0" tIns="0" rIns="0" bIns="0" anchor="t" rtlCol="0">
+            <a:noAutofit/>
+          </a:bodyPr>
+          <a:lstStyle/>
+          <a:p>
+            <a:pPr algn="r" eaLnBrk="1" hangingPunct="1" latinLnBrk="0">
+              <a:lnSpc>
+                <a:spcPts val="2800"/>
+              </a:lnSpc>
+            </a:pPr>
+            <a:r>
+              <a:rPr lang="ja-JP" altLang="en-US" sz="2300" b="1">
+                <a:solidFill>
+                  <a:schemeClr val="tx1"/>
+                </a:solidFill>
+                <a:latin typeface="Barlow"/>
+                <a:ea typeface="Noto Sans JP"/>
+              </a:rPr>
+              <a:t>時間</a:t>
+            </a:r>
+            <a:endParaRPr lang="ja-JP" altLang="en-US" sz="2300" b="1" dirty="0"/>
+          </a:p>
+        </p:txBody>
+      </p:sp>
+      <p:sp>
+        <p:nvSpPr>
+          <p:cNvPr id="27" name="txt.note.3"/>
+          <p:cNvSpPr txBox="1"/>
+          <p:nvPr/>
+        </p:nvSpPr>
+        <p:spPr>
+          <a:xfrm>
+            <a:off x="9759950" y="4368800"/>
+            <a:ext cx="2286000" cy="584200"/>
+          </a:xfrm>
+          <a:prstGeom prst="rect">
+            <a:avLst/>
+          </a:prstGeom>
+          <a:noFill/>
+        </p:spPr>
+        <p:txBody>
+          <a:bodyPr wrap="square" lIns="0" tIns="0" rIns="0" bIns="0" anchor="t" rtlCol="0">
+            <a:noAutofit/>
+          </a:bodyPr>
+          <a:lstStyle/>
+          <a:p>
+            <a:pPr algn="l" eaLnBrk="1" hangingPunct="1" latinLnBrk="0">
+              <a:lnSpc>
+                <a:spcPts val="2200"/>
+              </a:lnSpc>
+            </a:pPr>
+            <a:r>
+              <a:rPr lang="ja-JP" altLang="en-US" sz="1500" b="1">
+                <a:solidFill>
+                  <a:schemeClr val="tx1"/>
+                </a:solidFill>
+                <a:latin typeface="Barlow"/>
+                <a:ea typeface="Noto Sans JP"/>
+              </a:rPr>
+              <a:t>毎週、熟練者が</a:t>
+            </a:r>
+            <a:endParaRPr lang="ja-JP" altLang="en-US" sz="1500" b="1" dirty="0"/>
+          </a:p>
+          <a:p>
+            <a:pPr algn="l" eaLnBrk="1" hangingPunct="1" latinLnBrk="0">
+              <a:lnSpc>
+                <a:spcPts val="2200"/>
+              </a:lnSpc>
+            </a:pPr>
+            <a:r>
+              <a:rPr lang="ja-JP" altLang="en-US" sz="1500" b="1">
+                <a:solidFill>
+                  <a:schemeClr val="tx1"/>
+                </a:solidFill>
+                <a:latin typeface="Barlow"/>
+                <a:ea typeface="Noto Sans JP"/>
+              </a:rPr>
+              <a:t>若手に教える時間</a:t>
+            </a:r>
+            <a:endParaRPr lang="ja-JP" altLang="en-US" sz="1500" b="1" dirty="0"/>
+          </a:p>
+        </p:txBody>
+      </p:sp>
+      <p:sp>
+        <p:nvSpPr>
+          <p:cNvPr id="28" name="txt.footnote"/>
+          <p:cNvSpPr txBox="1"/>
+          <p:nvPr/>
+        </p:nvSpPr>
+        <p:spPr>
+          <a:xfrm>
+            <a:off x="3816350" y="5867400"/>
+            <a:ext cx="7620000" cy="558800"/>
+          </a:xfrm>
+          <a:prstGeom prst="rect">
+            <a:avLst/>
+          </a:prstGeom>
+          <a:noFill/>
+        </p:spPr>
+        <p:txBody>
+          <a:bodyPr wrap="square" lIns="0" tIns="0" rIns="0" bIns="0" anchor="t" rtlCol="0">
+            <a:noAutofit/>
+          </a:bodyPr>
+          <a:lstStyle/>
+          <a:p>
+            <a:pPr algn="l" eaLnBrk="1" hangingPunct="1" latinLnBrk="0">
+              <a:lnSpc>
+                <a:spcPts val="2200"/>
+              </a:lnSpc>
+            </a:pPr>
+            <a:r>
+              <a:rPr lang="ja-JP" altLang="en-US" sz="1300" b="1">
+                <a:solidFill>
+                  <a:schemeClr val="tx1"/>
+                </a:solidFill>
+                <a:latin typeface="Barlow"/>
+                <a:ea typeface="Noto Sans JP"/>
+              </a:rPr>
+              <a:t>浮いた時間は、若手の育成に使います。</a:t>
+            </a:r>
+            <a:endParaRPr lang="ja-JP" altLang="en-US" sz="1300" b="1" dirty="0"/>
           </a:p>
         </p:txBody>
       </p:sp>
@@ -14473,7 +14374,7 @@
                 <a:latin typeface="Noto Serif JP"/>
                 <a:ea typeface="Noto Serif JP"/>
               </a:rPr>
-              <a:t>小さく始めて一歩ずつ</a:t>
+              <a:t>小さく始めて、一歩ずつ</a:t>
             </a:r>
             <a:endParaRPr lang="ja-JP" altLang="en-US" sz="3250" b="0" dirty="0"/>
           </a:p>
@@ -14506,6 +14407,16 @@
                 <a:spcPts val="2100"/>
               </a:lnSpc>
             </a:pPr>
+            <a:r>
+              <a:rPr lang="ja-JP" altLang="en-US" sz="1500" b="1">
+                <a:solidFill>
+                  <a:schemeClr val="tx1"/>
+                </a:solidFill>
+                <a:latin typeface="Barlow"/>
+                <a:ea typeface="Noto Sans JP"/>
+              </a:rPr>
+              <a:t>工場で働く</a:t>
+            </a:r>
             <a:r>
               <a:rPr lang="ja-JP" altLang="en-US" sz="1500" b="1" u="heavy">
                 <a:solidFill>
@@ -14529,7 +14440,25 @@
                 <a:latin typeface="Barlow"/>
                 <a:ea typeface="Noto Sans JP"/>
               </a:rPr>
-              <a:t>でつくる計画です</a:t>
+              <a:t>で</a:t>
+            </a:r>
+            <a:endParaRPr lang="ja-JP" altLang="en-US" sz="1500" b="1" dirty="0"/>
+          </a:p>
+          <a:p>
+            <a:pPr algn="l" eaLnBrk="1" hangingPunct="1" latinLnBrk="0">
+              <a:lnSpc>
+                <a:spcPts val="2100"/>
+              </a:lnSpc>
+            </a:pPr>
+            <a:r>
+              <a:rPr lang="ja-JP" altLang="en-US" sz="1500" b="1">
+                <a:solidFill>
+                  <a:schemeClr val="tx1"/>
+                </a:solidFill>
+                <a:latin typeface="Barlow"/>
+                <a:ea typeface="Noto Sans JP"/>
+              </a:rPr>
+              <a:t>つくる計画です。</a:t>
             </a:r>
             <a:endParaRPr lang="ja-JP" altLang="en-US" sz="1500" b="1" dirty="0"/>
           </a:p>
